--- a/docs/需求建模/提交版/作业2-学术成果分享平台-需求建模汇报.pptx
+++ b/docs/需求建模/提交版/作业2-学术成果分享平台-需求建模汇报.pptx
@@ -22,94 +22,103 @@
   <p:sldSz cx="12192000" cy="6858000"/>
   <p:notesSz cx="6858000" cy="9144000"/>
   <p:defaultTextStyle>
-    <a:lvl1pPr marL="0" algn="l" defTabSz="914400" rtl="0" eaLnBrk="1" latinLnBrk="0" hangingPunct="1">
+    <a:lvl1pPr marL="0" algn="l" defTabSz="914400">
+      <a:buNone/>
       <a:defRPr sz="1800" kern="1200">
         <a:solidFill>
           <a:schemeClr val="tx1"/>
         </a:solidFill>
         <a:latin typeface="+mn-lt"/>
-        <a:ea typeface="+mn-ea"/>
-        <a:cs typeface="+mn-cs"/>
+        <a:ea typeface="+mn-lt"/>
+        <a:cs typeface="+mn-lt"/>
       </a:defRPr>
     </a:lvl1pPr>
-    <a:lvl2pPr marL="457200" algn="l" defTabSz="914400" rtl="0" eaLnBrk="1" latinLnBrk="0" hangingPunct="1">
+    <a:lvl2pPr marL="457200" algn="l" defTabSz="914400">
+      <a:buNone/>
       <a:defRPr sz="1800" kern="1200">
         <a:solidFill>
           <a:schemeClr val="tx1"/>
         </a:solidFill>
         <a:latin typeface="+mn-lt"/>
-        <a:ea typeface="+mn-ea"/>
-        <a:cs typeface="+mn-cs"/>
+        <a:ea typeface="+mn-lt"/>
+        <a:cs typeface="+mn-lt"/>
       </a:defRPr>
     </a:lvl2pPr>
-    <a:lvl3pPr marL="914400" algn="l" defTabSz="914400" rtl="0" eaLnBrk="1" latinLnBrk="0" hangingPunct="1">
+    <a:lvl3pPr marL="914400" algn="l" defTabSz="914400">
+      <a:buNone/>
       <a:defRPr sz="1800" kern="1200">
         <a:solidFill>
           <a:schemeClr val="tx1"/>
         </a:solidFill>
         <a:latin typeface="+mn-lt"/>
-        <a:ea typeface="+mn-ea"/>
-        <a:cs typeface="+mn-cs"/>
+        <a:ea typeface="+mn-lt"/>
+        <a:cs typeface="+mn-lt"/>
       </a:defRPr>
     </a:lvl3pPr>
-    <a:lvl4pPr marL="1371600" algn="l" defTabSz="914400" rtl="0" eaLnBrk="1" latinLnBrk="0" hangingPunct="1">
+    <a:lvl4pPr marL="1371600" algn="l" defTabSz="914400">
+      <a:buNone/>
       <a:defRPr sz="1800" kern="1200">
         <a:solidFill>
           <a:schemeClr val="tx1"/>
         </a:solidFill>
         <a:latin typeface="+mn-lt"/>
-        <a:ea typeface="+mn-ea"/>
-        <a:cs typeface="+mn-cs"/>
+        <a:ea typeface="+mn-lt"/>
+        <a:cs typeface="+mn-lt"/>
       </a:defRPr>
     </a:lvl4pPr>
-    <a:lvl5pPr marL="1828800" algn="l" defTabSz="914400" rtl="0" eaLnBrk="1" latinLnBrk="0" hangingPunct="1">
+    <a:lvl5pPr marL="1828800" algn="l" defTabSz="914400">
+      <a:buNone/>
       <a:defRPr sz="1800" kern="1200">
         <a:solidFill>
           <a:schemeClr val="tx1"/>
         </a:solidFill>
         <a:latin typeface="+mn-lt"/>
-        <a:ea typeface="+mn-ea"/>
-        <a:cs typeface="+mn-cs"/>
+        <a:ea typeface="+mn-lt"/>
+        <a:cs typeface="+mn-lt"/>
       </a:defRPr>
     </a:lvl5pPr>
-    <a:lvl6pPr marL="2286000" algn="l" defTabSz="914400" rtl="0" eaLnBrk="1" latinLnBrk="0" hangingPunct="1">
+    <a:lvl6pPr marL="2286000" algn="l" defTabSz="914400">
+      <a:buNone/>
       <a:defRPr sz="1800" kern="1200">
         <a:solidFill>
           <a:schemeClr val="tx1"/>
         </a:solidFill>
         <a:latin typeface="+mn-lt"/>
-        <a:ea typeface="+mn-ea"/>
-        <a:cs typeface="+mn-cs"/>
+        <a:ea typeface="+mn-lt"/>
+        <a:cs typeface="+mn-lt"/>
       </a:defRPr>
     </a:lvl6pPr>
-    <a:lvl7pPr marL="2743200" algn="l" defTabSz="914400" rtl="0" eaLnBrk="1" latinLnBrk="0" hangingPunct="1">
+    <a:lvl7pPr marL="2743200" algn="l" defTabSz="914400">
+      <a:buNone/>
       <a:defRPr sz="1800" kern="1200">
         <a:solidFill>
           <a:schemeClr val="tx1"/>
         </a:solidFill>
         <a:latin typeface="+mn-lt"/>
-        <a:ea typeface="+mn-ea"/>
-        <a:cs typeface="+mn-cs"/>
+        <a:ea typeface="+mn-lt"/>
+        <a:cs typeface="+mn-lt"/>
       </a:defRPr>
     </a:lvl7pPr>
-    <a:lvl8pPr marL="3200400" algn="l" defTabSz="914400" rtl="0" eaLnBrk="1" latinLnBrk="0" hangingPunct="1">
+    <a:lvl8pPr marL="3200400" algn="l" defTabSz="914400">
+      <a:buNone/>
       <a:defRPr sz="1800" kern="1200">
         <a:solidFill>
           <a:schemeClr val="tx1"/>
         </a:solidFill>
         <a:latin typeface="+mn-lt"/>
-        <a:ea typeface="+mn-ea"/>
-        <a:cs typeface="+mn-cs"/>
+        <a:ea typeface="+mn-lt"/>
+        <a:cs typeface="+mn-lt"/>
       </a:defRPr>
     </a:lvl8pPr>
-    <a:lvl9pPr marL="3657600" algn="l" defTabSz="914400" rtl="0" eaLnBrk="1" latinLnBrk="0" hangingPunct="1">
+    <a:lvl9pPr marL="3657600" algn="l" defTabSz="914400">
+      <a:buNone/>
       <a:defRPr sz="1800" kern="1200">
         <a:solidFill>
           <a:schemeClr val="tx1"/>
         </a:solidFill>
         <a:latin typeface="+mn-lt"/>
-        <a:ea typeface="+mn-ea"/>
-        <a:cs typeface="+mn-cs"/>
+        <a:ea typeface="+mn-lt"/>
+        <a:cs typeface="+mn-lt"/>
       </a:defRPr>
     </a:lvl9pPr>
   </p:defaultTextStyle>
@@ -945,15 +954,42 @@
                 <a:cs typeface="+mj-lt"/>
               </a:defRPr>
             </a:defPPr>
-            <a:lvl1pPr/>
-            <a:lvl2pPr/>
-            <a:lvl3pPr/>
-            <a:lvl4pPr/>
-            <a:lvl5pPr/>
-            <a:lvl6pPr/>
-            <a:lvl7pPr/>
-            <a:lvl8pPr/>
-            <a:lvl9pPr/>
+            <a:lvl1pPr>
+              <a:buNone/>
+              <a:defRPr/>
+            </a:lvl1pPr>
+            <a:lvl2pPr>
+              <a:buNone/>
+              <a:defRPr/>
+            </a:lvl2pPr>
+            <a:lvl3pPr>
+              <a:buNone/>
+              <a:defRPr/>
+            </a:lvl3pPr>
+            <a:lvl4pPr>
+              <a:buNone/>
+              <a:defRPr/>
+            </a:lvl4pPr>
+            <a:lvl5pPr>
+              <a:buNone/>
+              <a:defRPr/>
+            </a:lvl5pPr>
+            <a:lvl6pPr>
+              <a:buNone/>
+              <a:defRPr/>
+            </a:lvl6pPr>
+            <a:lvl7pPr>
+              <a:buNone/>
+              <a:defRPr/>
+            </a:lvl7pPr>
+            <a:lvl8pPr>
+              <a:buNone/>
+              <a:defRPr/>
+            </a:lvl8pPr>
+            <a:lvl9pPr>
+              <a:buNone/>
+              <a:defRPr/>
+            </a:lvl9pPr>
           </a:lstStyle>
           <a:p/>
         </p:txBody>
@@ -997,15 +1033,42 @@
                 <a:cs typeface="+mn-lt"/>
               </a:defRPr>
             </a:defPPr>
-            <a:lvl1pPr/>
-            <a:lvl2pPr/>
-            <a:lvl3pPr/>
-            <a:lvl4pPr/>
-            <a:lvl5pPr/>
-            <a:lvl6pPr/>
-            <a:lvl7pPr/>
-            <a:lvl8pPr/>
-            <a:lvl9pPr/>
+            <a:lvl1pPr>
+              <a:buNone/>
+              <a:defRPr/>
+            </a:lvl1pPr>
+            <a:lvl2pPr>
+              <a:buNone/>
+              <a:defRPr/>
+            </a:lvl2pPr>
+            <a:lvl3pPr>
+              <a:buNone/>
+              <a:defRPr/>
+            </a:lvl3pPr>
+            <a:lvl4pPr>
+              <a:buNone/>
+              <a:defRPr/>
+            </a:lvl4pPr>
+            <a:lvl5pPr>
+              <a:buNone/>
+              <a:defRPr/>
+            </a:lvl5pPr>
+            <a:lvl6pPr>
+              <a:buNone/>
+              <a:defRPr/>
+            </a:lvl6pPr>
+            <a:lvl7pPr>
+              <a:buNone/>
+              <a:defRPr/>
+            </a:lvl7pPr>
+            <a:lvl8pPr>
+              <a:buNone/>
+              <a:defRPr/>
+            </a:lvl8pPr>
+            <a:lvl9pPr>
+              <a:buNone/>
+              <a:defRPr/>
+            </a:lvl9pPr>
           </a:lstStyle>
           <a:p/>
         </p:txBody>
@@ -1067,15 +1130,42 @@
                 <a:cs typeface="+mj-lt"/>
               </a:defRPr>
             </a:defPPr>
-            <a:lvl1pPr/>
-            <a:lvl2pPr/>
-            <a:lvl3pPr/>
-            <a:lvl4pPr/>
-            <a:lvl5pPr/>
-            <a:lvl6pPr/>
-            <a:lvl7pPr/>
-            <a:lvl8pPr/>
-            <a:lvl9pPr/>
+            <a:lvl1pPr>
+              <a:buNone/>
+              <a:defRPr/>
+            </a:lvl1pPr>
+            <a:lvl2pPr>
+              <a:buNone/>
+              <a:defRPr/>
+            </a:lvl2pPr>
+            <a:lvl3pPr>
+              <a:buNone/>
+              <a:defRPr/>
+            </a:lvl3pPr>
+            <a:lvl4pPr>
+              <a:buNone/>
+              <a:defRPr/>
+            </a:lvl4pPr>
+            <a:lvl5pPr>
+              <a:buNone/>
+              <a:defRPr/>
+            </a:lvl5pPr>
+            <a:lvl6pPr>
+              <a:buNone/>
+              <a:defRPr/>
+            </a:lvl6pPr>
+            <a:lvl7pPr>
+              <a:buNone/>
+              <a:defRPr/>
+            </a:lvl7pPr>
+            <a:lvl8pPr>
+              <a:buNone/>
+              <a:defRPr/>
+            </a:lvl8pPr>
+            <a:lvl9pPr>
+              <a:buNone/>
+              <a:defRPr/>
+            </a:lvl9pPr>
           </a:lstStyle>
           <a:p/>
         </p:txBody>
@@ -1137,15 +1227,42 @@
                 <a:cs typeface="+mj-lt"/>
               </a:defRPr>
             </a:defPPr>
-            <a:lvl1pPr/>
-            <a:lvl2pPr/>
-            <a:lvl3pPr/>
-            <a:lvl4pPr/>
-            <a:lvl5pPr/>
-            <a:lvl6pPr/>
-            <a:lvl7pPr/>
-            <a:lvl8pPr/>
-            <a:lvl9pPr/>
+            <a:lvl1pPr>
+              <a:buNone/>
+              <a:defRPr/>
+            </a:lvl1pPr>
+            <a:lvl2pPr>
+              <a:buNone/>
+              <a:defRPr/>
+            </a:lvl2pPr>
+            <a:lvl3pPr>
+              <a:buNone/>
+              <a:defRPr/>
+            </a:lvl3pPr>
+            <a:lvl4pPr>
+              <a:buNone/>
+              <a:defRPr/>
+            </a:lvl4pPr>
+            <a:lvl5pPr>
+              <a:buNone/>
+              <a:defRPr/>
+            </a:lvl5pPr>
+            <a:lvl6pPr>
+              <a:buNone/>
+              <a:defRPr/>
+            </a:lvl6pPr>
+            <a:lvl7pPr>
+              <a:buNone/>
+              <a:defRPr/>
+            </a:lvl7pPr>
+            <a:lvl8pPr>
+              <a:buNone/>
+              <a:defRPr/>
+            </a:lvl8pPr>
+            <a:lvl9pPr>
+              <a:buNone/>
+              <a:defRPr/>
+            </a:lvl9pPr>
           </a:lstStyle>
           <a:p/>
         </p:txBody>
@@ -1189,15 +1306,42 @@
                 <a:cs typeface="+mn-lt"/>
               </a:defRPr>
             </a:defPPr>
-            <a:lvl1pPr/>
-            <a:lvl2pPr/>
-            <a:lvl3pPr/>
-            <a:lvl4pPr/>
-            <a:lvl5pPr/>
-            <a:lvl6pPr/>
-            <a:lvl7pPr/>
-            <a:lvl8pPr/>
-            <a:lvl9pPr/>
+            <a:lvl1pPr>
+              <a:buNone/>
+              <a:defRPr/>
+            </a:lvl1pPr>
+            <a:lvl2pPr>
+              <a:buNone/>
+              <a:defRPr/>
+            </a:lvl2pPr>
+            <a:lvl3pPr>
+              <a:buNone/>
+              <a:defRPr/>
+            </a:lvl3pPr>
+            <a:lvl4pPr>
+              <a:buNone/>
+              <a:defRPr/>
+            </a:lvl4pPr>
+            <a:lvl5pPr>
+              <a:buNone/>
+              <a:defRPr/>
+            </a:lvl5pPr>
+            <a:lvl6pPr>
+              <a:buNone/>
+              <a:defRPr/>
+            </a:lvl6pPr>
+            <a:lvl7pPr>
+              <a:buNone/>
+              <a:defRPr/>
+            </a:lvl7pPr>
+            <a:lvl8pPr>
+              <a:buNone/>
+              <a:defRPr/>
+            </a:lvl8pPr>
+            <a:lvl9pPr>
+              <a:buNone/>
+              <a:defRPr/>
+            </a:lvl9pPr>
           </a:lstStyle>
           <a:p/>
         </p:txBody>
@@ -1259,15 +1403,42 @@
                 <a:cs typeface="+mj-lt"/>
               </a:defRPr>
             </a:defPPr>
-            <a:lvl1pPr/>
-            <a:lvl2pPr/>
-            <a:lvl3pPr/>
-            <a:lvl4pPr/>
-            <a:lvl5pPr/>
-            <a:lvl6pPr/>
-            <a:lvl7pPr/>
-            <a:lvl8pPr/>
-            <a:lvl9pPr/>
+            <a:lvl1pPr>
+              <a:buNone/>
+              <a:defRPr/>
+            </a:lvl1pPr>
+            <a:lvl2pPr>
+              <a:buNone/>
+              <a:defRPr/>
+            </a:lvl2pPr>
+            <a:lvl3pPr>
+              <a:buNone/>
+              <a:defRPr/>
+            </a:lvl3pPr>
+            <a:lvl4pPr>
+              <a:buNone/>
+              <a:defRPr/>
+            </a:lvl4pPr>
+            <a:lvl5pPr>
+              <a:buNone/>
+              <a:defRPr/>
+            </a:lvl5pPr>
+            <a:lvl6pPr>
+              <a:buNone/>
+              <a:defRPr/>
+            </a:lvl6pPr>
+            <a:lvl7pPr>
+              <a:buNone/>
+              <a:defRPr/>
+            </a:lvl7pPr>
+            <a:lvl8pPr>
+              <a:buNone/>
+              <a:defRPr/>
+            </a:lvl8pPr>
+            <a:lvl9pPr>
+              <a:buNone/>
+              <a:defRPr/>
+            </a:lvl9pPr>
           </a:lstStyle>
           <a:p/>
         </p:txBody>
@@ -1311,15 +1482,42 @@
                 <a:cs typeface="+mn-lt"/>
               </a:defRPr>
             </a:defPPr>
-            <a:lvl1pPr/>
-            <a:lvl2pPr/>
-            <a:lvl3pPr/>
-            <a:lvl4pPr/>
-            <a:lvl5pPr/>
-            <a:lvl6pPr/>
-            <a:lvl7pPr/>
-            <a:lvl8pPr/>
-            <a:lvl9pPr/>
+            <a:lvl1pPr>
+              <a:buNone/>
+              <a:defRPr/>
+            </a:lvl1pPr>
+            <a:lvl2pPr>
+              <a:buNone/>
+              <a:defRPr/>
+            </a:lvl2pPr>
+            <a:lvl3pPr>
+              <a:buNone/>
+              <a:defRPr/>
+            </a:lvl3pPr>
+            <a:lvl4pPr>
+              <a:buNone/>
+              <a:defRPr/>
+            </a:lvl4pPr>
+            <a:lvl5pPr>
+              <a:buNone/>
+              <a:defRPr/>
+            </a:lvl5pPr>
+            <a:lvl6pPr>
+              <a:buNone/>
+              <a:defRPr/>
+            </a:lvl6pPr>
+            <a:lvl7pPr>
+              <a:buNone/>
+              <a:defRPr/>
+            </a:lvl7pPr>
+            <a:lvl8pPr>
+              <a:buNone/>
+              <a:defRPr/>
+            </a:lvl8pPr>
+            <a:lvl9pPr>
+              <a:buNone/>
+              <a:defRPr/>
+            </a:lvl9pPr>
           </a:lstStyle>
           <a:p/>
         </p:txBody>
@@ -1363,15 +1561,42 @@
                 <a:cs typeface="+mn-lt"/>
               </a:defRPr>
             </a:defPPr>
-            <a:lvl1pPr/>
-            <a:lvl2pPr/>
-            <a:lvl3pPr/>
-            <a:lvl4pPr/>
-            <a:lvl5pPr/>
-            <a:lvl6pPr/>
-            <a:lvl7pPr/>
-            <a:lvl8pPr/>
-            <a:lvl9pPr/>
+            <a:lvl1pPr>
+              <a:buNone/>
+              <a:defRPr/>
+            </a:lvl1pPr>
+            <a:lvl2pPr>
+              <a:buNone/>
+              <a:defRPr/>
+            </a:lvl2pPr>
+            <a:lvl3pPr>
+              <a:buNone/>
+              <a:defRPr/>
+            </a:lvl3pPr>
+            <a:lvl4pPr>
+              <a:buNone/>
+              <a:defRPr/>
+            </a:lvl4pPr>
+            <a:lvl5pPr>
+              <a:buNone/>
+              <a:defRPr/>
+            </a:lvl5pPr>
+            <a:lvl6pPr>
+              <a:buNone/>
+              <a:defRPr/>
+            </a:lvl6pPr>
+            <a:lvl7pPr>
+              <a:buNone/>
+              <a:defRPr/>
+            </a:lvl7pPr>
+            <a:lvl8pPr>
+              <a:buNone/>
+              <a:defRPr/>
+            </a:lvl8pPr>
+            <a:lvl9pPr>
+              <a:buNone/>
+              <a:defRPr/>
+            </a:lvl9pPr>
           </a:lstStyle>
           <a:p/>
         </p:txBody>
@@ -1433,15 +1658,42 @@
                 <a:cs typeface="+mj-lt"/>
               </a:defRPr>
             </a:defPPr>
-            <a:lvl1pPr/>
-            <a:lvl2pPr/>
-            <a:lvl3pPr/>
-            <a:lvl4pPr/>
-            <a:lvl5pPr/>
-            <a:lvl6pPr/>
-            <a:lvl7pPr/>
-            <a:lvl8pPr/>
-            <a:lvl9pPr/>
+            <a:lvl1pPr>
+              <a:buNone/>
+              <a:defRPr/>
+            </a:lvl1pPr>
+            <a:lvl2pPr>
+              <a:buNone/>
+              <a:defRPr/>
+            </a:lvl2pPr>
+            <a:lvl3pPr>
+              <a:buNone/>
+              <a:defRPr/>
+            </a:lvl3pPr>
+            <a:lvl4pPr>
+              <a:buNone/>
+              <a:defRPr/>
+            </a:lvl4pPr>
+            <a:lvl5pPr>
+              <a:buNone/>
+              <a:defRPr/>
+            </a:lvl5pPr>
+            <a:lvl6pPr>
+              <a:buNone/>
+              <a:defRPr/>
+            </a:lvl6pPr>
+            <a:lvl7pPr>
+              <a:buNone/>
+              <a:defRPr/>
+            </a:lvl7pPr>
+            <a:lvl8pPr>
+              <a:buNone/>
+              <a:defRPr/>
+            </a:lvl8pPr>
+            <a:lvl9pPr>
+              <a:buNone/>
+              <a:defRPr/>
+            </a:lvl9pPr>
           </a:lstStyle>
           <a:p/>
         </p:txBody>
@@ -1485,15 +1737,42 @@
                 <a:cs typeface="+mn-lt"/>
               </a:defRPr>
             </a:defPPr>
-            <a:lvl1pPr/>
-            <a:lvl2pPr/>
-            <a:lvl3pPr/>
-            <a:lvl4pPr/>
-            <a:lvl5pPr/>
-            <a:lvl6pPr/>
-            <a:lvl7pPr/>
-            <a:lvl8pPr/>
-            <a:lvl9pPr/>
+            <a:lvl1pPr>
+              <a:buNone/>
+              <a:defRPr/>
+            </a:lvl1pPr>
+            <a:lvl2pPr>
+              <a:buNone/>
+              <a:defRPr/>
+            </a:lvl2pPr>
+            <a:lvl3pPr>
+              <a:buNone/>
+              <a:defRPr/>
+            </a:lvl3pPr>
+            <a:lvl4pPr>
+              <a:buNone/>
+              <a:defRPr/>
+            </a:lvl4pPr>
+            <a:lvl5pPr>
+              <a:buNone/>
+              <a:defRPr/>
+            </a:lvl5pPr>
+            <a:lvl6pPr>
+              <a:buNone/>
+              <a:defRPr/>
+            </a:lvl6pPr>
+            <a:lvl7pPr>
+              <a:buNone/>
+              <a:defRPr/>
+            </a:lvl7pPr>
+            <a:lvl8pPr>
+              <a:buNone/>
+              <a:defRPr/>
+            </a:lvl8pPr>
+            <a:lvl9pPr>
+              <a:buNone/>
+              <a:defRPr/>
+            </a:lvl9pPr>
           </a:lstStyle>
           <a:p/>
         </p:txBody>
@@ -1836,7 +2115,7 @@
     <p:bg>
       <p:bgPr>
         <a:solidFill>
-          <a:srgbClr val="F7FAFC"/>
+          <a:srgbClr val="102A43"/>
         </a:solidFill>
         <a:effectLst/>
       </p:bgPr>
@@ -1876,7 +2155,7 @@
             <a:defPPr>
               <a:defRPr sz="1575" b="0">
                 <a:solidFill>
-                  <a:srgbClr val="5D7183"/>
+                  <a:srgbClr val="B3C8D6"/>
                 </a:solidFill>
                 <a:latin typeface="Hiragino Sans GB" panose="020B0300000000000000" charset="-122"/>
                 <a:ea typeface="Hiragino Sans GB" panose="020B0300000000000000" charset="-122"/>
@@ -1886,6 +2165,7 @@
           </a:lstStyle>
           <a:p>
             <a:pPr>
+              <a:buNone/>
               <a:defRPr sz="1575" b="0">
                 <a:solidFill>
                   <a:srgbClr val="5D7183"/>
@@ -1898,7 +2178,7 @@
             <a:r>
               <a:rPr sz="1575" b="0">
                 <a:solidFill>
-                  <a:srgbClr val="5D7183"/>
+                  <a:srgbClr val="B3C8D6"/>
                 </a:solidFill>
                 <a:latin typeface="Hiragino Sans GB" panose="020B0300000000000000" charset="-122"/>
                 <a:ea typeface="Hiragino Sans GB" panose="020B0300000000000000" charset="-122"/>
@@ -1943,9 +2223,9 @@
           <a:bodyPr anchor="ctr"/>
           <a:lstStyle>
             <a:defPPr>
-              <a:defRPr sz="3900" b="1">
-                <a:solidFill>
-                  <a:srgbClr val="24364B"/>
+              <a:defRPr sz="4200" b="1">
+                <a:solidFill>
+                  <a:srgbClr val="FFFFFF"/>
                 </a:solidFill>
                 <a:latin typeface="Hiragino Sans GB" panose="020B0300000000000000" charset="-122"/>
                 <a:ea typeface="Hiragino Sans GB" panose="020B0300000000000000" charset="-122"/>
@@ -1955,6 +2235,7 @@
           </a:lstStyle>
           <a:p>
             <a:pPr>
+              <a:buNone/>
               <a:defRPr sz="3900" b="1">
                 <a:solidFill>
                   <a:srgbClr val="24364B"/>
@@ -1965,9 +2246,9 @@
               </a:defRPr>
             </a:pPr>
             <a:r>
-              <a:rPr sz="3900" b="1">
-                <a:solidFill>
-                  <a:srgbClr val="24364B"/>
+              <a:rPr sz="4200" b="1">
+                <a:solidFill>
+                  <a:srgbClr val="FFFFFF"/>
                 </a:solidFill>
                 <a:latin typeface="Hiragino Sans GB" panose="020B0300000000000000" charset="-122"/>
                 <a:ea typeface="Hiragino Sans GB" panose="020B0300000000000000" charset="-122"/>
@@ -2012,9 +2293,9 @@
           <a:bodyPr anchor="ctr"/>
           <a:lstStyle>
             <a:defPPr>
-              <a:defRPr sz="2325" b="0">
-                <a:solidFill>
-                  <a:srgbClr val="385E7D"/>
+              <a:defRPr sz="2550" b="0">
+                <a:solidFill>
+                  <a:srgbClr val="69D0D2"/>
                 </a:solidFill>
                 <a:latin typeface="Hiragino Sans GB" panose="020B0300000000000000" charset="-122"/>
                 <a:ea typeface="Hiragino Sans GB" panose="020B0300000000000000" charset="-122"/>
@@ -2024,6 +2305,7 @@
           </a:lstStyle>
           <a:p>
             <a:pPr>
+              <a:buNone/>
               <a:defRPr sz="2325" b="0">
                 <a:solidFill>
                   <a:srgbClr val="385E7D"/>
@@ -2034,9 +2316,9 @@
               </a:defRPr>
             </a:pPr>
             <a:r>
-              <a:rPr sz="2325" b="0">
-                <a:solidFill>
-                  <a:srgbClr val="385E7D"/>
+              <a:rPr sz="2550" b="0">
+                <a:solidFill>
+                  <a:srgbClr val="69D0D2"/>
                 </a:solidFill>
                 <a:latin typeface="Hiragino Sans GB" panose="020B0300000000000000" charset="-122"/>
                 <a:ea typeface="Hiragino Sans GB" panose="020B0300000000000000" charset="-122"/>
@@ -2072,7 +2354,7 @@
             <a:avLst/>
           </a:prstGeom>
           <a:solidFill>
-            <a:srgbClr val="C9D9E5"/>
+            <a:srgbClr val="2E69B1"/>
           </a:solidFill>
           <a:ln w="0">
             <a:noFill/>
@@ -2108,7 +2390,7 @@
             <a:defPPr>
               <a:defRPr sz="1650" b="0">
                 <a:solidFill>
-                  <a:srgbClr val="24364B"/>
+                  <a:srgbClr val="E6F0F5"/>
                 </a:solidFill>
                 <a:latin typeface="Hiragino Sans GB" panose="020B0300000000000000" charset="-122"/>
                 <a:ea typeface="Hiragino Sans GB" panose="020B0300000000000000" charset="-122"/>
@@ -2118,6 +2400,7 @@
           </a:lstStyle>
           <a:p>
             <a:pPr>
+              <a:buNone/>
               <a:defRPr sz="1650" b="0">
                 <a:solidFill>
                   <a:srgbClr val="24364B"/>
@@ -2130,13 +2413,13 @@
             <a:r>
               <a:rPr sz="1650" b="0">
                 <a:solidFill>
-                  <a:srgbClr val="24364B"/>
+                  <a:srgbClr val="E6F0F5"/>
                 </a:solidFill>
                 <a:latin typeface="Hiragino Sans GB" panose="020B0300000000000000" charset="-122"/>
                 <a:ea typeface="Hiragino Sans GB" panose="020B0300000000000000" charset="-122"/>
                 <a:cs typeface="Hiragino Sans GB" panose="020B0300000000000000" charset="-122"/>
               </a:rPr>
-              <a:t>建模基线：B 组 SRS V1.1    成果：六个用例、SRS、SPEC 与可编辑模型工程</a:t>
+              <a:t>基线：B 组 SRS V1.1    交付：六个用例、SRS、SPEC 与验收追溯</a:t>
             </a:r>
             <a:endParaRPr sz="1650" b="0">
               <a:solidFill>
@@ -2177,7 +2460,7 @@
             <a:defPPr>
               <a:defRPr sz="1500" b="0">
                 <a:solidFill>
-                  <a:srgbClr val="24364B"/>
+                  <a:srgbClr val="E6F0F5"/>
                 </a:solidFill>
                 <a:latin typeface="Hiragino Sans GB" panose="020B0300000000000000" charset="-122"/>
                 <a:ea typeface="Hiragino Sans GB" panose="020B0300000000000000" charset="-122"/>
@@ -2187,6 +2470,7 @@
           </a:lstStyle>
           <a:p>
             <a:pPr>
+              <a:buNone/>
               <a:defRPr sz="1500" b="0">
                 <a:solidFill>
                   <a:srgbClr val="24364B"/>
@@ -2199,18 +2483,18 @@
             <a:r>
               <a:rPr sz="1500" b="0">
                 <a:solidFill>
-                  <a:srgbClr val="24364B"/>
+                  <a:srgbClr val="E6F0F5"/>
                 </a:solidFill>
                 <a:latin typeface="Hiragino Sans GB" panose="020B0300000000000000" charset="-122"/>
                 <a:ea typeface="Hiragino Sans GB" panose="020B0300000000000000" charset="-122"/>
                 <a:cs typeface="Hiragino Sans GB" panose="020B0300000000000000" charset="-122"/>
               </a:rPr>
-              <a:t>小组名称：_</a:t>
+              <a:t>小组名称：__</a:t>
             </a:r>
             <a:r>
               <a:rPr lang="zh-CN" sz="1500" b="0">
                 <a:solidFill>
-                  <a:srgbClr val="24364B"/>
+                  <a:srgbClr val="E6F0F5"/>
                 </a:solidFill>
                 <a:latin typeface="Hiragino Sans GB" panose="020B0300000000000000" charset="-122"/>
                 <a:ea typeface="Hiragino Sans GB" panose="020B0300000000000000" charset="-122"/>
@@ -2221,13 +2505,35 @@
             <a:r>
               <a:rPr sz="1500" b="0">
                 <a:solidFill>
-                  <a:srgbClr val="24364B"/>
+                  <a:srgbClr val="E6F0F5"/>
                 </a:solidFill>
                 <a:latin typeface="Hiragino Sans GB" panose="020B0300000000000000" charset="-122"/>
                 <a:ea typeface="Hiragino Sans GB" panose="020B0300000000000000" charset="-122"/>
                 <a:cs typeface="Hiragino Sans GB" panose="020B0300000000000000" charset="-122"/>
               </a:rPr>
-              <a:t>_</a:t>
+              <a:t>_    汇报人：__</a:t>
+            </a:r>
+            <a:r>
+              <a:rPr lang="zh-CN" sz="1500" b="0">
+                <a:solidFill>
+                  <a:srgbClr val="E6F0F5"/>
+                </a:solidFill>
+                <a:latin typeface="Hiragino Sans GB" panose="020B0300000000000000" charset="-122"/>
+                <a:ea typeface="Hiragino Sans GB" panose="020B0300000000000000" charset="-122"/>
+                <a:cs typeface="Hiragino Sans GB" panose="020B0300000000000000" charset="-122"/>
+              </a:rPr>
+              <a:t>张世涵</a:t>
+            </a:r>
+            <a:r>
+              <a:rPr sz="1500" b="0">
+                <a:solidFill>
+                  <a:srgbClr val="E6F0F5"/>
+                </a:solidFill>
+                <a:latin typeface="Hiragino Sans GB" panose="020B0300000000000000" charset="-122"/>
+                <a:ea typeface="Hiragino Sans GB" panose="020B0300000000000000" charset="-122"/>
+                <a:cs typeface="Hiragino Sans GB" panose="020B0300000000000000" charset="-122"/>
+              </a:rPr>
+              <a:t>__</a:t>
             </a:r>
             <a:endParaRPr sz="1500" b="0">
               <a:solidFill>
@@ -2278,6 +2584,7 @@
           </a:lstStyle>
           <a:p>
             <a:pPr>
+              <a:buNone/>
               <a:defRPr sz="1425" b="0">
                 <a:solidFill>
                   <a:srgbClr val="24364B"/>
@@ -2326,7 +2633,7 @@
             <a:defPPr>
               <a:defRPr sz="1275" b="0">
                 <a:solidFill>
-                  <a:srgbClr val="5D7183"/>
+                  <a:srgbClr val="B3C8D6"/>
                 </a:solidFill>
                 <a:latin typeface="Hiragino Sans GB" panose="020B0300000000000000" charset="-122"/>
                 <a:ea typeface="Hiragino Sans GB" panose="020B0300000000000000" charset="-122"/>
@@ -2336,6 +2643,7 @@
           </a:lstStyle>
           <a:p>
             <a:pPr>
+              <a:buNone/>
               <a:defRPr sz="1275" b="0">
                 <a:solidFill>
                   <a:srgbClr val="5D7183"/>
@@ -2348,13 +2656,13 @@
             <a:r>
               <a:rPr sz="1275" b="0">
                 <a:solidFill>
-                  <a:srgbClr val="5D7183"/>
+                  <a:srgbClr val="B3C8D6"/>
                 </a:solidFill>
                 <a:latin typeface="Hiragino Sans GB" panose="020B0300000000000000" charset="-122"/>
                 <a:ea typeface="Hiragino Sans GB" panose="020B0300000000000000" charset="-122"/>
                 <a:cs typeface="Hiragino Sans GB" panose="020B0300000000000000" charset="-122"/>
               </a:rPr>
-              <a:t>2026 年 10 月 13 日</a:t>
+              <a:t>2026 年 10 月 </a:t>
             </a:r>
             <a:endParaRPr sz="1275" b="0">
               <a:solidFill>
@@ -2419,9 +2727,9 @@
           <a:bodyPr anchor="ctr"/>
           <a:lstStyle>
             <a:defPPr>
-              <a:defRPr sz="2475" b="1">
-                <a:solidFill>
-                  <a:srgbClr val="24364B"/>
+              <a:defRPr sz="2700" b="1">
+                <a:solidFill>
+                  <a:srgbClr val="102A43"/>
                 </a:solidFill>
                 <a:latin typeface="Hiragino Sans GB" panose="020B0300000000000000" charset="-122"/>
                 <a:ea typeface="Hiragino Sans GB" panose="020B0300000000000000" charset="-122"/>
@@ -2431,6 +2739,7 @@
           </a:lstStyle>
           <a:p>
             <a:pPr>
+              <a:buNone/>
               <a:defRPr sz="2475" b="1">
                 <a:solidFill>
                   <a:srgbClr val="24364B"/>
@@ -2441,15 +2750,15 @@
               </a:defRPr>
             </a:pPr>
             <a:r>
-              <a:rPr sz="2475" b="1">
-                <a:solidFill>
-                  <a:srgbClr val="24364B"/>
+              <a:rPr sz="2700" b="1">
+                <a:solidFill>
+                  <a:srgbClr val="102A43"/>
                 </a:solidFill>
                 <a:latin typeface="Hiragino Sans GB" panose="020B0300000000000000" charset="-122"/>
                 <a:ea typeface="Hiragino Sans GB" panose="020B0300000000000000" charset="-122"/>
                 <a:cs typeface="Hiragino Sans GB" panose="020B0300000000000000" charset="-122"/>
               </a:rPr>
-              <a:t>交付状态与待验证事项</a:t>
+              <a:t>已交付的设计与仍需核实的业务</a:t>
             </a:r>
             <a:endParaRPr sz="2475" b="1">
               <a:solidFill>
@@ -2473,13 +2782,13 @@
         <p:spPr>
           <a:xfrm>
             <a:off x="590550" y="1057275"/>
-            <a:ext cx="11010900" cy="19050"/>
+            <a:ext cx="11010900" cy="38100"/>
           </a:xfrm>
           <a:prstGeom prst="rect">
             <a:avLst/>
           </a:prstGeom>
           <a:solidFill>
-            <a:srgbClr val="C9D9E5"/>
+            <a:srgbClr val="2E69B1"/>
           </a:solidFill>
           <a:ln w="0">
             <a:noFill/>
@@ -2515,7 +2824,7 @@
             <a:defPPr>
               <a:defRPr sz="1050" b="0">
                 <a:solidFill>
-                  <a:srgbClr val="5D7183"/>
+                  <a:srgbClr val="62788B"/>
                 </a:solidFill>
                 <a:latin typeface="Hiragino Sans GB" panose="020B0300000000000000" charset="-122"/>
                 <a:ea typeface="Hiragino Sans GB" panose="020B0300000000000000" charset="-122"/>
@@ -2525,6 +2834,7 @@
           </a:lstStyle>
           <a:p>
             <a:pPr>
+              <a:buNone/>
               <a:defRPr sz="1050" b="0">
                 <a:solidFill>
                   <a:srgbClr val="5D7183"/>
@@ -2537,7 +2847,7 @@
             <a:r>
               <a:rPr sz="1050" b="0">
                 <a:solidFill>
-                  <a:srgbClr val="5D7183"/>
+                  <a:srgbClr val="62788B"/>
                 </a:solidFill>
                 <a:latin typeface="Hiragino Sans GB" panose="020B0300000000000000" charset="-122"/>
                 <a:ea typeface="Hiragino Sans GB" panose="020B0300000000000000" charset="-122"/>
@@ -2577,7 +2887,7 @@
           </a:solidFill>
           <a:ln w="9525">
             <a:solidFill>
-              <a:srgbClr val="C9D9E5"/>
+              <a:srgbClr val="BBD1DD"/>
             </a:solidFill>
             <a:prstDash val="solid"/>
           </a:ln>
@@ -2600,7 +2910,7 @@
             <a:avLst/>
           </a:prstGeom>
           <a:solidFill>
-            <a:srgbClr val="385E7D"/>
+            <a:srgbClr val="2E69B1"/>
           </a:solidFill>
           <a:ln w="0">
             <a:noFill/>
@@ -2634,9 +2944,9 @@
           <a:bodyPr anchor="ctr"/>
           <a:lstStyle>
             <a:defPPr>
-              <a:defRPr sz="1725" b="1">
-                <a:solidFill>
-                  <a:srgbClr val="385E7D"/>
+              <a:defRPr sz="1800" b="1">
+                <a:solidFill>
+                  <a:srgbClr val="245487"/>
                 </a:solidFill>
                 <a:latin typeface="Hiragino Sans GB" panose="020B0300000000000000" charset="-122"/>
                 <a:ea typeface="Hiragino Sans GB" panose="020B0300000000000000" charset="-122"/>
@@ -2646,6 +2956,7 @@
           </a:lstStyle>
           <a:p>
             <a:pPr>
+              <a:buNone/>
               <a:defRPr sz="1725" b="1">
                 <a:solidFill>
                   <a:srgbClr val="385E7D"/>
@@ -2656,15 +2967,15 @@
               </a:defRPr>
             </a:pPr>
             <a:r>
-              <a:rPr sz="1725" b="1">
-                <a:solidFill>
-                  <a:srgbClr val="385E7D"/>
+              <a:rPr sz="1800" b="1">
+                <a:solidFill>
+                  <a:srgbClr val="245487"/>
                 </a:solidFill>
                 <a:latin typeface="Hiragino Sans GB" panose="020B0300000000000000" charset="-122"/>
                 <a:ea typeface="Hiragino Sans GB" panose="020B0300000000000000" charset="-122"/>
                 <a:cs typeface="Hiragino Sans GB" panose="020B0300000000000000" charset="-122"/>
               </a:rPr>
-              <a:t>本次交付</a:t>
+              <a:t>设计交付</a:t>
             </a:r>
             <a:endParaRPr sz="1725" b="1">
               <a:solidFill>
@@ -2705,7 +3016,7 @@
             <a:defPPr>
               <a:defRPr sz="1425" b="0">
                 <a:solidFill>
-                  <a:srgbClr val="24364B"/>
+                  <a:srgbClr val="1F364D"/>
                 </a:solidFill>
                 <a:latin typeface="Hiragino Sans GB" panose="020B0300000000000000" charset="-122"/>
                 <a:ea typeface="Hiragino Sans GB" panose="020B0300000000000000" charset="-122"/>
@@ -2715,6 +3026,7 @@
           </a:lstStyle>
           <a:p>
             <a:pPr>
+              <a:buNone/>
               <a:defRPr sz="1425" b="0">
                 <a:solidFill>
                   <a:srgbClr val="24364B"/>
@@ -2727,13 +3039,13 @@
             <a:r>
               <a:rPr sz="1425" b="0">
                 <a:solidFill>
-                  <a:srgbClr val="24364B"/>
+                  <a:srgbClr val="1F364D"/>
                 </a:solidFill>
                 <a:latin typeface="Hiragino Sans GB" panose="020B0300000000000000" charset="-122"/>
                 <a:ea typeface="Hiragino Sans GB" panose="020B0300000000000000" charset="-122"/>
                 <a:cs typeface="Hiragino Sans GB" panose="020B0300000000000000" charset="-122"/>
               </a:rPr>
-              <a:t>SRS V1.1、SPEC V1.1、六份用例规约、CodeArts 模型工程和导出图、24 条用户故事及追溯矩阵。</a:t>
+              <a:t>SRS V1.1、SPEC V1.1、六份用例规约、24 条用户故事和追溯矩阵。</a:t>
             </a:r>
             <a:endParaRPr sz="1425" b="0">
               <a:solidFill>
@@ -2749,6 +3061,7 @@
           </a:p>
           <a:p>
             <a:pPr>
+              <a:buNone/>
               <a:defRPr sz="1425" b="0">
                 <a:solidFill>
                   <a:srgbClr val="24364B"/>
@@ -2761,13 +3074,13 @@
             <a:r>
               <a:rPr sz="1425" b="0">
                 <a:solidFill>
-                  <a:srgbClr val="24364B"/>
+                  <a:srgbClr val="1F364D"/>
                 </a:solidFill>
                 <a:latin typeface="Hiragino Sans GB" panose="020B0300000000000000" charset="-122"/>
                 <a:ea typeface="Hiragino Sans GB" panose="020B0300000000000000" charset="-122"/>
                 <a:cs typeface="Hiragino Sans GB" panose="020B0300000000000000" charset="-122"/>
               </a:rPr>
-              <a:t>展示图与用例编号保持一致。</a:t>
+              <a:t>SPEC 的 18 条规范—代码对应均标为待实现；另备可编辑模型工程及对应导出图。</a:t>
             </a:r>
             <a:endParaRPr sz="1425" b="0">
               <a:solidFill>
@@ -2801,7 +3114,7 @@
           </a:solidFill>
           <a:ln w="9525">
             <a:solidFill>
-              <a:srgbClr val="C9D9E5"/>
+              <a:srgbClr val="BBD1DD"/>
             </a:solidFill>
             <a:prstDash val="solid"/>
           </a:ln>
@@ -2824,7 +3137,7 @@
             <a:avLst/>
           </a:prstGeom>
           <a:solidFill>
-            <a:srgbClr val="385E7D"/>
+            <a:srgbClr val="2E69B1"/>
           </a:solidFill>
           <a:ln w="0">
             <a:noFill/>
@@ -2858,9 +3171,9 @@
           <a:bodyPr anchor="ctr"/>
           <a:lstStyle>
             <a:defPPr>
-              <a:defRPr sz="1725" b="1">
-                <a:solidFill>
-                  <a:srgbClr val="385E7D"/>
+              <a:defRPr sz="1800" b="1">
+                <a:solidFill>
+                  <a:srgbClr val="245487"/>
                 </a:solidFill>
                 <a:latin typeface="Hiragino Sans GB" panose="020B0300000000000000" charset="-122"/>
                 <a:ea typeface="Hiragino Sans GB" panose="020B0300000000000000" charset="-122"/>
@@ -2870,6 +3183,7 @@
           </a:lstStyle>
           <a:p>
             <a:pPr>
+              <a:buNone/>
               <a:defRPr sz="1725" b="1">
                 <a:solidFill>
                   <a:srgbClr val="385E7D"/>
@@ -2880,15 +3194,15 @@
               </a:defRPr>
             </a:pPr>
             <a:r>
-              <a:rPr sz="1725" b="1">
-                <a:solidFill>
-                  <a:srgbClr val="385E7D"/>
+              <a:rPr sz="1800" b="1">
+                <a:solidFill>
+                  <a:srgbClr val="245487"/>
                 </a:solidFill>
                 <a:latin typeface="Hiragino Sans GB" panose="020B0300000000000000" charset="-122"/>
                 <a:ea typeface="Hiragino Sans GB" panose="020B0300000000000000" charset="-122"/>
                 <a:cs typeface="Hiragino Sans GB" panose="020B0300000000000000" charset="-122"/>
               </a:rPr>
-              <a:t>AI 使用边界</a:t>
+              <a:t>AI 使用与责任</a:t>
             </a:r>
             <a:endParaRPr sz="1725" b="1">
               <a:solidFill>
@@ -2929,7 +3243,7 @@
             <a:defPPr>
               <a:defRPr sz="1425" b="0">
                 <a:solidFill>
-                  <a:srgbClr val="24364B"/>
+                  <a:srgbClr val="1F364D"/>
                 </a:solidFill>
                 <a:latin typeface="Hiragino Sans GB" panose="020B0300000000000000" charset="-122"/>
                 <a:ea typeface="Hiragino Sans GB" panose="020B0300000000000000" charset="-122"/>
@@ -2939,6 +3253,7 @@
           </a:lstStyle>
           <a:p>
             <a:pPr>
+              <a:buNone/>
               <a:defRPr sz="1425" b="0">
                 <a:solidFill>
                   <a:srgbClr val="24364B"/>
@@ -2951,13 +3266,13 @@
             <a:r>
               <a:rPr sz="1425" b="0">
                 <a:solidFill>
-                  <a:srgbClr val="24364B"/>
+                  <a:srgbClr val="1F364D"/>
                 </a:solidFill>
                 <a:latin typeface="Hiragino Sans GB" panose="020B0300000000000000" charset="-122"/>
                 <a:ea typeface="Hiragino Sans GB" panose="020B0300000000000000" charset="-122"/>
                 <a:cs typeface="Hiragino Sans GB" panose="020B0300000000000000" charset="-122"/>
               </a:rPr>
-              <a:t>AI辅助整理材料、文案和模型工程脚本。B5教师／管理员诉求属于角色推演。</a:t>
+              <a:t>AI 辅助整理走查材料、文案及模型工程脚本；B5 的教师/管理员诉求属于角色推演，不是访谈。</a:t>
             </a:r>
             <a:endParaRPr sz="1425" b="0">
               <a:solidFill>
@@ -2973,6 +3288,7 @@
           </a:p>
           <a:p>
             <a:pPr>
+              <a:buNone/>
               <a:defRPr sz="1425" b="0">
                 <a:solidFill>
                   <a:srgbClr val="24364B"/>
@@ -2985,13 +3301,13 @@
             <a:r>
               <a:rPr sz="1425" b="0">
                 <a:solidFill>
-                  <a:srgbClr val="24364B"/>
+                  <a:srgbClr val="1F364D"/>
                 </a:solidFill>
                 <a:latin typeface="Hiragino Sans GB" panose="020B0300000000000000" charset="-122"/>
                 <a:ea typeface="Hiragino Sans GB" panose="020B0300000000000000" charset="-122"/>
                 <a:cs typeface="Hiragino Sans GB" panose="020B0300000000000000" charset="-122"/>
               </a:rPr>
-              <a:t>图面由CodeArts导出；关键业务规则仍须组员核对。</a:t>
+              <a:t>关键业务规则、图和文档由组员核对。</a:t>
             </a:r>
             <a:endParaRPr sz="1425" b="0">
               <a:solidFill>
@@ -3025,7 +3341,7 @@
           </a:solidFill>
           <a:ln w="9525">
             <a:solidFill>
-              <a:srgbClr val="C9D9E5"/>
+              <a:srgbClr val="BBD1DD"/>
             </a:solidFill>
             <a:prstDash val="solid"/>
           </a:ln>
@@ -3048,7 +3364,7 @@
             <a:avLst/>
           </a:prstGeom>
           <a:solidFill>
-            <a:srgbClr val="385E7D"/>
+            <a:srgbClr val="2E69B1"/>
           </a:solidFill>
           <a:ln w="0">
             <a:noFill/>
@@ -3082,9 +3398,9 @@
           <a:bodyPr anchor="ctr"/>
           <a:lstStyle>
             <a:defPPr>
-              <a:defRPr sz="1725" b="1">
-                <a:solidFill>
-                  <a:srgbClr val="385E7D"/>
+              <a:defRPr sz="1800" b="1">
+                <a:solidFill>
+                  <a:srgbClr val="245487"/>
                 </a:solidFill>
                 <a:latin typeface="Hiragino Sans GB" panose="020B0300000000000000" charset="-122"/>
                 <a:ea typeface="Hiragino Sans GB" panose="020B0300000000000000" charset="-122"/>
@@ -3094,6 +3410,7 @@
           </a:lstStyle>
           <a:p>
             <a:pPr>
+              <a:buNone/>
               <a:defRPr sz="1725" b="1">
                 <a:solidFill>
                   <a:srgbClr val="385E7D"/>
@@ -3104,15 +3421,15 @@
               </a:defRPr>
             </a:pPr>
             <a:r>
-              <a:rPr sz="1725" b="1">
-                <a:solidFill>
-                  <a:srgbClr val="385E7D"/>
+              <a:rPr sz="1800" b="1">
+                <a:solidFill>
+                  <a:srgbClr val="245487"/>
                 </a:solidFill>
                 <a:latin typeface="Hiragino Sans GB" panose="020B0300000000000000" charset="-122"/>
                 <a:ea typeface="Hiragino Sans GB" panose="020B0300000000000000" charset="-122"/>
                 <a:cs typeface="Hiragino Sans GB" panose="020B0300000000000000" charset="-122"/>
               </a:rPr>
-              <a:t>仍需验证</a:t>
+              <a:t>待业务与测试核验</a:t>
             </a:r>
             <a:endParaRPr sz="1725" b="1">
               <a:solidFill>
@@ -3153,7 +3470,7 @@
             <a:defPPr>
               <a:defRPr sz="1425" b="0">
                 <a:solidFill>
-                  <a:srgbClr val="24364B"/>
+                  <a:srgbClr val="1F364D"/>
                 </a:solidFill>
                 <a:latin typeface="Hiragino Sans GB" panose="020B0300000000000000" charset="-122"/>
                 <a:ea typeface="Hiragino Sans GB" panose="020B0300000000000000" charset="-122"/>
@@ -3163,6 +3480,7 @@
           </a:lstStyle>
           <a:p>
             <a:pPr>
+              <a:buNone/>
               <a:defRPr sz="1425" b="0">
                 <a:solidFill>
                   <a:srgbClr val="24364B"/>
@@ -3175,13 +3493,13 @@
             <a:r>
               <a:rPr sz="1425" b="0">
                 <a:solidFill>
-                  <a:srgbClr val="24364B"/>
+                  <a:srgbClr val="1F364D"/>
                 </a:solidFill>
                 <a:latin typeface="Hiragino Sans GB" panose="020B0300000000000000" charset="-122"/>
                 <a:ea typeface="Hiragino Sans GB" panose="020B0300000000000000" charset="-122"/>
                 <a:cs typeface="Hiragino Sans GB" panose="020B0300000000000000" charset="-122"/>
               </a:rPr>
-              <a:t>教师与管理员真实工作流程；</a:t>
+              <a:t>教师和管理员的真实工作流程；软著、课程材料和手稿的逐件授权；数据源接入许可。</a:t>
             </a:r>
             <a:endParaRPr sz="1425" b="0">
               <a:solidFill>
@@ -3194,6 +3512,7 @@
           </a:p>
           <a:p>
             <a:pPr>
+              <a:buNone/>
               <a:defRPr sz="1425" b="0">
                 <a:solidFill>
                   <a:srgbClr val="24364B"/>
@@ -3203,17 +3522,6 @@
                 <a:cs typeface="Hiragino Sans GB" panose="020B0300000000000000" charset="-122"/>
               </a:defRPr>
             </a:pPr>
-            <a:r>
-              <a:rPr sz="1425" b="0">
-                <a:solidFill>
-                  <a:srgbClr val="24364B"/>
-                </a:solidFill>
-                <a:latin typeface="Hiragino Sans GB" panose="020B0300000000000000" charset="-122"/>
-                <a:ea typeface="Hiragino Sans GB" panose="020B0300000000000000" charset="-122"/>
-                <a:cs typeface="Hiragino Sans GB" panose="020B0300000000000000" charset="-122"/>
-              </a:rPr>
-              <a:t>软著、课程材料和手稿的逐件授权；</a:t>
-            </a:r>
             <a:endParaRPr sz="1425" b="0">
               <a:solidFill>
                 <a:srgbClr val="24364B"/>
@@ -3225,6 +3533,7 @@
           </a:p>
           <a:p>
             <a:pPr>
+              <a:buNone/>
               <a:defRPr sz="1425" b="0">
                 <a:solidFill>
                   <a:srgbClr val="24364B"/>
@@ -3237,13 +3546,13 @@
             <a:r>
               <a:rPr sz="1425" b="0">
                 <a:solidFill>
-                  <a:srgbClr val="24364B"/>
+                  <a:srgbClr val="1F364D"/>
                 </a:solidFill>
                 <a:latin typeface="Hiragino Sans GB" panose="020B0300000000000000" charset="-122"/>
                 <a:ea typeface="Hiragino Sans GB" panose="020B0300000000000000" charset="-122"/>
                 <a:cs typeface="Hiragino Sans GB" panose="020B0300000000000000" charset="-122"/>
               </a:rPr>
-              <a:t>实际接口与批量许可；</a:t>
+              <a:t>性能与业务验收尚未执行。</a:t>
             </a:r>
             <a:endParaRPr sz="1425" b="0">
               <a:solidFill>
@@ -3254,37 +3563,6 @@
               <a:cs typeface="Hiragino Sans GB" panose="020B0300000000000000" charset="-122"/>
             </a:endParaRPr>
           </a:p>
-          <a:p>
-            <a:pPr>
-              <a:defRPr sz="1425" b="0">
-                <a:solidFill>
-                  <a:srgbClr val="24364B"/>
-                </a:solidFill>
-                <a:latin typeface="Hiragino Sans GB" panose="020B0300000000000000" charset="-122"/>
-                <a:ea typeface="Hiragino Sans GB" panose="020B0300000000000000" charset="-122"/>
-                <a:cs typeface="Hiragino Sans GB" panose="020B0300000000000000" charset="-122"/>
-              </a:defRPr>
-            </a:pPr>
-            <a:r>
-              <a:rPr sz="1425" b="0">
-                <a:solidFill>
-                  <a:srgbClr val="24364B"/>
-                </a:solidFill>
-                <a:latin typeface="Hiragino Sans GB" panose="020B0300000000000000" charset="-122"/>
-                <a:ea typeface="Hiragino Sans GB" panose="020B0300000000000000" charset="-122"/>
-                <a:cs typeface="Hiragino Sans GB" panose="020B0300000000000000" charset="-122"/>
-              </a:rPr>
-              <a:t>性能和业务验收执行。</a:t>
-            </a:r>
-            <a:endParaRPr sz="1425" b="0">
-              <a:solidFill>
-                <a:srgbClr val="24364B"/>
-              </a:solidFill>
-              <a:latin typeface="Hiragino Sans GB" panose="020B0300000000000000" charset="-122"/>
-              <a:ea typeface="Hiragino Sans GB" panose="020B0300000000000000" charset="-122"/>
-              <a:cs typeface="Hiragino Sans GB" panose="020B0300000000000000" charset="-122"/>
-            </a:endParaRPr>
-          </a:p>
         </p:txBody>
       </p:sp>
       <p:sp>
@@ -3304,7 +3582,7 @@
             <a:avLst/>
           </a:prstGeom>
           <a:solidFill>
-            <a:srgbClr val="EAF1F8"/>
+            <a:srgbClr val="DDEEF2"/>
           </a:solidFill>
           <a:ln w="0">
             <a:noFill/>
@@ -3340,7 +3618,7 @@
             <a:defPPr>
               <a:defRPr sz="1425" b="0">
                 <a:solidFill>
-                  <a:srgbClr val="24364B"/>
+                  <a:srgbClr val="1F364D"/>
                 </a:solidFill>
                 <a:latin typeface="Hiragino Sans GB" panose="020B0300000000000000" charset="-122"/>
                 <a:ea typeface="Hiragino Sans GB" panose="020B0300000000000000" charset="-122"/>
@@ -3350,6 +3628,7 @@
           </a:lstStyle>
           <a:p>
             <a:pPr>
+              <a:buNone/>
               <a:defRPr sz="1425" b="0">
                 <a:solidFill>
                   <a:srgbClr val="24364B"/>
@@ -3362,13 +3641,13 @@
             <a:r>
               <a:rPr sz="1425" b="0">
                 <a:solidFill>
-                  <a:srgbClr val="24364B"/>
+                  <a:srgbClr val="1F364D"/>
                 </a:solidFill>
                 <a:latin typeface="Hiragino Sans GB" panose="020B0300000000000000" charset="-122"/>
                 <a:ea typeface="Hiragino Sans GB" panose="020B0300000000000000" charset="-122"/>
                 <a:cs typeface="Hiragino Sans GB" panose="020B0300000000000000" charset="-122"/>
               </a:rPr>
-              <a:t>当前材料可用于需求建模展示；“已设计”“待业务核验”“待执行测试”三个状态在 SRS、SPEC 与用例中分开记录。</a:t>
+              <a:t>本次形成设计与验收基线；系统实现、目标用户确认和测试结果留待后续阶段。</a:t>
             </a:r>
             <a:endParaRPr sz="1425" b="0">
               <a:solidFill>
@@ -3433,9 +3712,9 @@
           <a:bodyPr anchor="ctr"/>
           <a:lstStyle>
             <a:defPPr>
-              <a:defRPr sz="2475" b="1">
-                <a:solidFill>
-                  <a:srgbClr val="24364B"/>
+              <a:defRPr sz="2700" b="1">
+                <a:solidFill>
+                  <a:srgbClr val="102A43"/>
                 </a:solidFill>
                 <a:latin typeface="Hiragino Sans GB" panose="020B0300000000000000" charset="-122"/>
                 <a:ea typeface="Hiragino Sans GB" panose="020B0300000000000000" charset="-122"/>
@@ -3445,6 +3724,7 @@
           </a:lstStyle>
           <a:p>
             <a:pPr>
+              <a:buNone/>
               <a:defRPr sz="2475" b="1">
                 <a:solidFill>
                   <a:srgbClr val="24364B"/>
@@ -3455,15 +3735,15 @@
               </a:defRPr>
             </a:pPr>
             <a:r>
-              <a:rPr sz="2475" b="1">
-                <a:solidFill>
-                  <a:srgbClr val="24364B"/>
+              <a:rPr sz="2700" b="1">
+                <a:solidFill>
+                  <a:srgbClr val="102A43"/>
                 </a:solidFill>
                 <a:latin typeface="Hiragino Sans GB" panose="020B0300000000000000" charset="-122"/>
                 <a:ea typeface="Hiragino Sans GB" panose="020B0300000000000000" charset="-122"/>
                 <a:cs typeface="Hiragino Sans GB" panose="020B0300000000000000" charset="-122"/>
               </a:rPr>
-              <a:t>基线与范围裁定</a:t>
+              <a:t>基线：四类实测、七类设计、六个用例</a:t>
             </a:r>
             <a:endParaRPr sz="2475" b="1">
               <a:solidFill>
@@ -3487,13 +3767,13 @@
         <p:spPr>
           <a:xfrm>
             <a:off x="590550" y="1057275"/>
-            <a:ext cx="11010900" cy="19050"/>
+            <a:ext cx="11010900" cy="38100"/>
           </a:xfrm>
           <a:prstGeom prst="rect">
             <a:avLst/>
           </a:prstGeom>
           <a:solidFill>
-            <a:srgbClr val="C9D9E5"/>
+            <a:srgbClr val="2E69B1"/>
           </a:solidFill>
           <a:ln w="0">
             <a:noFill/>
@@ -3529,7 +3809,7 @@
             <a:defPPr>
               <a:defRPr sz="1050" b="0">
                 <a:solidFill>
-                  <a:srgbClr val="5D7183"/>
+                  <a:srgbClr val="62788B"/>
                 </a:solidFill>
                 <a:latin typeface="Hiragino Sans GB" panose="020B0300000000000000" charset="-122"/>
                 <a:ea typeface="Hiragino Sans GB" panose="020B0300000000000000" charset="-122"/>
@@ -3539,6 +3819,7 @@
           </a:lstStyle>
           <a:p>
             <a:pPr>
+              <a:buNone/>
               <a:defRPr sz="1050" b="0">
                 <a:solidFill>
                   <a:srgbClr val="5D7183"/>
@@ -3551,7 +3832,7 @@
             <a:r>
               <a:rPr sz="1050" b="0">
                 <a:solidFill>
-                  <a:srgbClr val="5D7183"/>
+                  <a:srgbClr val="62788B"/>
                 </a:solidFill>
                 <a:latin typeface="Hiragino Sans GB" panose="020B0300000000000000" charset="-122"/>
                 <a:ea typeface="Hiragino Sans GB" panose="020B0300000000000000" charset="-122"/>
@@ -3591,7 +3872,7 @@
           </a:solidFill>
           <a:ln w="9525">
             <a:solidFill>
-              <a:srgbClr val="C9D9E5"/>
+              <a:srgbClr val="BBD1DD"/>
             </a:solidFill>
             <a:prstDash val="solid"/>
           </a:ln>
@@ -3614,7 +3895,7 @@
             <a:avLst/>
           </a:prstGeom>
           <a:solidFill>
-            <a:srgbClr val="385E7D"/>
+            <a:srgbClr val="2E69B1"/>
           </a:solidFill>
           <a:ln w="0">
             <a:noFill/>
@@ -3648,9 +3929,9 @@
           <a:bodyPr anchor="ctr"/>
           <a:lstStyle>
             <a:defPPr>
-              <a:defRPr sz="1725" b="1">
-                <a:solidFill>
-                  <a:srgbClr val="385E7D"/>
+              <a:defRPr sz="1800" b="1">
+                <a:solidFill>
+                  <a:srgbClr val="245487"/>
                 </a:solidFill>
                 <a:latin typeface="Hiragino Sans GB" panose="020B0300000000000000" charset="-122"/>
                 <a:ea typeface="Hiragino Sans GB" panose="020B0300000000000000" charset="-122"/>
@@ -3660,6 +3941,7 @@
           </a:lstStyle>
           <a:p>
             <a:pPr>
+              <a:buNone/>
               <a:defRPr sz="1725" b="1">
                 <a:solidFill>
                   <a:srgbClr val="385E7D"/>
@@ -3670,9 +3952,9 @@
               </a:defRPr>
             </a:pPr>
             <a:r>
-              <a:rPr sz="1725" b="1">
-                <a:solidFill>
-                  <a:srgbClr val="385E7D"/>
+              <a:rPr sz="1800" b="1">
+                <a:solidFill>
+                  <a:srgbClr val="245487"/>
                 </a:solidFill>
                 <a:latin typeface="Hiragino Sans GB" panose="020B0300000000000000" charset="-122"/>
                 <a:ea typeface="Hiragino Sans GB" panose="020B0300000000000000" charset="-122"/>
@@ -3719,7 +4001,7 @@
             <a:defPPr>
               <a:defRPr sz="1500" b="0">
                 <a:solidFill>
-                  <a:srgbClr val="24364B"/>
+                  <a:srgbClr val="1F364D"/>
                 </a:solidFill>
                 <a:latin typeface="Hiragino Sans GB" panose="020B0300000000000000" charset="-122"/>
                 <a:ea typeface="Hiragino Sans GB" panose="020B0300000000000000" charset="-122"/>
@@ -3729,6 +4011,7 @@
           </a:lstStyle>
           <a:p>
             <a:pPr>
+              <a:buNone/>
               <a:defRPr sz="1500" b="0">
                 <a:solidFill>
                   <a:srgbClr val="24364B"/>
@@ -3741,13 +4024,13 @@
             <a:r>
               <a:rPr sz="1500" b="0">
                 <a:solidFill>
-                  <a:srgbClr val="24364B"/>
+                  <a:srgbClr val="1F364D"/>
                 </a:solidFill>
                 <a:latin typeface="Hiragino Sans GB" panose="020B0300000000000000" charset="-122"/>
                 <a:ea typeface="Hiragino Sans GB" panose="020B0300000000000000" charset="-122"/>
                 <a:cs typeface="Hiragino Sans GB" panose="020B0300000000000000" charset="-122"/>
               </a:rPr>
-              <a:t>作业1完成论文、专利、项目、获奖四类公开样本走查。</a:t>
+              <a:t>作业 1 核验论文、专利、项目、获奖四类公开样本。</a:t>
             </a:r>
             <a:endParaRPr sz="1500" b="0">
               <a:solidFill>
@@ -3763,6 +4046,7 @@
           </a:p>
           <a:p>
             <a:pPr>
+              <a:buNone/>
               <a:defRPr sz="1500" b="0">
                 <a:solidFill>
                   <a:srgbClr val="24364B"/>
@@ -3775,13 +4059,13 @@
             <a:r>
               <a:rPr sz="1500" b="0">
                 <a:solidFill>
-                  <a:srgbClr val="24364B"/>
+                  <a:srgbClr val="1F364D"/>
                 </a:solidFill>
                 <a:latin typeface="Hiragino Sans GB" panose="020B0300000000000000" charset="-122"/>
                 <a:ea typeface="Hiragino Sans GB" panose="020B0300000000000000" charset="-122"/>
                 <a:cs typeface="Hiragino Sans GB" panose="020B0300000000000000" charset="-122"/>
               </a:rPr>
-              <a:t>证据只说明本轮样本的可得性；教师与管理员没有真实访谈。</a:t>
+              <a:t>本轮只证明小样本可得性；教师与管理员没有真实访谈。</a:t>
             </a:r>
             <a:endParaRPr sz="1500" b="0">
               <a:solidFill>
@@ -3815,7 +4099,7 @@
           </a:solidFill>
           <a:ln w="9525">
             <a:solidFill>
-              <a:srgbClr val="C9D9E5"/>
+              <a:srgbClr val="BBD1DD"/>
             </a:solidFill>
             <a:prstDash val="solid"/>
           </a:ln>
@@ -3838,7 +4122,7 @@
             <a:avLst/>
           </a:prstGeom>
           <a:solidFill>
-            <a:srgbClr val="385E7D"/>
+            <a:srgbClr val="2E69B1"/>
           </a:solidFill>
           <a:ln w="0">
             <a:noFill/>
@@ -3872,9 +4156,9 @@
           <a:bodyPr anchor="ctr"/>
           <a:lstStyle>
             <a:defPPr>
-              <a:defRPr sz="1725" b="1">
-                <a:solidFill>
-                  <a:srgbClr val="385E7D"/>
+              <a:defRPr sz="1800" b="1">
+                <a:solidFill>
+                  <a:srgbClr val="245487"/>
                 </a:solidFill>
                 <a:latin typeface="Hiragino Sans GB" panose="020B0300000000000000" charset="-122"/>
                 <a:ea typeface="Hiragino Sans GB" panose="020B0300000000000000" charset="-122"/>
@@ -3884,6 +4168,7 @@
           </a:lstStyle>
           <a:p>
             <a:pPr>
+              <a:buNone/>
               <a:defRPr sz="1725" b="1">
                 <a:solidFill>
                   <a:srgbClr val="385E7D"/>
@@ -3894,15 +4179,15 @@
               </a:defRPr>
             </a:pPr>
             <a:r>
-              <a:rPr sz="1725" b="1">
-                <a:solidFill>
-                  <a:srgbClr val="385E7D"/>
+              <a:rPr sz="1800" b="1">
+                <a:solidFill>
+                  <a:srgbClr val="245487"/>
                 </a:solidFill>
                 <a:latin typeface="Hiragino Sans GB" panose="020B0300000000000000" charset="-122"/>
                 <a:ea typeface="Hiragino Sans GB" panose="020B0300000000000000" charset="-122"/>
                 <a:cs typeface="Hiragino Sans GB" panose="020B0300000000000000" charset="-122"/>
               </a:rPr>
-              <a:t>B 组 SRS V1.1</a:t>
+              <a:t>SRS V1.1 设计范围</a:t>
             </a:r>
             <a:endParaRPr sz="1725" b="1">
               <a:solidFill>
@@ -3943,7 +4228,7 @@
             <a:defPPr>
               <a:defRPr sz="1500" b="0">
                 <a:solidFill>
-                  <a:srgbClr val="24364B"/>
+                  <a:srgbClr val="1F364D"/>
                 </a:solidFill>
                 <a:latin typeface="Hiragino Sans GB" panose="020B0300000000000000" charset="-122"/>
                 <a:ea typeface="Hiragino Sans GB" panose="020B0300000000000000" charset="-122"/>
@@ -3953,6 +4238,7 @@
           </a:lstStyle>
           <a:p>
             <a:pPr>
+              <a:buNone/>
               <a:defRPr sz="1500" b="0">
                 <a:solidFill>
                   <a:srgbClr val="24364B"/>
@@ -3965,13 +4251,13 @@
             <a:r>
               <a:rPr sz="1500" b="0">
                 <a:solidFill>
-                  <a:srgbClr val="24364B"/>
+                  <a:srgbClr val="1F364D"/>
                 </a:solidFill>
                 <a:latin typeface="Hiragino Sans GB" panose="020B0300000000000000" charset="-122"/>
                 <a:ea typeface="Hiragino Sans GB" panose="020B0300000000000000" charset="-122"/>
                 <a:cs typeface="Hiragino Sans GB" panose="020B0300000000000000" charset="-122"/>
               </a:rPr>
-              <a:t>本期设计七类成果：在上述四类之外纳入软著、课程材料、未发表手稿。</a:t>
+              <a:t>本期设计论文、专利、项目、获奖、软著、课程材料和未发表手稿七类。</a:t>
             </a:r>
             <a:endParaRPr sz="1500" b="0">
               <a:solidFill>
@@ -3987,6 +4273,7 @@
           </a:p>
           <a:p>
             <a:pPr>
+              <a:buNone/>
               <a:defRPr sz="1500" b="0">
                 <a:solidFill>
                   <a:srgbClr val="24364B"/>
@@ -3999,13 +4286,13 @@
             <a:r>
               <a:rPr sz="1500" b="0">
                 <a:solidFill>
-                  <a:srgbClr val="24364B"/>
+                  <a:srgbClr val="1F364D"/>
                 </a:solidFill>
                 <a:latin typeface="Hiragino Sans GB" panose="020B0300000000000000" charset="-122"/>
                 <a:ea typeface="Hiragino Sans GB" panose="020B0300000000000000" charset="-122"/>
                 <a:cs typeface="Hiragino Sans GB" panose="020B0300000000000000" charset="-122"/>
               </a:rPr>
-              <a:t>未发表手稿只能按授权登记，不从公开网页采集。</a:t>
+              <a:t>手稿仅按授权登记，不从公开网页采集；其他类型也须逐件核来源与权限。</a:t>
             </a:r>
             <a:endParaRPr sz="1500" b="0">
               <a:solidFill>
@@ -4039,7 +4326,7 @@
           </a:solidFill>
           <a:ln w="9525">
             <a:solidFill>
-              <a:srgbClr val="C9D9E5"/>
+              <a:srgbClr val="BBD1DD"/>
             </a:solidFill>
             <a:prstDash val="solid"/>
           </a:ln>
@@ -4062,7 +4349,7 @@
             <a:avLst/>
           </a:prstGeom>
           <a:solidFill>
-            <a:srgbClr val="385E7D"/>
+            <a:srgbClr val="2E69B1"/>
           </a:solidFill>
           <a:ln w="0">
             <a:noFill/>
@@ -4096,9 +4383,9 @@
           <a:bodyPr anchor="ctr"/>
           <a:lstStyle>
             <a:defPPr>
-              <a:defRPr sz="1725" b="1">
-                <a:solidFill>
-                  <a:srgbClr val="385E7D"/>
+              <a:defRPr sz="1800" b="1">
+                <a:solidFill>
+                  <a:srgbClr val="245487"/>
                 </a:solidFill>
                 <a:latin typeface="Hiragino Sans GB" panose="020B0300000000000000" charset="-122"/>
                 <a:ea typeface="Hiragino Sans GB" panose="020B0300000000000000" charset="-122"/>
@@ -4108,6 +4395,7 @@
           </a:lstStyle>
           <a:p>
             <a:pPr>
+              <a:buNone/>
               <a:defRPr sz="1725" b="1">
                 <a:solidFill>
                   <a:srgbClr val="385E7D"/>
@@ -4118,9 +4406,9 @@
               </a:defRPr>
             </a:pPr>
             <a:r>
-              <a:rPr sz="1725" b="1">
-                <a:solidFill>
-                  <a:srgbClr val="385E7D"/>
+              <a:rPr sz="1800" b="1">
+                <a:solidFill>
+                  <a:srgbClr val="245487"/>
                 </a:solidFill>
                 <a:latin typeface="Hiragino Sans GB" panose="020B0300000000000000" charset="-122"/>
                 <a:ea typeface="Hiragino Sans GB" panose="020B0300000000000000" charset="-122"/>
@@ -4167,7 +4455,7 @@
             <a:defPPr>
               <a:defRPr sz="1500" b="0">
                 <a:solidFill>
-                  <a:srgbClr val="24364B"/>
+                  <a:srgbClr val="1F364D"/>
                 </a:solidFill>
                 <a:latin typeface="Hiragino Sans GB" panose="020B0300000000000000" charset="-122"/>
                 <a:ea typeface="Hiragino Sans GB" panose="020B0300000000000000" charset="-122"/>
@@ -4177,6 +4465,7 @@
           </a:lstStyle>
           <a:p>
             <a:pPr>
+              <a:buNone/>
               <a:defRPr sz="1500" b="0">
                 <a:solidFill>
                   <a:srgbClr val="24364B"/>
@@ -4189,7 +4478,7 @@
             <a:r>
               <a:rPr sz="1500" b="0">
                 <a:solidFill>
-                  <a:srgbClr val="24364B"/>
+                  <a:srgbClr val="1F364D"/>
                 </a:solidFill>
                 <a:latin typeface="Hiragino Sans GB" panose="020B0300000000000000" charset="-122"/>
                 <a:ea typeface="Hiragino Sans GB" panose="020B0300000000000000" charset="-122"/>
@@ -4211,6 +4500,7 @@
           </a:p>
           <a:p>
             <a:pPr>
+              <a:buNone/>
               <a:defRPr sz="1500" b="0">
                 <a:solidFill>
                   <a:srgbClr val="24364B"/>
@@ -4223,7 +4513,7 @@
             <a:r>
               <a:rPr sz="1500" b="0">
                 <a:solidFill>
-                  <a:srgbClr val="24364B"/>
+                  <a:srgbClr val="1F364D"/>
                 </a:solidFill>
                 <a:latin typeface="Hiragino Sans GB" panose="020B0300000000000000" charset="-122"/>
                 <a:ea typeface="Hiragino Sans GB" panose="020B0300000000000000" charset="-122"/>
@@ -4259,7 +4549,7 @@
             <a:avLst/>
           </a:prstGeom>
           <a:solidFill>
-            <a:srgbClr val="EAF1F8"/>
+            <a:srgbClr val="DDEEF2"/>
           </a:solidFill>
           <a:ln w="0">
             <a:noFill/>
@@ -4295,7 +4585,7 @@
             <a:defPPr>
               <a:defRPr sz="1425" b="0">
                 <a:solidFill>
-                  <a:srgbClr val="24364B"/>
+                  <a:srgbClr val="1F364D"/>
                 </a:solidFill>
                 <a:latin typeface="Hiragino Sans GB" panose="020B0300000000000000" charset="-122"/>
                 <a:ea typeface="Hiragino Sans GB" panose="020B0300000000000000" charset="-122"/>
@@ -4305,6 +4595,7 @@
           </a:lstStyle>
           <a:p>
             <a:pPr>
+              <a:buNone/>
               <a:defRPr sz="1425" b="0">
                 <a:solidFill>
                   <a:srgbClr val="24364B"/>
@@ -4317,13 +4608,13 @@
             <a:r>
               <a:rPr sz="1425" b="0">
                 <a:solidFill>
-                  <a:srgbClr val="24364B"/>
+                  <a:srgbClr val="1F364D"/>
                 </a:solidFill>
                 <a:latin typeface="Hiragino Sans GB" panose="020B0300000000000000" charset="-122"/>
                 <a:ea typeface="Hiragino Sans GB" panose="020B0300000000000000" charset="-122"/>
                 <a:cs typeface="Hiragino Sans GB" panose="020B0300000000000000" charset="-122"/>
               </a:rPr>
-              <a:t>统一口径：调研事实、设计范围与待验证事项分别标注，设计目标不写成已取得的数据或测试结果。</a:t>
+              <a:t>调研事实、设计范围和待业务核验的问题分别标注。验收标准已定义，不表示系统已实现。</a:t>
             </a:r>
             <a:endParaRPr sz="1425" b="0">
               <a:solidFill>
@@ -4388,9 +4679,9 @@
           <a:bodyPr anchor="ctr"/>
           <a:lstStyle>
             <a:defPPr>
-              <a:defRPr sz="2475" b="1">
-                <a:solidFill>
-                  <a:srgbClr val="24364B"/>
+              <a:defRPr sz="2700" b="1">
+                <a:solidFill>
+                  <a:srgbClr val="102A43"/>
                 </a:solidFill>
                 <a:latin typeface="Hiragino Sans GB" panose="020B0300000000000000" charset="-122"/>
                 <a:ea typeface="Hiragino Sans GB" panose="020B0300000000000000" charset="-122"/>
@@ -4400,6 +4691,7 @@
           </a:lstStyle>
           <a:p>
             <a:pPr>
+              <a:buNone/>
               <a:defRPr sz="2475" b="1">
                 <a:solidFill>
                   <a:srgbClr val="24364B"/>
@@ -4410,15 +4702,15 @@
               </a:defRPr>
             </a:pPr>
             <a:r>
-              <a:rPr sz="2475" b="1">
-                <a:solidFill>
-                  <a:srgbClr val="24364B"/>
+              <a:rPr sz="2700" b="1">
+                <a:solidFill>
+                  <a:srgbClr val="102A43"/>
                 </a:solidFill>
                 <a:latin typeface="Hiragino Sans GB" panose="020B0300000000000000" charset="-122"/>
                 <a:ea typeface="Hiragino Sans GB" panose="020B0300000000000000" charset="-122"/>
                 <a:cs typeface="Hiragino Sans GB" panose="020B0300000000000000" charset="-122"/>
               </a:rPr>
-              <a:t>系统边界、参与者与六个用例</a:t>
+              <a:t>系统边界：谁使用平台、完成什么任务</a:t>
             </a:r>
             <a:endParaRPr sz="2475" b="1">
               <a:solidFill>
@@ -4442,13 +4734,13 @@
         <p:spPr>
           <a:xfrm>
             <a:off x="590550" y="1057275"/>
-            <a:ext cx="11010900" cy="19050"/>
+            <a:ext cx="11010900" cy="38100"/>
           </a:xfrm>
           <a:prstGeom prst="rect">
             <a:avLst/>
           </a:prstGeom>
           <a:solidFill>
-            <a:srgbClr val="C9D9E5"/>
+            <a:srgbClr val="2E69B1"/>
           </a:solidFill>
           <a:ln w="0">
             <a:noFill/>
@@ -4484,7 +4776,7 @@
             <a:defPPr>
               <a:defRPr sz="1050" b="0">
                 <a:solidFill>
-                  <a:srgbClr val="5D7183"/>
+                  <a:srgbClr val="62788B"/>
                 </a:solidFill>
                 <a:latin typeface="Hiragino Sans GB" panose="020B0300000000000000" charset="-122"/>
                 <a:ea typeface="Hiragino Sans GB" panose="020B0300000000000000" charset="-122"/>
@@ -4494,6 +4786,7 @@
           </a:lstStyle>
           <a:p>
             <a:pPr>
+              <a:buNone/>
               <a:defRPr sz="1050" b="0">
                 <a:solidFill>
                   <a:srgbClr val="5D7183"/>
@@ -4506,7 +4799,7 @@
             <a:r>
               <a:rPr sz="1050" b="0">
                 <a:solidFill>
-                  <a:srgbClr val="5D7183"/>
+                  <a:srgbClr val="62788B"/>
                 </a:solidFill>
                 <a:latin typeface="Hiragino Sans GB" panose="020B0300000000000000" charset="-122"/>
                 <a:ea typeface="Hiragino Sans GB" panose="020B0300000000000000" charset="-122"/>
@@ -4570,7 +4863,7 @@
           </a:solidFill>
           <a:ln w="9525">
             <a:solidFill>
-              <a:srgbClr val="C9D9E5"/>
+              <a:srgbClr val="BBD1DD"/>
             </a:solidFill>
             <a:prstDash val="solid"/>
           </a:ln>
@@ -4593,7 +4886,7 @@
             <a:avLst/>
           </a:prstGeom>
           <a:solidFill>
-            <a:srgbClr val="385E7D"/>
+            <a:srgbClr val="2E69B1"/>
           </a:solidFill>
           <a:ln w="0">
             <a:noFill/>
@@ -4627,9 +4920,9 @@
           <a:bodyPr anchor="ctr"/>
           <a:lstStyle>
             <a:defPPr>
-              <a:defRPr sz="1725" b="1">
-                <a:solidFill>
-                  <a:srgbClr val="385E7D"/>
+              <a:defRPr sz="1800" b="1">
+                <a:solidFill>
+                  <a:srgbClr val="245487"/>
                 </a:solidFill>
                 <a:latin typeface="Hiragino Sans GB" panose="020B0300000000000000" charset="-122"/>
                 <a:ea typeface="Hiragino Sans GB" panose="020B0300000000000000" charset="-122"/>
@@ -4639,6 +4932,7 @@
           </a:lstStyle>
           <a:p>
             <a:pPr>
+              <a:buNone/>
               <a:defRPr sz="1725" b="1">
                 <a:solidFill>
                   <a:srgbClr val="385E7D"/>
@@ -4649,9 +4943,9 @@
               </a:defRPr>
             </a:pPr>
             <a:r>
-              <a:rPr sz="1725" b="1">
-                <a:solidFill>
-                  <a:srgbClr val="385E7D"/>
+              <a:rPr sz="1800" b="1">
+                <a:solidFill>
+                  <a:srgbClr val="245487"/>
                 </a:solidFill>
                 <a:latin typeface="Hiragino Sans GB" panose="020B0300000000000000" charset="-122"/>
                 <a:ea typeface="Hiragino Sans GB" panose="020B0300000000000000" charset="-122"/>
@@ -4698,7 +4992,7 @@
             <a:defPPr>
               <a:defRPr sz="1350" b="0">
                 <a:solidFill>
-                  <a:srgbClr val="24364B"/>
+                  <a:srgbClr val="1F364D"/>
                 </a:solidFill>
                 <a:latin typeface="Hiragino Sans GB" panose="020B0300000000000000" charset="-122"/>
                 <a:ea typeface="Hiragino Sans GB" panose="020B0300000000000000" charset="-122"/>
@@ -4708,6 +5002,7 @@
           </a:lstStyle>
           <a:p>
             <a:pPr>
+              <a:buNone/>
               <a:defRPr sz="1350" b="0">
                 <a:solidFill>
                   <a:srgbClr val="24364B"/>
@@ -4720,13 +5015,13 @@
             <a:r>
               <a:rPr sz="1350" b="0">
                 <a:solidFill>
-                  <a:srgbClr val="24364B"/>
+                  <a:srgbClr val="1F364D"/>
                 </a:solidFill>
                 <a:latin typeface="Hiragino Sans GB" panose="020B0300000000000000" charset="-122"/>
                 <a:ea typeface="Hiragino Sans GB" panose="020B0300000000000000" charset="-122"/>
                 <a:cs typeface="Hiragino Sans GB" panose="020B0300000000000000" charset="-122"/>
               </a:rPr>
-              <a:t>访客、科研人员申请人、已认领学者、平台管理员；外部数据源仅辅助 UC01。</a:t>
+              <a:t>访客检索与查看；申请人认领本人门户；已认领学者管理成果；管理员采集与审核。外部数据源辅助 UC01。</a:t>
             </a:r>
             <a:endParaRPr sz="1350" b="0">
               <a:solidFill>
@@ -4760,7 +5055,7 @@
           </a:solidFill>
           <a:ln w="9525">
             <a:solidFill>
-              <a:srgbClr val="C9D9E5"/>
+              <a:srgbClr val="BBD1DD"/>
             </a:solidFill>
             <a:prstDash val="solid"/>
           </a:ln>
@@ -4783,7 +5078,7 @@
             <a:avLst/>
           </a:prstGeom>
           <a:solidFill>
-            <a:srgbClr val="385E7D"/>
+            <a:srgbClr val="2E69B1"/>
           </a:solidFill>
           <a:ln w="0">
             <a:noFill/>
@@ -4817,9 +5112,9 @@
           <a:bodyPr anchor="ctr"/>
           <a:lstStyle>
             <a:defPPr>
-              <a:defRPr sz="1725" b="1">
-                <a:solidFill>
-                  <a:srgbClr val="385E7D"/>
+              <a:defRPr sz="1800" b="1">
+                <a:solidFill>
+                  <a:srgbClr val="245487"/>
                 </a:solidFill>
                 <a:latin typeface="Hiragino Sans GB" panose="020B0300000000000000" charset="-122"/>
                 <a:ea typeface="Hiragino Sans GB" panose="020B0300000000000000" charset="-122"/>
@@ -4829,6 +5124,7 @@
           </a:lstStyle>
           <a:p>
             <a:pPr>
+              <a:buNone/>
               <a:defRPr sz="1725" b="1">
                 <a:solidFill>
                   <a:srgbClr val="385E7D"/>
@@ -4839,9 +5135,9 @@
               </a:defRPr>
             </a:pPr>
             <a:r>
-              <a:rPr sz="1725" b="1">
-                <a:solidFill>
-                  <a:srgbClr val="385E7D"/>
+              <a:rPr sz="1800" b="1">
+                <a:solidFill>
+                  <a:srgbClr val="245487"/>
                 </a:solidFill>
                 <a:latin typeface="Hiragino Sans GB" panose="020B0300000000000000" charset="-122"/>
                 <a:ea typeface="Hiragino Sans GB" panose="020B0300000000000000" charset="-122"/>
@@ -4888,7 +5184,7 @@
             <a:defPPr>
               <a:defRPr sz="1350" b="0">
                 <a:solidFill>
-                  <a:srgbClr val="24364B"/>
+                  <a:srgbClr val="1F364D"/>
                 </a:solidFill>
                 <a:latin typeface="Hiragino Sans GB" panose="020B0300000000000000" charset="-122"/>
                 <a:ea typeface="Hiragino Sans GB" panose="020B0300000000000000" charset="-122"/>
@@ -4898,6 +5194,7 @@
           </a:lstStyle>
           <a:p>
             <a:pPr>
+              <a:buNone/>
               <a:defRPr sz="1350" b="0">
                 <a:solidFill>
                   <a:srgbClr val="24364B"/>
@@ -4910,13 +5207,13 @@
             <a:r>
               <a:rPr sz="1350" b="0">
                 <a:solidFill>
-                  <a:srgbClr val="24364B"/>
+                  <a:srgbClr val="1F364D"/>
                 </a:solidFill>
                 <a:latin typeface="Hiragino Sans GB" panose="020B0300000000000000" charset="-122"/>
                 <a:ea typeface="Hiragino Sans GB" panose="020B0300000000000000" charset="-122"/>
                 <a:cs typeface="Hiragino Sans GB" panose="020B0300000000000000" charset="-122"/>
               </a:rPr>
-              <a:t>UC01 采集任务   UC02 申请认领</a:t>
+              <a:t>UC01 管采集　UC02 申请认领</a:t>
             </a:r>
             <a:endParaRPr sz="1350" b="0">
               <a:solidFill>
@@ -4929,6 +5226,7 @@
           </a:p>
           <a:p>
             <a:pPr>
+              <a:buNone/>
               <a:defRPr sz="1350" b="0">
                 <a:solidFill>
                   <a:srgbClr val="24364B"/>
@@ -4941,13 +5239,13 @@
             <a:r>
               <a:rPr sz="1350" b="0">
                 <a:solidFill>
-                  <a:srgbClr val="24364B"/>
+                  <a:srgbClr val="1F364D"/>
                 </a:solidFill>
                 <a:latin typeface="Hiragino Sans GB" panose="020B0300000000000000" charset="-122"/>
                 <a:ea typeface="Hiragino Sans GB" panose="020B0300000000000000" charset="-122"/>
                 <a:cs typeface="Hiragino Sans GB" panose="020B0300000000000000" charset="-122"/>
               </a:rPr>
-              <a:t>UC03 审核认领   UC04 检索查看</a:t>
+              <a:t>UC03 审核认领　UC04 检索查看</a:t>
             </a:r>
             <a:endParaRPr sz="1350" b="0">
               <a:solidFill>
@@ -4960,6 +5258,7 @@
           </a:p>
           <a:p>
             <a:pPr>
+              <a:buNone/>
               <a:defRPr sz="1350" b="0">
                 <a:solidFill>
                   <a:srgbClr val="24364B"/>
@@ -4972,13 +5271,13 @@
             <a:r>
               <a:rPr sz="1350" b="0">
                 <a:solidFill>
-                  <a:srgbClr val="24364B"/>
+                  <a:srgbClr val="1F364D"/>
                 </a:solidFill>
                 <a:latin typeface="Hiragino Sans GB" panose="020B0300000000000000" charset="-122"/>
                 <a:ea typeface="Hiragino Sans GB" panose="020B0300000000000000" charset="-122"/>
                 <a:cs typeface="Hiragino Sans GB" panose="020B0300000000000000" charset="-122"/>
               </a:rPr>
-              <a:t>UC05 本人成果管理</a:t>
+              <a:t>UC05 管理本人已认领成果</a:t>
             </a:r>
             <a:endParaRPr sz="1350" b="0">
               <a:solidFill>
@@ -4991,6 +5290,7 @@
           </a:p>
           <a:p>
             <a:pPr>
+              <a:buNone/>
               <a:defRPr sz="1350" b="0">
                 <a:solidFill>
                   <a:srgbClr val="24364B"/>
@@ -5003,13 +5303,13 @@
             <a:r>
               <a:rPr sz="1350" b="0">
                 <a:solidFill>
-                  <a:srgbClr val="24364B"/>
+                  <a:srgbClr val="1F364D"/>
                 </a:solidFill>
                 <a:latin typeface="Hiragino Sans GB" panose="020B0300000000000000" charset="-122"/>
                 <a:ea typeface="Hiragino Sans GB" panose="020B0300000000000000" charset="-122"/>
                 <a:cs typeface="Hiragino Sans GB" panose="020B0300000000000000" charset="-122"/>
               </a:rPr>
-              <a:t>UC06 统计与专家合作网络</a:t>
+              <a:t>UC06 统计及专家合作网络</a:t>
             </a:r>
             <a:endParaRPr sz="1350" b="0">
               <a:solidFill>
@@ -5074,9 +5374,9 @@
           <a:bodyPr anchor="ctr"/>
           <a:lstStyle>
             <a:defPPr>
-              <a:defRPr sz="2475" b="1">
-                <a:solidFill>
-                  <a:srgbClr val="24364B"/>
+              <a:defRPr sz="2700" b="1">
+                <a:solidFill>
+                  <a:srgbClr val="102A43"/>
                 </a:solidFill>
                 <a:latin typeface="Hiragino Sans GB" panose="020B0300000000000000" charset="-122"/>
                 <a:ea typeface="Hiragino Sans GB" panose="020B0300000000000000" charset="-122"/>
@@ -5086,6 +5386,7 @@
           </a:lstStyle>
           <a:p>
             <a:pPr>
+              <a:buNone/>
               <a:defRPr sz="2475" b="1">
                 <a:solidFill>
                   <a:srgbClr val="24364B"/>
@@ -5096,15 +5397,15 @@
               </a:defRPr>
             </a:pPr>
             <a:r>
-              <a:rPr sz="2475" b="1">
-                <a:solidFill>
-                  <a:srgbClr val="24364B"/>
+              <a:rPr sz="2700" b="1">
+                <a:solidFill>
+                  <a:srgbClr val="102A43"/>
                 </a:solidFill>
                 <a:latin typeface="Hiragino Sans GB" panose="020B0300000000000000" charset="-122"/>
                 <a:ea typeface="Hiragino Sans GB" panose="020B0300000000000000" charset="-122"/>
                 <a:cs typeface="Hiragino Sans GB" panose="020B0300000000000000" charset="-122"/>
               </a:rPr>
-              <a:t>门户认领：申请、核验、授权</a:t>
+              <a:t>门户认领：从提交证据到授予管理权</a:t>
             </a:r>
             <a:endParaRPr sz="2475" b="1">
               <a:solidFill>
@@ -5128,13 +5429,13 @@
         <p:spPr>
           <a:xfrm>
             <a:off x="590550" y="1057275"/>
-            <a:ext cx="11010900" cy="19050"/>
+            <a:ext cx="11010900" cy="38100"/>
           </a:xfrm>
           <a:prstGeom prst="rect">
             <a:avLst/>
           </a:prstGeom>
           <a:solidFill>
-            <a:srgbClr val="C9D9E5"/>
+            <a:srgbClr val="2E69B1"/>
           </a:solidFill>
           <a:ln w="0">
             <a:noFill/>
@@ -5170,7 +5471,7 @@
             <a:defPPr>
               <a:defRPr sz="1050" b="0">
                 <a:solidFill>
-                  <a:srgbClr val="5D7183"/>
+                  <a:srgbClr val="62788B"/>
                 </a:solidFill>
                 <a:latin typeface="Hiragino Sans GB" panose="020B0300000000000000" charset="-122"/>
                 <a:ea typeface="Hiragino Sans GB" panose="020B0300000000000000" charset="-122"/>
@@ -5180,6 +5481,7 @@
           </a:lstStyle>
           <a:p>
             <a:pPr>
+              <a:buNone/>
               <a:defRPr sz="1050" b="0">
                 <a:solidFill>
                   <a:srgbClr val="5D7183"/>
@@ -5192,7 +5494,7 @@
             <a:r>
               <a:rPr sz="1050" b="0">
                 <a:solidFill>
-                  <a:srgbClr val="5D7183"/>
+                  <a:srgbClr val="62788B"/>
                 </a:solidFill>
                 <a:latin typeface="Hiragino Sans GB" panose="020B0300000000000000" charset="-122"/>
                 <a:ea typeface="Hiragino Sans GB" panose="020B0300000000000000" charset="-122"/>
@@ -5256,7 +5558,7 @@
           </a:solidFill>
           <a:ln w="9525">
             <a:solidFill>
-              <a:srgbClr val="C9D9E5"/>
+              <a:srgbClr val="BBD1DD"/>
             </a:solidFill>
             <a:prstDash val="solid"/>
           </a:ln>
@@ -5279,7 +5581,7 @@
             <a:avLst/>
           </a:prstGeom>
           <a:solidFill>
-            <a:srgbClr val="385E7D"/>
+            <a:srgbClr val="2E69B1"/>
           </a:solidFill>
           <a:ln w="0">
             <a:noFill/>
@@ -5313,9 +5615,9 @@
           <a:bodyPr anchor="ctr"/>
           <a:lstStyle>
             <a:defPPr>
-              <a:defRPr sz="1725" b="1">
-                <a:solidFill>
-                  <a:srgbClr val="385E7D"/>
+              <a:defRPr sz="1800" b="1">
+                <a:solidFill>
+                  <a:srgbClr val="245487"/>
                 </a:solidFill>
                 <a:latin typeface="Hiragino Sans GB" panose="020B0300000000000000" charset="-122"/>
                 <a:ea typeface="Hiragino Sans GB" panose="020B0300000000000000" charset="-122"/>
@@ -5325,6 +5627,7 @@
           </a:lstStyle>
           <a:p>
             <a:pPr>
+              <a:buNone/>
               <a:defRPr sz="1725" b="1">
                 <a:solidFill>
                   <a:srgbClr val="385E7D"/>
@@ -5335,9 +5638,9 @@
               </a:defRPr>
             </a:pPr>
             <a:r>
-              <a:rPr sz="1725" b="1">
-                <a:solidFill>
-                  <a:srgbClr val="385E7D"/>
+              <a:rPr sz="1800" b="1">
+                <a:solidFill>
+                  <a:srgbClr val="245487"/>
                 </a:solidFill>
                 <a:latin typeface="Hiragino Sans GB" panose="020B0300000000000000" charset="-122"/>
                 <a:ea typeface="Hiragino Sans GB" panose="020B0300000000000000" charset="-122"/>
@@ -5384,7 +5687,7 @@
             <a:defPPr>
               <a:defRPr sz="1350" b="0">
                 <a:solidFill>
-                  <a:srgbClr val="24364B"/>
+                  <a:srgbClr val="1F364D"/>
                 </a:solidFill>
                 <a:latin typeface="Hiragino Sans GB" panose="020B0300000000000000" charset="-122"/>
                 <a:ea typeface="Hiragino Sans GB" panose="020B0300000000000000" charset="-122"/>
@@ -5394,6 +5697,7 @@
           </a:lstStyle>
           <a:p>
             <a:pPr>
+              <a:buNone/>
               <a:defRPr sz="1350" b="0">
                 <a:solidFill>
                   <a:srgbClr val="24364B"/>
@@ -5406,13 +5710,13 @@
             <a:r>
               <a:rPr sz="1350" b="0">
                 <a:solidFill>
-                  <a:srgbClr val="24364B"/>
+                  <a:srgbClr val="1F364D"/>
                 </a:solidFill>
                 <a:latin typeface="Hiragino Sans GB" panose="020B0300000000000000" charset="-122"/>
                 <a:ea typeface="Hiragino Sans GB" panose="020B0300000000000000" charset="-122"/>
                 <a:cs typeface="Hiragino Sans GB" panose="020B0300000000000000" charset="-122"/>
               </a:rPr>
-              <a:t>申请人定位本人门户并提交证据；系统检查重复申请与版本；管理员核验归属、记录理由；批准后授予目标门户管理权。</a:t>
+              <a:t>申请人定位本人门户并提交身份佐证。平台检查重复申请与版本；管理员核验归属、记录理由，通过后才授予目标门户管理权。</a:t>
             </a:r>
             <a:endParaRPr sz="1350" b="0">
               <a:solidFill>
@@ -5446,7 +5750,7 @@
           </a:solidFill>
           <a:ln w="9525">
             <a:solidFill>
-              <a:srgbClr val="C9D9E5"/>
+              <a:srgbClr val="BBD1DD"/>
             </a:solidFill>
             <a:prstDash val="solid"/>
           </a:ln>
@@ -5469,7 +5773,7 @@
             <a:avLst/>
           </a:prstGeom>
           <a:solidFill>
-            <a:srgbClr val="385E7D"/>
+            <a:srgbClr val="2E69B1"/>
           </a:solidFill>
           <a:ln w="0">
             <a:noFill/>
@@ -5503,9 +5807,9 @@
           <a:bodyPr anchor="ctr"/>
           <a:lstStyle>
             <a:defPPr>
-              <a:defRPr sz="1725" b="1">
-                <a:solidFill>
-                  <a:srgbClr val="385E7D"/>
+              <a:defRPr sz="1800" b="1">
+                <a:solidFill>
+                  <a:srgbClr val="245487"/>
                 </a:solidFill>
                 <a:latin typeface="Hiragino Sans GB" panose="020B0300000000000000" charset="-122"/>
                 <a:ea typeface="Hiragino Sans GB" panose="020B0300000000000000" charset="-122"/>
@@ -5515,6 +5819,7 @@
           </a:lstStyle>
           <a:p>
             <a:pPr>
+              <a:buNone/>
               <a:defRPr sz="1725" b="1">
                 <a:solidFill>
                   <a:srgbClr val="385E7D"/>
@@ -5525,9 +5830,9 @@
               </a:defRPr>
             </a:pPr>
             <a:r>
-              <a:rPr sz="1725" b="1">
-                <a:solidFill>
-                  <a:srgbClr val="385E7D"/>
+              <a:rPr sz="1800" b="1">
+                <a:solidFill>
+                  <a:srgbClr val="245487"/>
                 </a:solidFill>
                 <a:latin typeface="Hiragino Sans GB" panose="020B0300000000000000" charset="-122"/>
                 <a:ea typeface="Hiragino Sans GB" panose="020B0300000000000000" charset="-122"/>
@@ -5574,7 +5879,7 @@
             <a:defPPr>
               <a:defRPr sz="1350" b="0">
                 <a:solidFill>
-                  <a:srgbClr val="24364B"/>
+                  <a:srgbClr val="1F364D"/>
                 </a:solidFill>
                 <a:latin typeface="Hiragino Sans GB" panose="020B0300000000000000" charset="-122"/>
                 <a:ea typeface="Hiragino Sans GB" panose="020B0300000000000000" charset="-122"/>
@@ -5584,6 +5889,7 @@
           </a:lstStyle>
           <a:p>
             <a:pPr>
+              <a:buNone/>
               <a:defRPr sz="1350" b="0">
                 <a:solidFill>
                   <a:srgbClr val="24364B"/>
@@ -5596,13 +5902,13 @@
             <a:r>
               <a:rPr sz="1350" b="0">
                 <a:solidFill>
-                  <a:srgbClr val="24364B"/>
+                  <a:srgbClr val="1F364D"/>
                 </a:solidFill>
                 <a:latin typeface="Hiragino Sans GB" panose="020B0300000000000000" charset="-122"/>
                 <a:ea typeface="Hiragino Sans GB" panose="020B0300000000000000" charset="-122"/>
                 <a:cs typeface="Hiragino Sans GB" panose="020B0300000000000000" charset="-122"/>
               </a:rPr>
-              <a:t>证据不足、同名冲突、撤回或争议均留痕。认领门户不自动取得全部同名成果的所有权。</a:t>
+              <a:t>证据不足、同名冲突、撤回和批准后争议均留痕。门户管理权不等于对同名成果或合著成果的独占权。</a:t>
             </a:r>
             <a:endParaRPr sz="1350" b="0">
               <a:solidFill>
@@ -5667,9 +5973,9 @@
           <a:bodyPr anchor="ctr"/>
           <a:lstStyle>
             <a:defPPr>
-              <a:defRPr sz="2475" b="1">
-                <a:solidFill>
-                  <a:srgbClr val="24364B"/>
+              <a:defRPr sz="2700" b="1">
+                <a:solidFill>
+                  <a:srgbClr val="102A43"/>
                 </a:solidFill>
                 <a:latin typeface="Hiragino Sans GB" panose="020B0300000000000000" charset="-122"/>
                 <a:ea typeface="Hiragino Sans GB" panose="020B0300000000000000" charset="-122"/>
@@ -5679,6 +5985,7 @@
           </a:lstStyle>
           <a:p>
             <a:pPr>
+              <a:buNone/>
               <a:defRPr sz="2475" b="1">
                 <a:solidFill>
                   <a:srgbClr val="24364B"/>
@@ -5689,15 +5996,15 @@
               </a:defRPr>
             </a:pPr>
             <a:r>
-              <a:rPr sz="2475" b="1">
-                <a:solidFill>
-                  <a:srgbClr val="24364B"/>
+              <a:rPr sz="2700" b="1">
+                <a:solidFill>
+                  <a:srgbClr val="102A43"/>
                 </a:solidFill>
                 <a:latin typeface="Hiragino Sans GB" panose="020B0300000000000000" charset="-122"/>
                 <a:ea typeface="Hiragino Sans GB" panose="020B0300000000000000" charset="-122"/>
                 <a:cs typeface="Hiragino Sans GB" panose="020B0300000000000000" charset="-122"/>
               </a:rPr>
-              <a:t>状态模型：失败与争议可追踪</a:t>
+              <a:t>两条状态机保留失败与争议</a:t>
             </a:r>
             <a:endParaRPr sz="2475" b="1">
               <a:solidFill>
@@ -5721,13 +6028,13 @@
         <p:spPr>
           <a:xfrm>
             <a:off x="590550" y="1057275"/>
-            <a:ext cx="11010900" cy="19050"/>
+            <a:ext cx="11010900" cy="38100"/>
           </a:xfrm>
           <a:prstGeom prst="rect">
             <a:avLst/>
           </a:prstGeom>
           <a:solidFill>
-            <a:srgbClr val="C9D9E5"/>
+            <a:srgbClr val="2E69B1"/>
           </a:solidFill>
           <a:ln w="0">
             <a:noFill/>
@@ -5763,7 +6070,7 @@
             <a:defPPr>
               <a:defRPr sz="1050" b="0">
                 <a:solidFill>
-                  <a:srgbClr val="5D7183"/>
+                  <a:srgbClr val="62788B"/>
                 </a:solidFill>
                 <a:latin typeface="Hiragino Sans GB" panose="020B0300000000000000" charset="-122"/>
                 <a:ea typeface="Hiragino Sans GB" panose="020B0300000000000000" charset="-122"/>
@@ -5773,6 +6080,7 @@
           </a:lstStyle>
           <a:p>
             <a:pPr>
+              <a:buNone/>
               <a:defRPr sz="1050" b="0">
                 <a:solidFill>
                   <a:srgbClr val="5D7183"/>
@@ -5785,7 +6093,7 @@
             <a:r>
               <a:rPr sz="1050" b="0">
                 <a:solidFill>
-                  <a:srgbClr val="5D7183"/>
+                  <a:srgbClr val="62788B"/>
                 </a:solidFill>
                 <a:latin typeface="Hiragino Sans GB" panose="020B0300000000000000" charset="-122"/>
                 <a:ea typeface="Hiragino Sans GB" panose="020B0300000000000000" charset="-122"/>
@@ -5873,7 +6181,7 @@
           </a:solidFill>
           <a:ln w="9525">
             <a:solidFill>
-              <a:srgbClr val="C9D9E5"/>
+              <a:srgbClr val="BBD1DD"/>
             </a:solidFill>
             <a:prstDash val="solid"/>
           </a:ln>
@@ -5896,7 +6204,7 @@
             <a:avLst/>
           </a:prstGeom>
           <a:solidFill>
-            <a:srgbClr val="385E7D"/>
+            <a:srgbClr val="2E69B1"/>
           </a:solidFill>
           <a:ln w="0">
             <a:noFill/>
@@ -5930,9 +6238,9 @@
           <a:bodyPr anchor="ctr"/>
           <a:lstStyle>
             <a:defPPr>
-              <a:defRPr sz="1725" b="1">
-                <a:solidFill>
-                  <a:srgbClr val="385E7D"/>
+              <a:defRPr sz="1800" b="1">
+                <a:solidFill>
+                  <a:srgbClr val="245487"/>
                 </a:solidFill>
                 <a:latin typeface="Hiragino Sans GB" panose="020B0300000000000000" charset="-122"/>
                 <a:ea typeface="Hiragino Sans GB" panose="020B0300000000000000" charset="-122"/>
@@ -5942,6 +6250,7 @@
           </a:lstStyle>
           <a:p>
             <a:pPr>
+              <a:buNone/>
               <a:defRPr sz="1725" b="1">
                 <a:solidFill>
                   <a:srgbClr val="385E7D"/>
@@ -5952,9 +6261,9 @@
               </a:defRPr>
             </a:pPr>
             <a:r>
-              <a:rPr sz="1725" b="1">
-                <a:solidFill>
-                  <a:srgbClr val="385E7D"/>
+              <a:rPr sz="1800" b="1">
+                <a:solidFill>
+                  <a:srgbClr val="245487"/>
                 </a:solidFill>
                 <a:latin typeface="Hiragino Sans GB" panose="020B0300000000000000" charset="-122"/>
                 <a:ea typeface="Hiragino Sans GB" panose="020B0300000000000000" charset="-122"/>
@@ -5984,7 +6293,7 @@
         <p:spPr>
           <a:xfrm>
             <a:off x="857250" y="5591175"/>
-            <a:ext cx="4781550" cy="381000"/>
+            <a:ext cx="4781550" cy="495300"/>
           </a:xfrm>
           <a:prstGeom prst="rect">
             <a:avLst/>
@@ -5999,9 +6308,9 @@
           <a:bodyPr anchor="t"/>
           <a:lstStyle>
             <a:defPPr>
-              <a:defRPr sz="1350" b="0">
-                <a:solidFill>
-                  <a:srgbClr val="24364B"/>
+              <a:defRPr sz="1275" b="0">
+                <a:solidFill>
+                  <a:srgbClr val="1F364D"/>
                 </a:solidFill>
                 <a:latin typeface="Hiragino Sans GB" panose="020B0300000000000000" charset="-122"/>
                 <a:ea typeface="Hiragino Sans GB" panose="020B0300000000000000" charset="-122"/>
@@ -6011,6 +6320,7 @@
           </a:lstStyle>
           <a:p>
             <a:pPr>
+              <a:buNone/>
               <a:defRPr sz="1350" b="0">
                 <a:solidFill>
                   <a:srgbClr val="24364B"/>
@@ -6021,15 +6331,15 @@
               </a:defRPr>
             </a:pPr>
             <a:r>
-              <a:rPr sz="1350" b="0">
-                <a:solidFill>
-                  <a:srgbClr val="24364B"/>
+              <a:rPr sz="1275" b="0">
+                <a:solidFill>
+                  <a:srgbClr val="1F364D"/>
                 </a:solidFill>
                 <a:latin typeface="Hiragino Sans GB" panose="020B0300000000000000" charset="-122"/>
                 <a:ea typeface="Hiragino Sans GB" panose="020B0300000000000000" charset="-122"/>
                 <a:cs typeface="Hiragino Sans GB" panose="020B0300000000000000" charset="-122"/>
               </a:rPr>
-              <a:t>queued → running → succeeded／failed；失败最多重试 3 次，停止与部分成功单独记录。</a:t>
+              <a:t>queued → running → succeeded/failed；最多重试 3 次。</a:t>
             </a:r>
             <a:endParaRPr sz="1350" b="0">
               <a:solidFill>
@@ -6063,7 +6373,7 @@
           </a:solidFill>
           <a:ln w="9525">
             <a:solidFill>
-              <a:srgbClr val="C9D9E5"/>
+              <a:srgbClr val="BBD1DD"/>
             </a:solidFill>
             <a:prstDash val="solid"/>
           </a:ln>
@@ -6086,7 +6396,7 @@
             <a:avLst/>
           </a:prstGeom>
           <a:solidFill>
-            <a:srgbClr val="385E7D"/>
+            <a:srgbClr val="2E69B1"/>
           </a:solidFill>
           <a:ln w="0">
             <a:noFill/>
@@ -6120,9 +6430,9 @@
           <a:bodyPr anchor="ctr"/>
           <a:lstStyle>
             <a:defPPr>
-              <a:defRPr sz="1725" b="1">
-                <a:solidFill>
-                  <a:srgbClr val="385E7D"/>
+              <a:defRPr sz="1800" b="1">
+                <a:solidFill>
+                  <a:srgbClr val="245487"/>
                 </a:solidFill>
                 <a:latin typeface="Hiragino Sans GB" panose="020B0300000000000000" charset="-122"/>
                 <a:ea typeface="Hiragino Sans GB" panose="020B0300000000000000" charset="-122"/>
@@ -6132,6 +6442,7 @@
           </a:lstStyle>
           <a:p>
             <a:pPr>
+              <a:buNone/>
               <a:defRPr sz="1725" b="1">
                 <a:solidFill>
                   <a:srgbClr val="385E7D"/>
@@ -6142,9 +6453,9 @@
               </a:defRPr>
             </a:pPr>
             <a:r>
-              <a:rPr sz="1725" b="1">
-                <a:solidFill>
-                  <a:srgbClr val="385E7D"/>
+              <a:rPr sz="1800" b="1">
+                <a:solidFill>
+                  <a:srgbClr val="245487"/>
                 </a:solidFill>
                 <a:latin typeface="Hiragino Sans GB" panose="020B0300000000000000" charset="-122"/>
                 <a:ea typeface="Hiragino Sans GB" panose="020B0300000000000000" charset="-122"/>
@@ -6174,7 +6485,7 @@
         <p:spPr>
           <a:xfrm>
             <a:off x="6505575" y="5591175"/>
-            <a:ext cx="4781550" cy="381000"/>
+            <a:ext cx="4781550" cy="495300"/>
           </a:xfrm>
           <a:prstGeom prst="rect">
             <a:avLst/>
@@ -6189,9 +6500,9 @@
           <a:bodyPr anchor="t"/>
           <a:lstStyle>
             <a:defPPr>
-              <a:defRPr sz="1350" b="0">
-                <a:solidFill>
-                  <a:srgbClr val="24364B"/>
+              <a:defRPr sz="1275" b="0">
+                <a:solidFill>
+                  <a:srgbClr val="1F364D"/>
                 </a:solidFill>
                 <a:latin typeface="Hiragino Sans GB" panose="020B0300000000000000" charset="-122"/>
                 <a:ea typeface="Hiragino Sans GB" panose="020B0300000000000000" charset="-122"/>
@@ -6201,6 +6512,7 @@
           </a:lstStyle>
           <a:p>
             <a:pPr>
+              <a:buNone/>
               <a:defRPr sz="1350" b="0">
                 <a:solidFill>
                   <a:srgbClr val="24364B"/>
@@ -6211,15 +6523,15 @@
               </a:defRPr>
             </a:pPr>
             <a:r>
-              <a:rPr sz="1350" b="0">
-                <a:solidFill>
-                  <a:srgbClr val="24364B"/>
+              <a:rPr sz="1275" b="0">
+                <a:solidFill>
+                  <a:srgbClr val="1F364D"/>
                 </a:solidFill>
                 <a:latin typeface="Hiragino Sans GB" panose="020B0300000000000000" charset="-122"/>
                 <a:ea typeface="Hiragino Sans GB" panose="020B0300000000000000" charset="-122"/>
                 <a:cs typeface="Hiragino Sans GB" panose="020B0300000000000000" charset="-122"/>
               </a:rPr>
-              <a:t>submitted → verifying → approved／rejected；允许 cancelled，批准后争议可进入 disputed。</a:t>
+              <a:t>submitted → verifying → approved/rejected；另有 cancelled 和 disputed。</a:t>
             </a:r>
             <a:endParaRPr sz="1350" b="0">
               <a:solidFill>
@@ -6284,9 +6596,9 @@
           <a:bodyPr anchor="ctr"/>
           <a:lstStyle>
             <a:defPPr>
-              <a:defRPr sz="2475" b="1">
-                <a:solidFill>
-                  <a:srgbClr val="24364B"/>
+              <a:defRPr sz="2700" b="1">
+                <a:solidFill>
+                  <a:srgbClr val="102A43"/>
                 </a:solidFill>
                 <a:latin typeface="Hiragino Sans GB" panose="020B0300000000000000" charset="-122"/>
                 <a:ea typeface="Hiragino Sans GB" panose="020B0300000000000000" charset="-122"/>
@@ -6296,6 +6608,7 @@
           </a:lstStyle>
           <a:p>
             <a:pPr>
+              <a:buNone/>
               <a:defRPr sz="2475" b="1">
                 <a:solidFill>
                   <a:srgbClr val="24364B"/>
@@ -6306,15 +6619,15 @@
               </a:defRPr>
             </a:pPr>
             <a:r>
-              <a:rPr sz="2475" b="1">
-                <a:solidFill>
-                  <a:srgbClr val="24364B"/>
+              <a:rPr sz="2700" b="1">
+                <a:solidFill>
+                  <a:srgbClr val="102A43"/>
                 </a:solidFill>
                 <a:latin typeface="Hiragino Sans GB" panose="020B0300000000000000" charset="-122"/>
                 <a:ea typeface="Hiragino Sans GB" panose="020B0300000000000000" charset="-122"/>
                 <a:cs typeface="Hiragino Sans GB" panose="020B0300000000000000" charset="-122"/>
               </a:rPr>
-              <a:t>六个用例如何覆盖 SRS</a:t>
+              <a:t>六个用例承接 29 条功能需求</a:t>
             </a:r>
             <a:endParaRPr sz="2475" b="1">
               <a:solidFill>
@@ -6338,13 +6651,13 @@
         <p:spPr>
           <a:xfrm>
             <a:off x="590550" y="1057275"/>
-            <a:ext cx="11010900" cy="19050"/>
+            <a:ext cx="11010900" cy="38100"/>
           </a:xfrm>
           <a:prstGeom prst="rect">
             <a:avLst/>
           </a:prstGeom>
           <a:solidFill>
-            <a:srgbClr val="C9D9E5"/>
+            <a:srgbClr val="2E69B1"/>
           </a:solidFill>
           <a:ln w="0">
             <a:noFill/>
@@ -6380,7 +6693,7 @@
             <a:defPPr>
               <a:defRPr sz="1050" b="0">
                 <a:solidFill>
-                  <a:srgbClr val="5D7183"/>
+                  <a:srgbClr val="62788B"/>
                 </a:solidFill>
                 <a:latin typeface="Hiragino Sans GB" panose="020B0300000000000000" charset="-122"/>
                 <a:ea typeface="Hiragino Sans GB" panose="020B0300000000000000" charset="-122"/>
@@ -6390,6 +6703,7 @@
           </a:lstStyle>
           <a:p>
             <a:pPr>
+              <a:buNone/>
               <a:defRPr sz="1050" b="0">
                 <a:solidFill>
                   <a:srgbClr val="5D7183"/>
@@ -6402,7 +6716,7 @@
             <a:r>
               <a:rPr sz="1050" b="0">
                 <a:solidFill>
-                  <a:srgbClr val="5D7183"/>
+                  <a:srgbClr val="62788B"/>
                 </a:solidFill>
                 <a:latin typeface="Hiragino Sans GB" panose="020B0300000000000000" charset="-122"/>
                 <a:ea typeface="Hiragino Sans GB" panose="020B0300000000000000" charset="-122"/>
@@ -6438,7 +6752,7 @@
             <a:avLst/>
           </a:prstGeom>
           <a:solidFill>
-            <a:srgbClr val="EAF1F8"/>
+            <a:srgbClr val="DDEEF2"/>
           </a:solidFill>
           <a:ln w="9525">
             <a:solidFill>
@@ -6476,7 +6790,7 @@
             <a:defPPr>
               <a:defRPr sz="1350" b="1">
                 <a:solidFill>
-                  <a:srgbClr val="385E7D"/>
+                  <a:srgbClr val="245487"/>
                 </a:solidFill>
                 <a:latin typeface="Hiragino Sans GB" panose="020B0300000000000000" charset="-122"/>
                 <a:ea typeface="Hiragino Sans GB" panose="020B0300000000000000" charset="-122"/>
@@ -6486,6 +6800,7 @@
           </a:lstStyle>
           <a:p>
             <a:pPr>
+              <a:buNone/>
               <a:defRPr sz="1350" b="1">
                 <a:solidFill>
                   <a:srgbClr val="385E7D"/>
@@ -6498,7 +6813,7 @@
             <a:r>
               <a:rPr sz="1350" b="1">
                 <a:solidFill>
-                  <a:srgbClr val="385E7D"/>
+                  <a:srgbClr val="245487"/>
                 </a:solidFill>
                 <a:latin typeface="Hiragino Sans GB" panose="020B0300000000000000" charset="-122"/>
                 <a:ea typeface="Hiragino Sans GB" panose="020B0300000000000000" charset="-122"/>
@@ -6534,7 +6849,7 @@
             <a:avLst/>
           </a:prstGeom>
           <a:solidFill>
-            <a:srgbClr val="EAF1F8"/>
+            <a:srgbClr val="DDEEF2"/>
           </a:solidFill>
           <a:ln w="9525">
             <a:solidFill>
@@ -6572,7 +6887,7 @@
             <a:defPPr>
               <a:defRPr sz="1350" b="1">
                 <a:solidFill>
-                  <a:srgbClr val="385E7D"/>
+                  <a:srgbClr val="245487"/>
                 </a:solidFill>
                 <a:latin typeface="Hiragino Sans GB" panose="020B0300000000000000" charset="-122"/>
                 <a:ea typeface="Hiragino Sans GB" panose="020B0300000000000000" charset="-122"/>
@@ -6582,6 +6897,7 @@
           </a:lstStyle>
           <a:p>
             <a:pPr>
+              <a:buNone/>
               <a:defRPr sz="1350" b="1">
                 <a:solidFill>
                   <a:srgbClr val="385E7D"/>
@@ -6594,7 +6910,7 @@
             <a:r>
               <a:rPr sz="1350" b="1">
                 <a:solidFill>
-                  <a:srgbClr val="385E7D"/>
+                  <a:srgbClr val="245487"/>
                 </a:solidFill>
                 <a:latin typeface="Hiragino Sans GB" panose="020B0300000000000000" charset="-122"/>
                 <a:ea typeface="Hiragino Sans GB" panose="020B0300000000000000" charset="-122"/>
@@ -6630,7 +6946,7 @@
             <a:avLst/>
           </a:prstGeom>
           <a:solidFill>
-            <a:srgbClr val="EAF1F8"/>
+            <a:srgbClr val="DDEEF2"/>
           </a:solidFill>
           <a:ln w="9525">
             <a:solidFill>
@@ -6668,7 +6984,7 @@
             <a:defPPr>
               <a:defRPr sz="1350" b="1">
                 <a:solidFill>
-                  <a:srgbClr val="385E7D"/>
+                  <a:srgbClr val="245487"/>
                 </a:solidFill>
                 <a:latin typeface="Hiragino Sans GB" panose="020B0300000000000000" charset="-122"/>
                 <a:ea typeface="Hiragino Sans GB" panose="020B0300000000000000" charset="-122"/>
@@ -6678,6 +6994,7 @@
           </a:lstStyle>
           <a:p>
             <a:pPr>
+              <a:buNone/>
               <a:defRPr sz="1350" b="1">
                 <a:solidFill>
                   <a:srgbClr val="385E7D"/>
@@ -6690,7 +7007,7 @@
             <a:r>
               <a:rPr sz="1350" b="1">
                 <a:solidFill>
-                  <a:srgbClr val="385E7D"/>
+                  <a:srgbClr val="245487"/>
                 </a:solidFill>
                 <a:latin typeface="Hiragino Sans GB" panose="020B0300000000000000" charset="-122"/>
                 <a:ea typeface="Hiragino Sans GB" panose="020B0300000000000000" charset="-122"/>
@@ -6730,7 +7047,7 @@
           </a:solidFill>
           <a:ln w="9525">
             <a:solidFill>
-              <a:srgbClr val="C9D9E5"/>
+              <a:srgbClr val="BBD1DD"/>
             </a:solidFill>
             <a:prstDash val="solid"/>
           </a:ln>
@@ -6764,7 +7081,7 @@
             <a:defPPr>
               <a:defRPr sz="1425" b="1">
                 <a:solidFill>
-                  <a:srgbClr val="24364B"/>
+                  <a:srgbClr val="1F364D"/>
                 </a:solidFill>
                 <a:latin typeface="Hiragino Sans GB" panose="020B0300000000000000" charset="-122"/>
                 <a:ea typeface="Hiragino Sans GB" panose="020B0300000000000000" charset="-122"/>
@@ -6774,6 +7091,7 @@
           </a:lstStyle>
           <a:p>
             <a:pPr>
+              <a:buNone/>
               <a:defRPr sz="1425" b="1">
                 <a:solidFill>
                   <a:srgbClr val="24364B"/>
@@ -6786,7 +7104,7 @@
             <a:r>
               <a:rPr sz="1425" b="1">
                 <a:solidFill>
-                  <a:srgbClr val="24364B"/>
+                  <a:srgbClr val="1F364D"/>
                 </a:solidFill>
                 <a:latin typeface="Hiragino Sans GB" panose="020B0300000000000000" charset="-122"/>
                 <a:ea typeface="Hiragino Sans GB" panose="020B0300000000000000" charset="-122"/>
@@ -6826,7 +7144,7 @@
           </a:solidFill>
           <a:ln w="9525">
             <a:solidFill>
-              <a:srgbClr val="C9D9E5"/>
+              <a:srgbClr val="BBD1DD"/>
             </a:solidFill>
             <a:prstDash val="solid"/>
           </a:ln>
@@ -6860,7 +7178,7 @@
             <a:defPPr>
               <a:defRPr sz="1425" b="0">
                 <a:solidFill>
-                  <a:srgbClr val="24364B"/>
+                  <a:srgbClr val="1F364D"/>
                 </a:solidFill>
                 <a:latin typeface="Hiragino Sans GB" panose="020B0300000000000000" charset="-122"/>
                 <a:ea typeface="Hiragino Sans GB" panose="020B0300000000000000" charset="-122"/>
@@ -6870,6 +7188,7 @@
           </a:lstStyle>
           <a:p>
             <a:pPr>
+              <a:buNone/>
               <a:defRPr sz="1425" b="0">
                 <a:solidFill>
                   <a:srgbClr val="24364B"/>
@@ -6882,13 +7201,13 @@
             <a:r>
               <a:rPr sz="1425" b="0">
                 <a:solidFill>
-                  <a:srgbClr val="24364B"/>
+                  <a:srgbClr val="1F364D"/>
                 </a:solidFill>
                 <a:latin typeface="Hiragino Sans GB" panose="020B0300000000000000" charset="-122"/>
                 <a:ea typeface="Hiragino Sans GB" panose="020B0300000000000000" charset="-122"/>
                 <a:cs typeface="Hiragino Sans GB" panose="020B0300000000000000" charset="-122"/>
               </a:rPr>
-              <a:t>FR-25／26：合法采集、清洗入库与更新</a:t>
+              <a:t>FR-25/26：合法采集、清洗和更新</a:t>
             </a:r>
             <a:endParaRPr sz="1425" b="0">
               <a:solidFill>
@@ -6922,7 +7241,7 @@
           </a:solidFill>
           <a:ln w="9525">
             <a:solidFill>
-              <a:srgbClr val="C9D9E5"/>
+              <a:srgbClr val="BBD1DD"/>
             </a:solidFill>
             <a:prstDash val="solid"/>
           </a:ln>
@@ -6956,7 +7275,7 @@
             <a:defPPr>
               <a:defRPr sz="1425" b="0">
                 <a:solidFill>
-                  <a:srgbClr val="24364B"/>
+                  <a:srgbClr val="1F364D"/>
                 </a:solidFill>
                 <a:latin typeface="Hiragino Sans GB" panose="020B0300000000000000" charset="-122"/>
                 <a:ea typeface="Hiragino Sans GB" panose="020B0300000000000000" charset="-122"/>
@@ -6966,6 +7285,7 @@
           </a:lstStyle>
           <a:p>
             <a:pPr>
+              <a:buNone/>
               <a:defRPr sz="1425" b="0">
                 <a:solidFill>
                   <a:srgbClr val="24364B"/>
@@ -6978,7 +7298,7 @@
             <a:r>
               <a:rPr sz="1425" b="0">
                 <a:solidFill>
-                  <a:srgbClr val="24364B"/>
+                  <a:srgbClr val="1F364D"/>
                 </a:solidFill>
                 <a:latin typeface="Hiragino Sans GB" panose="020B0300000000000000" charset="-122"/>
                 <a:ea typeface="Hiragino Sans GB" panose="020B0300000000000000" charset="-122"/>
@@ -7018,7 +7338,7 @@
           </a:solidFill>
           <a:ln w="9525">
             <a:solidFill>
-              <a:srgbClr val="C9D9E5"/>
+              <a:srgbClr val="BBD1DD"/>
             </a:solidFill>
             <a:prstDash val="solid"/>
           </a:ln>
@@ -7052,7 +7372,7 @@
             <a:defPPr>
               <a:defRPr sz="1425" b="1">
                 <a:solidFill>
-                  <a:srgbClr val="24364B"/>
+                  <a:srgbClr val="1F364D"/>
                 </a:solidFill>
                 <a:latin typeface="Hiragino Sans GB" panose="020B0300000000000000" charset="-122"/>
                 <a:ea typeface="Hiragino Sans GB" panose="020B0300000000000000" charset="-122"/>
@@ -7062,6 +7382,7 @@
           </a:lstStyle>
           <a:p>
             <a:pPr>
+              <a:buNone/>
               <a:defRPr sz="1425" b="1">
                 <a:solidFill>
                   <a:srgbClr val="24364B"/>
@@ -7074,7 +7395,7 @@
             <a:r>
               <a:rPr sz="1425" b="1">
                 <a:solidFill>
-                  <a:srgbClr val="24364B"/>
+                  <a:srgbClr val="1F364D"/>
                 </a:solidFill>
                 <a:latin typeface="Hiragino Sans GB" panose="020B0300000000000000" charset="-122"/>
                 <a:ea typeface="Hiragino Sans GB" panose="020B0300000000000000" charset="-122"/>
@@ -7114,7 +7435,7 @@
           </a:solidFill>
           <a:ln w="9525">
             <a:solidFill>
-              <a:srgbClr val="C9D9E5"/>
+              <a:srgbClr val="BBD1DD"/>
             </a:solidFill>
             <a:prstDash val="solid"/>
           </a:ln>
@@ -7148,7 +7469,7 @@
             <a:defPPr>
               <a:defRPr sz="1425" b="0">
                 <a:solidFill>
-                  <a:srgbClr val="24364B"/>
+                  <a:srgbClr val="1F364D"/>
                 </a:solidFill>
                 <a:latin typeface="Hiragino Sans GB" panose="020B0300000000000000" charset="-122"/>
                 <a:ea typeface="Hiragino Sans GB" panose="020B0300000000000000" charset="-122"/>
@@ -7158,6 +7479,7 @@
           </a:lstStyle>
           <a:p>
             <a:pPr>
+              <a:buNone/>
               <a:defRPr sz="1425" b="0">
                 <a:solidFill>
                   <a:srgbClr val="24364B"/>
@@ -7170,13 +7492,13 @@
             <a:r>
               <a:rPr sz="1425" b="0">
                 <a:solidFill>
-                  <a:srgbClr val="24364B"/>
+                  <a:srgbClr val="1F364D"/>
                 </a:solidFill>
                 <a:latin typeface="Hiragino Sans GB" panose="020B0300000000000000" charset="-122"/>
                 <a:ea typeface="Hiragino Sans GB" panose="020B0300000000000000" charset="-122"/>
                 <a:cs typeface="Hiragino Sans GB" panose="020B0300000000000000" charset="-122"/>
               </a:rPr>
-              <a:t>FR-27：门户认领、核验与权限授予</a:t>
+              <a:t>FR-27：门户认领、核验和授权</a:t>
             </a:r>
             <a:endParaRPr sz="1425" b="0">
               <a:solidFill>
@@ -7210,7 +7532,7 @@
           </a:solidFill>
           <a:ln w="9525">
             <a:solidFill>
-              <a:srgbClr val="C9D9E5"/>
+              <a:srgbClr val="BBD1DD"/>
             </a:solidFill>
             <a:prstDash val="solid"/>
           </a:ln>
@@ -7244,7 +7566,7 @@
             <a:defPPr>
               <a:defRPr sz="1425" b="0">
                 <a:solidFill>
-                  <a:srgbClr val="24364B"/>
+                  <a:srgbClr val="1F364D"/>
                 </a:solidFill>
                 <a:latin typeface="Hiragino Sans GB" panose="020B0300000000000000" charset="-122"/>
                 <a:ea typeface="Hiragino Sans GB" panose="020B0300000000000000" charset="-122"/>
@@ -7254,6 +7576,7 @@
           </a:lstStyle>
           <a:p>
             <a:pPr>
+              <a:buNone/>
               <a:defRPr sz="1425" b="0">
                 <a:solidFill>
                   <a:srgbClr val="24364B"/>
@@ -7266,7 +7589,7 @@
             <a:r>
               <a:rPr sz="1425" b="0">
                 <a:solidFill>
-                  <a:srgbClr val="24364B"/>
+                  <a:srgbClr val="1F364D"/>
                 </a:solidFill>
                 <a:latin typeface="Hiragino Sans GB" panose="020B0300000000000000" charset="-122"/>
                 <a:ea typeface="Hiragino Sans GB" panose="020B0300000000000000" charset="-122"/>
@@ -7306,7 +7629,7 @@
           </a:solidFill>
           <a:ln w="9525">
             <a:solidFill>
-              <a:srgbClr val="C9D9E5"/>
+              <a:srgbClr val="BBD1DD"/>
             </a:solidFill>
             <a:prstDash val="solid"/>
           </a:ln>
@@ -7340,7 +7663,7 @@
             <a:defPPr>
               <a:defRPr sz="1425" b="1">
                 <a:solidFill>
-                  <a:srgbClr val="24364B"/>
+                  <a:srgbClr val="1F364D"/>
                 </a:solidFill>
                 <a:latin typeface="Hiragino Sans GB" panose="020B0300000000000000" charset="-122"/>
                 <a:ea typeface="Hiragino Sans GB" panose="020B0300000000000000" charset="-122"/>
@@ -7350,6 +7673,7 @@
           </a:lstStyle>
           <a:p>
             <a:pPr>
+              <a:buNone/>
               <a:defRPr sz="1425" b="1">
                 <a:solidFill>
                   <a:srgbClr val="24364B"/>
@@ -7362,7 +7686,7 @@
             <a:r>
               <a:rPr sz="1425" b="1">
                 <a:solidFill>
-                  <a:srgbClr val="24364B"/>
+                  <a:srgbClr val="1F364D"/>
                 </a:solidFill>
                 <a:latin typeface="Hiragino Sans GB" panose="020B0300000000000000" charset="-122"/>
                 <a:ea typeface="Hiragino Sans GB" panose="020B0300000000000000" charset="-122"/>
@@ -7402,7 +7726,7 @@
           </a:solidFill>
           <a:ln w="9525">
             <a:solidFill>
-              <a:srgbClr val="C9D9E5"/>
+              <a:srgbClr val="BBD1DD"/>
             </a:solidFill>
             <a:prstDash val="solid"/>
           </a:ln>
@@ -7436,7 +7760,7 @@
             <a:defPPr>
               <a:defRPr sz="1425" b="0">
                 <a:solidFill>
-                  <a:srgbClr val="24364B"/>
+                  <a:srgbClr val="1F364D"/>
                 </a:solidFill>
                 <a:latin typeface="Hiragino Sans GB" panose="020B0300000000000000" charset="-122"/>
                 <a:ea typeface="Hiragino Sans GB" panose="020B0300000000000000" charset="-122"/>
@@ -7446,6 +7770,7 @@
           </a:lstStyle>
           <a:p>
             <a:pPr>
+              <a:buNone/>
               <a:defRPr sz="1425" b="0">
                 <a:solidFill>
                   <a:srgbClr val="24364B"/>
@@ -7458,7 +7783,7 @@
             <a:r>
               <a:rPr sz="1425" b="0">
                 <a:solidFill>
-                  <a:srgbClr val="24364B"/>
+                  <a:srgbClr val="1F364D"/>
                 </a:solidFill>
                 <a:latin typeface="Hiragino Sans GB" panose="020B0300000000000000" charset="-122"/>
                 <a:ea typeface="Hiragino Sans GB" panose="020B0300000000000000" charset="-122"/>
@@ -7498,7 +7823,7 @@
           </a:solidFill>
           <a:ln w="9525">
             <a:solidFill>
-              <a:srgbClr val="C9D9E5"/>
+              <a:srgbClr val="BBD1DD"/>
             </a:solidFill>
             <a:prstDash val="solid"/>
           </a:ln>
@@ -7532,7 +7857,7 @@
             <a:defPPr>
               <a:defRPr sz="1425" b="0">
                 <a:solidFill>
-                  <a:srgbClr val="24364B"/>
+                  <a:srgbClr val="1F364D"/>
                 </a:solidFill>
                 <a:latin typeface="Hiragino Sans GB" panose="020B0300000000000000" charset="-122"/>
                 <a:ea typeface="Hiragino Sans GB" panose="020B0300000000000000" charset="-122"/>
@@ -7542,6 +7867,7 @@
           </a:lstStyle>
           <a:p>
             <a:pPr>
+              <a:buNone/>
               <a:defRPr sz="1425" b="0">
                 <a:solidFill>
                   <a:srgbClr val="24364B"/>
@@ -7554,7 +7880,7 @@
             <a:r>
               <a:rPr sz="1425" b="0">
                 <a:solidFill>
-                  <a:srgbClr val="24364B"/>
+                  <a:srgbClr val="1F364D"/>
                 </a:solidFill>
                 <a:latin typeface="Hiragino Sans GB" panose="020B0300000000000000" charset="-122"/>
                 <a:ea typeface="Hiragino Sans GB" panose="020B0300000000000000" charset="-122"/>
@@ -7594,7 +7920,7 @@
           </a:solidFill>
           <a:ln w="9525">
             <a:solidFill>
-              <a:srgbClr val="C9D9E5"/>
+              <a:srgbClr val="BBD1DD"/>
             </a:solidFill>
             <a:prstDash val="solid"/>
           </a:ln>
@@ -7628,7 +7954,7 @@
             <a:defPPr>
               <a:defRPr sz="1425" b="1">
                 <a:solidFill>
-                  <a:srgbClr val="24364B"/>
+                  <a:srgbClr val="1F364D"/>
                 </a:solidFill>
                 <a:latin typeface="Hiragino Sans GB" panose="020B0300000000000000" charset="-122"/>
                 <a:ea typeface="Hiragino Sans GB" panose="020B0300000000000000" charset="-122"/>
@@ -7638,6 +7964,7 @@
           </a:lstStyle>
           <a:p>
             <a:pPr>
+              <a:buNone/>
               <a:defRPr sz="1425" b="1">
                 <a:solidFill>
                   <a:srgbClr val="24364B"/>
@@ -7650,7 +7977,7 @@
             <a:r>
               <a:rPr sz="1425" b="1">
                 <a:solidFill>
-                  <a:srgbClr val="24364B"/>
+                  <a:srgbClr val="1F364D"/>
                 </a:solidFill>
                 <a:latin typeface="Hiragino Sans GB" panose="020B0300000000000000" charset="-122"/>
                 <a:ea typeface="Hiragino Sans GB" panose="020B0300000000000000" charset="-122"/>
@@ -7690,7 +8017,7 @@
           </a:solidFill>
           <a:ln w="9525">
             <a:solidFill>
-              <a:srgbClr val="C9D9E5"/>
+              <a:srgbClr val="BBD1DD"/>
             </a:solidFill>
             <a:prstDash val="solid"/>
           </a:ln>
@@ -7724,7 +8051,7 @@
             <a:defPPr>
               <a:defRPr sz="1425" b="0">
                 <a:solidFill>
-                  <a:srgbClr val="24364B"/>
+                  <a:srgbClr val="1F364D"/>
                 </a:solidFill>
                 <a:latin typeface="Hiragino Sans GB" panose="020B0300000000000000" charset="-122"/>
                 <a:ea typeface="Hiragino Sans GB" panose="020B0300000000000000" charset="-122"/>
@@ -7734,6 +8061,7 @@
           </a:lstStyle>
           <a:p>
             <a:pPr>
+              <a:buNone/>
               <a:defRPr sz="1425" b="0">
                 <a:solidFill>
                   <a:srgbClr val="24364B"/>
@@ -7746,13 +8074,13 @@
             <a:r>
               <a:rPr sz="1425" b="0">
                 <a:solidFill>
-                  <a:srgbClr val="24364B"/>
+                  <a:srgbClr val="1F364D"/>
                 </a:solidFill>
                 <a:latin typeface="Hiragino Sans GB" panose="020B0300000000000000" charset="-122"/>
                 <a:ea typeface="Hiragino Sans GB" panose="020B0300000000000000" charset="-122"/>
                 <a:cs typeface="Hiragino Sans GB" panose="020B0300000000000000" charset="-122"/>
               </a:rPr>
-              <a:t>FR-01—12：登记、版本、审核与权限</a:t>
+              <a:t>FR-01—12：登记、审核、版本和权限</a:t>
             </a:r>
             <a:endParaRPr sz="1425" b="0">
               <a:solidFill>
@@ -7786,7 +8114,7 @@
           </a:solidFill>
           <a:ln w="9525">
             <a:solidFill>
-              <a:srgbClr val="C9D9E5"/>
+              <a:srgbClr val="BBD1DD"/>
             </a:solidFill>
             <a:prstDash val="solid"/>
           </a:ln>
@@ -7820,7 +8148,7 @@
             <a:defPPr>
               <a:defRPr sz="1425" b="0">
                 <a:solidFill>
-                  <a:srgbClr val="24364B"/>
+                  <a:srgbClr val="1F364D"/>
                 </a:solidFill>
                 <a:latin typeface="Hiragino Sans GB" panose="020B0300000000000000" charset="-122"/>
                 <a:ea typeface="Hiragino Sans GB" panose="020B0300000000000000" charset="-122"/>
@@ -7830,6 +8158,7 @@
           </a:lstStyle>
           <a:p>
             <a:pPr>
+              <a:buNone/>
               <a:defRPr sz="1425" b="0">
                 <a:solidFill>
                   <a:srgbClr val="24364B"/>
@@ -7842,7 +8171,7 @@
             <a:r>
               <a:rPr sz="1425" b="0">
                 <a:solidFill>
-                  <a:srgbClr val="24364B"/>
+                  <a:srgbClr val="1F364D"/>
                 </a:solidFill>
                 <a:latin typeface="Hiragino Sans GB" panose="020B0300000000000000" charset="-122"/>
                 <a:ea typeface="Hiragino Sans GB" panose="020B0300000000000000" charset="-122"/>
@@ -7882,7 +8211,7 @@
           </a:solidFill>
           <a:ln w="9525">
             <a:solidFill>
-              <a:srgbClr val="C9D9E5"/>
+              <a:srgbClr val="BBD1DD"/>
             </a:solidFill>
             <a:prstDash val="solid"/>
           </a:ln>
@@ -7916,7 +8245,7 @@
             <a:defPPr>
               <a:defRPr sz="1425" b="1">
                 <a:solidFill>
-                  <a:srgbClr val="24364B"/>
+                  <a:srgbClr val="1F364D"/>
                 </a:solidFill>
                 <a:latin typeface="Hiragino Sans GB" panose="020B0300000000000000" charset="-122"/>
                 <a:ea typeface="Hiragino Sans GB" panose="020B0300000000000000" charset="-122"/>
@@ -7926,6 +8255,7 @@
           </a:lstStyle>
           <a:p>
             <a:pPr>
+              <a:buNone/>
               <a:defRPr sz="1425" b="1">
                 <a:solidFill>
                   <a:srgbClr val="24364B"/>
@@ -7938,7 +8268,7 @@
             <a:r>
               <a:rPr sz="1425" b="1">
                 <a:solidFill>
-                  <a:srgbClr val="24364B"/>
+                  <a:srgbClr val="1F364D"/>
                 </a:solidFill>
                 <a:latin typeface="Hiragino Sans GB" panose="020B0300000000000000" charset="-122"/>
                 <a:ea typeface="Hiragino Sans GB" panose="020B0300000000000000" charset="-122"/>
@@ -7978,7 +8308,7 @@
           </a:solidFill>
           <a:ln w="9525">
             <a:solidFill>
-              <a:srgbClr val="C9D9E5"/>
+              <a:srgbClr val="BBD1DD"/>
             </a:solidFill>
             <a:prstDash val="solid"/>
           </a:ln>
@@ -8012,7 +8342,7 @@
             <a:defPPr>
               <a:defRPr sz="1425" b="0">
                 <a:solidFill>
-                  <a:srgbClr val="24364B"/>
+                  <a:srgbClr val="1F364D"/>
                 </a:solidFill>
                 <a:latin typeface="Hiragino Sans GB" panose="020B0300000000000000" charset="-122"/>
                 <a:ea typeface="Hiragino Sans GB" panose="020B0300000000000000" charset="-122"/>
@@ -8022,6 +8352,7 @@
           </a:lstStyle>
           <a:p>
             <a:pPr>
+              <a:buNone/>
               <a:defRPr sz="1425" b="0">
                 <a:solidFill>
                   <a:srgbClr val="24364B"/>
@@ -8034,13 +8365,13 @@
             <a:r>
               <a:rPr sz="1425" b="0">
                 <a:solidFill>
-                  <a:srgbClr val="24364B"/>
+                  <a:srgbClr val="1F364D"/>
                 </a:solidFill>
                 <a:latin typeface="Hiragino Sans GB" panose="020B0300000000000000" charset="-122"/>
                 <a:ea typeface="Hiragino Sans GB" panose="020B0300000000000000" charset="-122"/>
                 <a:cs typeface="Hiragino Sans GB" panose="020B0300000000000000" charset="-122"/>
               </a:rPr>
-              <a:t>FR-28／29：分类统计、合作图与路径</a:t>
+              <a:t>FR-28/29：分类统计、合作图和路径</a:t>
             </a:r>
             <a:endParaRPr sz="1425" b="0">
               <a:solidFill>
@@ -8074,7 +8405,7 @@
           </a:solidFill>
           <a:ln w="9525">
             <a:solidFill>
-              <a:srgbClr val="C9D9E5"/>
+              <a:srgbClr val="BBD1DD"/>
             </a:solidFill>
             <a:prstDash val="solid"/>
           </a:ln>
@@ -8108,7 +8439,7 @@
             <a:defPPr>
               <a:defRPr sz="1425" b="0">
                 <a:solidFill>
-                  <a:srgbClr val="24364B"/>
+                  <a:srgbClr val="1F364D"/>
                 </a:solidFill>
                 <a:latin typeface="Hiragino Sans GB" panose="020B0300000000000000" charset="-122"/>
                 <a:ea typeface="Hiragino Sans GB" panose="020B0300000000000000" charset="-122"/>
@@ -8118,6 +8449,7 @@
           </a:lstStyle>
           <a:p>
             <a:pPr>
+              <a:buNone/>
               <a:defRPr sz="1425" b="0">
                 <a:solidFill>
                   <a:srgbClr val="24364B"/>
@@ -8130,7 +8462,7 @@
             <a:r>
               <a:rPr sz="1425" b="0">
                 <a:solidFill>
-                  <a:srgbClr val="24364B"/>
+                  <a:srgbClr val="1F364D"/>
                 </a:solidFill>
                 <a:latin typeface="Hiragino Sans GB" panose="020B0300000000000000" charset="-122"/>
                 <a:ea typeface="Hiragino Sans GB" panose="020B0300000000000000" charset="-122"/>
@@ -8166,7 +8498,7 @@
             <a:avLst/>
           </a:prstGeom>
           <a:solidFill>
-            <a:srgbClr val="EAF1F8"/>
+            <a:srgbClr val="DDEEF2"/>
           </a:solidFill>
           <a:ln w="0">
             <a:noFill/>
@@ -8202,7 +8534,7 @@
             <a:defPPr>
               <a:defRPr sz="1425" b="0">
                 <a:solidFill>
-                  <a:srgbClr val="24364B"/>
+                  <a:srgbClr val="1F364D"/>
                 </a:solidFill>
                 <a:latin typeface="Hiragino Sans GB" panose="020B0300000000000000" charset="-122"/>
                 <a:ea typeface="Hiragino Sans GB" panose="020B0300000000000000" charset="-122"/>
@@ -8212,6 +8544,7 @@
           </a:lstStyle>
           <a:p>
             <a:pPr>
+              <a:buNone/>
               <a:defRPr sz="1425" b="0">
                 <a:solidFill>
                   <a:srgbClr val="24364B"/>
@@ -8224,13 +8557,13 @@
             <a:r>
               <a:rPr sz="1425" b="0">
                 <a:solidFill>
-                  <a:srgbClr val="24364B"/>
+                  <a:srgbClr val="1F364D"/>
                 </a:solidFill>
                 <a:latin typeface="Hiragino Sans GB" panose="020B0300000000000000" charset="-122"/>
                 <a:ea typeface="Hiragino Sans GB" panose="020B0300000000000000" charset="-122"/>
                 <a:cs typeface="Hiragino Sans GB" panose="020B0300000000000000" charset="-122"/>
               </a:rPr>
-              <a:t>FR-01—24 来自 24 条用户故事；FR-25—29 补足任务书必做能力。可选故事不替代必验功能。</a:t>
+              <a:t>FR-01—24 来自 24 条故事；FR-25—29 补任务书必做。UC04 内的 Should/Could 功能仍按 SRS 分级。</a:t>
             </a:r>
             <a:endParaRPr sz="1425" b="0">
               <a:solidFill>
@@ -8295,9 +8628,9 @@
           <a:bodyPr anchor="ctr"/>
           <a:lstStyle>
             <a:defPPr>
-              <a:defRPr sz="2475" b="1">
-                <a:solidFill>
-                  <a:srgbClr val="24364B"/>
+              <a:defRPr sz="2700" b="1">
+                <a:solidFill>
+                  <a:srgbClr val="102A43"/>
                 </a:solidFill>
                 <a:latin typeface="Hiragino Sans GB" panose="020B0300000000000000" charset="-122"/>
                 <a:ea typeface="Hiragino Sans GB" panose="020B0300000000000000" charset="-122"/>
@@ -8307,6 +8640,7 @@
           </a:lstStyle>
           <a:p>
             <a:pPr>
+              <a:buNone/>
               <a:defRPr sz="2475" b="1">
                 <a:solidFill>
                   <a:srgbClr val="24364B"/>
@@ -8317,15 +8651,15 @@
               </a:defRPr>
             </a:pPr>
             <a:r>
-              <a:rPr sz="2475" b="1">
-                <a:solidFill>
-                  <a:srgbClr val="24364B"/>
+              <a:rPr sz="2700" b="1">
+                <a:solidFill>
+                  <a:srgbClr val="102A43"/>
                 </a:solidFill>
                 <a:latin typeface="Hiragino Sans GB" panose="020B0300000000000000" charset="-122"/>
                 <a:ea typeface="Hiragino Sans GB" panose="020B0300000000000000" charset="-122"/>
                 <a:cs typeface="Hiragino Sans GB" panose="020B0300000000000000" charset="-122"/>
               </a:rPr>
-              <a:t>数据、权限与结果状态采用同一口径</a:t>
+              <a:t>贯穿规则：来源、权限与结果状态</a:t>
             </a:r>
             <a:endParaRPr sz="2475" b="1">
               <a:solidFill>
@@ -8349,13 +8683,13 @@
         <p:spPr>
           <a:xfrm>
             <a:off x="590550" y="1057275"/>
-            <a:ext cx="11010900" cy="19050"/>
+            <a:ext cx="11010900" cy="38100"/>
           </a:xfrm>
           <a:prstGeom prst="rect">
             <a:avLst/>
           </a:prstGeom>
           <a:solidFill>
-            <a:srgbClr val="C9D9E5"/>
+            <a:srgbClr val="2E69B1"/>
           </a:solidFill>
           <a:ln w="0">
             <a:noFill/>
@@ -8391,7 +8725,7 @@
             <a:defPPr>
               <a:defRPr sz="1050" b="0">
                 <a:solidFill>
-                  <a:srgbClr val="5D7183"/>
+                  <a:srgbClr val="62788B"/>
                 </a:solidFill>
                 <a:latin typeface="Hiragino Sans GB" panose="020B0300000000000000" charset="-122"/>
                 <a:ea typeface="Hiragino Sans GB" panose="020B0300000000000000" charset="-122"/>
@@ -8401,6 +8735,7 @@
           </a:lstStyle>
           <a:p>
             <a:pPr>
+              <a:buNone/>
               <a:defRPr sz="1050" b="0">
                 <a:solidFill>
                   <a:srgbClr val="5D7183"/>
@@ -8413,7 +8748,7 @@
             <a:r>
               <a:rPr sz="1050" b="0">
                 <a:solidFill>
-                  <a:srgbClr val="5D7183"/>
+                  <a:srgbClr val="62788B"/>
                 </a:solidFill>
                 <a:latin typeface="Hiragino Sans GB" panose="020B0300000000000000" charset="-122"/>
                 <a:ea typeface="Hiragino Sans GB" panose="020B0300000000000000" charset="-122"/>
@@ -8453,7 +8788,7 @@
           </a:solidFill>
           <a:ln w="9525">
             <a:solidFill>
-              <a:srgbClr val="C9D9E5"/>
+              <a:srgbClr val="BBD1DD"/>
             </a:solidFill>
             <a:prstDash val="solid"/>
           </a:ln>
@@ -8476,7 +8811,7 @@
             <a:avLst/>
           </a:prstGeom>
           <a:solidFill>
-            <a:srgbClr val="385E7D"/>
+            <a:srgbClr val="2E69B1"/>
           </a:solidFill>
           <a:ln w="0">
             <a:noFill/>
@@ -8510,9 +8845,9 @@
           <a:bodyPr anchor="ctr"/>
           <a:lstStyle>
             <a:defPPr>
-              <a:defRPr sz="1725" b="1">
-                <a:solidFill>
-                  <a:srgbClr val="385E7D"/>
+              <a:defRPr sz="1800" b="1">
+                <a:solidFill>
+                  <a:srgbClr val="245487"/>
                 </a:solidFill>
                 <a:latin typeface="Hiragino Sans GB" panose="020B0300000000000000" charset="-122"/>
                 <a:ea typeface="Hiragino Sans GB" panose="020B0300000000000000" charset="-122"/>
@@ -8522,6 +8857,7 @@
           </a:lstStyle>
           <a:p>
             <a:pPr>
+              <a:buNone/>
               <a:defRPr sz="1725" b="1">
                 <a:solidFill>
                   <a:srgbClr val="385E7D"/>
@@ -8532,9 +8868,9 @@
               </a:defRPr>
             </a:pPr>
             <a:r>
-              <a:rPr sz="1725" b="1">
-                <a:solidFill>
-                  <a:srgbClr val="385E7D"/>
+              <a:rPr sz="1800" b="1">
+                <a:solidFill>
+                  <a:srgbClr val="245487"/>
                 </a:solidFill>
                 <a:latin typeface="Hiragino Sans GB" panose="020B0300000000000000" charset="-122"/>
                 <a:ea typeface="Hiragino Sans GB" panose="020B0300000000000000" charset="-122"/>
@@ -8581,7 +8917,7 @@
             <a:defPPr>
               <a:defRPr sz="1350" b="0">
                 <a:solidFill>
-                  <a:srgbClr val="24364B"/>
+                  <a:srgbClr val="1F364D"/>
                 </a:solidFill>
                 <a:latin typeface="Hiragino Sans GB" panose="020B0300000000000000" charset="-122"/>
                 <a:ea typeface="Hiragino Sans GB" panose="020B0300000000000000" charset="-122"/>
@@ -8591,6 +8927,7 @@
           </a:lstStyle>
           <a:p>
             <a:pPr>
+              <a:buNone/>
               <a:defRPr sz="1350" b="0">
                 <a:solidFill>
                   <a:srgbClr val="24364B"/>
@@ -8603,13 +8940,13 @@
             <a:r>
               <a:rPr sz="1350" b="0">
                 <a:solidFill>
-                  <a:srgbClr val="24364B"/>
+                  <a:srgbClr val="1F364D"/>
                 </a:solidFill>
                 <a:latin typeface="Hiragino Sans GB" panose="020B0300000000000000" charset="-122"/>
                 <a:ea typeface="Hiragino Sans GB" panose="020B0300000000000000" charset="-122"/>
                 <a:cs typeface="Hiragino Sans GB" panose="020B0300000000000000" charset="-122"/>
               </a:rPr>
-              <a:t>七类成果使用统一 ID 和类型字段；来源原值、规范值、获取时间、授权依据和核验状态分开保存。</a:t>
+              <a:t>七类成果使用稳定 ID；来源原值、规范值、获取时间、授权依据和核验状态分开保存。</a:t>
             </a:r>
             <a:endParaRPr sz="1350" b="0">
               <a:solidFill>
@@ -8625,6 +8962,7 @@
           </a:p>
           <a:p>
             <a:pPr>
+              <a:buNone/>
               <a:defRPr sz="1350" b="0">
                 <a:solidFill>
                   <a:srgbClr val="24364B"/>
@@ -8637,13 +8975,13 @@
             <a:r>
               <a:rPr sz="1350" b="0">
                 <a:solidFill>
-                  <a:srgbClr val="24364B"/>
+                  <a:srgbClr val="1F364D"/>
                 </a:solidFill>
                 <a:latin typeface="Hiragino Sans GB" panose="020B0300000000000000" charset="-122"/>
                 <a:ea typeface="Hiragino Sans GB" panose="020B0300000000000000" charset="-122"/>
                 <a:cs typeface="Hiragino Sans GB" panose="020B0300000000000000" charset="-122"/>
               </a:rPr>
-              <a:t>DOI、关键词可缺失，不能编造；同题不同版本需核对。</a:t>
+              <a:t>DOI、关键词可缺失；同题不同版本不能自动合并。</a:t>
             </a:r>
             <a:endParaRPr sz="1350" b="0">
               <a:solidFill>
@@ -8677,7 +9015,7 @@
           </a:solidFill>
           <a:ln w="9525">
             <a:solidFill>
-              <a:srgbClr val="C9D9E5"/>
+              <a:srgbClr val="BBD1DD"/>
             </a:solidFill>
             <a:prstDash val="solid"/>
           </a:ln>
@@ -8700,7 +9038,7 @@
             <a:avLst/>
           </a:prstGeom>
           <a:solidFill>
-            <a:srgbClr val="385E7D"/>
+            <a:srgbClr val="2E69B1"/>
           </a:solidFill>
           <a:ln w="0">
             <a:noFill/>
@@ -8734,9 +9072,9 @@
           <a:bodyPr anchor="ctr"/>
           <a:lstStyle>
             <a:defPPr>
-              <a:defRPr sz="1725" b="1">
-                <a:solidFill>
-                  <a:srgbClr val="385E7D"/>
+              <a:defRPr sz="1800" b="1">
+                <a:solidFill>
+                  <a:srgbClr val="245487"/>
                 </a:solidFill>
                 <a:latin typeface="Hiragino Sans GB" panose="020B0300000000000000" charset="-122"/>
                 <a:ea typeface="Hiragino Sans GB" panose="020B0300000000000000" charset="-122"/>
@@ -8746,6 +9084,7 @@
           </a:lstStyle>
           <a:p>
             <a:pPr>
+              <a:buNone/>
               <a:defRPr sz="1725" b="1">
                 <a:solidFill>
                   <a:srgbClr val="385E7D"/>
@@ -8756,9 +9095,9 @@
               </a:defRPr>
             </a:pPr>
             <a:r>
-              <a:rPr sz="1725" b="1">
-                <a:solidFill>
-                  <a:srgbClr val="385E7D"/>
+              <a:rPr sz="1800" b="1">
+                <a:solidFill>
+                  <a:srgbClr val="245487"/>
                 </a:solidFill>
                 <a:latin typeface="Hiragino Sans GB" panose="020B0300000000000000" charset="-122"/>
                 <a:ea typeface="Hiragino Sans GB" panose="020B0300000000000000" charset="-122"/>
@@ -8805,7 +9144,7 @@
             <a:defPPr>
               <a:defRPr sz="1350" b="0">
                 <a:solidFill>
-                  <a:srgbClr val="24364B"/>
+                  <a:srgbClr val="1F364D"/>
                 </a:solidFill>
                 <a:latin typeface="Hiragino Sans GB" panose="020B0300000000000000" charset="-122"/>
                 <a:ea typeface="Hiragino Sans GB" panose="020B0300000000000000" charset="-122"/>
@@ -8815,6 +9154,7 @@
           </a:lstStyle>
           <a:p>
             <a:pPr>
+              <a:buNone/>
               <a:defRPr sz="1350" b="0">
                 <a:solidFill>
                   <a:srgbClr val="24364B"/>
@@ -8827,13 +9167,13 @@
             <a:r>
               <a:rPr sz="1350" b="0">
                 <a:solidFill>
-                  <a:srgbClr val="24364B"/>
+                  <a:srgbClr val="1F364D"/>
                 </a:solidFill>
                 <a:latin typeface="Hiragino Sans GB" panose="020B0300000000000000" charset="-122"/>
                 <a:ea typeface="Hiragino Sans GB" panose="020B0300000000000000" charset="-122"/>
                 <a:cs typeface="Hiragino Sans GB" panose="020B0300000000000000" charset="-122"/>
               </a:rPr>
-              <a:t>未发布、撤回及私有记录不得进入访客检索。详情、附件、导出、统计与合作图使用同一可读集合。</a:t>
+              <a:t>先构造当前用户的可读集合，再用于检索、详情、附件、导出、统计和合作图。</a:t>
             </a:r>
             <a:endParaRPr sz="1350" b="0">
               <a:solidFill>
@@ -8849,6 +9189,7 @@
           </a:p>
           <a:p>
             <a:pPr>
+              <a:buNone/>
               <a:defRPr sz="1350" b="0">
                 <a:solidFill>
                   <a:srgbClr val="24364B"/>
@@ -8861,13 +9202,13 @@
             <a:r>
               <a:rPr sz="1350" b="0">
                 <a:solidFill>
-                  <a:srgbClr val="24364B"/>
+                  <a:srgbClr val="1F364D"/>
                 </a:solidFill>
                 <a:latin typeface="Hiragino Sans GB" panose="020B0300000000000000" charset="-122"/>
                 <a:ea typeface="Hiragino Sans GB" panose="020B0300000000000000" charset="-122"/>
                 <a:cs typeface="Hiragino Sans GB" panose="020B0300000000000000" charset="-122"/>
               </a:rPr>
-              <a:t>公开范围收窄时，立即失效旧缓存和索引。</a:t>
+              <a:t>公开范围收窄时，旧缓存和索引必须立即失效。</a:t>
             </a:r>
             <a:endParaRPr sz="1350" b="0">
               <a:solidFill>
@@ -8901,7 +9242,7 @@
           </a:solidFill>
           <a:ln w="9525">
             <a:solidFill>
-              <a:srgbClr val="C9D9E5"/>
+              <a:srgbClr val="BBD1DD"/>
             </a:solidFill>
             <a:prstDash val="solid"/>
           </a:ln>
@@ -8924,7 +9265,7 @@
             <a:avLst/>
           </a:prstGeom>
           <a:solidFill>
-            <a:srgbClr val="385E7D"/>
+            <a:srgbClr val="2E69B1"/>
           </a:solidFill>
           <a:ln w="0">
             <a:noFill/>
@@ -8958,9 +9299,9 @@
           <a:bodyPr anchor="ctr"/>
           <a:lstStyle>
             <a:defPPr>
-              <a:defRPr sz="1725" b="1">
-                <a:solidFill>
-                  <a:srgbClr val="385E7D"/>
+              <a:defRPr sz="1800" b="1">
+                <a:solidFill>
+                  <a:srgbClr val="245487"/>
                 </a:solidFill>
                 <a:latin typeface="Hiragino Sans GB" panose="020B0300000000000000" charset="-122"/>
                 <a:ea typeface="Hiragino Sans GB" panose="020B0300000000000000" charset="-122"/>
@@ -8970,6 +9311,7 @@
           </a:lstStyle>
           <a:p>
             <a:pPr>
+              <a:buNone/>
               <a:defRPr sz="1725" b="1">
                 <a:solidFill>
                   <a:srgbClr val="385E7D"/>
@@ -8980,9 +9322,9 @@
               </a:defRPr>
             </a:pPr>
             <a:r>
-              <a:rPr sz="1725" b="1">
-                <a:solidFill>
-                  <a:srgbClr val="385E7D"/>
+              <a:rPr sz="1800" b="1">
+                <a:solidFill>
+                  <a:srgbClr val="245487"/>
                 </a:solidFill>
                 <a:latin typeface="Hiragino Sans GB" panose="020B0300000000000000" charset="-122"/>
                 <a:ea typeface="Hiragino Sans GB" panose="020B0300000000000000" charset="-122"/>
@@ -9029,7 +9371,7 @@
             <a:defPPr>
               <a:defRPr sz="1350" b="0">
                 <a:solidFill>
-                  <a:srgbClr val="24364B"/>
+                  <a:srgbClr val="1F364D"/>
                 </a:solidFill>
                 <a:latin typeface="Hiragino Sans GB" panose="020B0300000000000000" charset="-122"/>
                 <a:ea typeface="Hiragino Sans GB" panose="020B0300000000000000" charset="-122"/>
@@ -9039,6 +9381,7 @@
           </a:lstStyle>
           <a:p>
             <a:pPr>
+              <a:buNone/>
               <a:defRPr sz="1350" b="0">
                 <a:solidFill>
                   <a:srgbClr val="24364B"/>
@@ -9051,7 +9394,7 @@
             <a:r>
               <a:rPr sz="1350" b="0">
                 <a:solidFill>
-                  <a:srgbClr val="24364B"/>
+                  <a:srgbClr val="1F364D"/>
                 </a:solidFill>
                 <a:latin typeface="Hiragino Sans GB" panose="020B0300000000000000" charset="-122"/>
                 <a:ea typeface="Hiragino Sans GB" panose="020B0300000000000000" charset="-122"/>
@@ -9073,6 +9416,7 @@
           </a:p>
           <a:p>
             <a:pPr>
+              <a:buNone/>
               <a:defRPr sz="1350" b="0">
                 <a:solidFill>
                   <a:srgbClr val="24364B"/>
@@ -9085,13 +9429,13 @@
             <a:r>
               <a:rPr sz="1350" b="0">
                 <a:solidFill>
-                  <a:srgbClr val="24364B"/>
+                  <a:srgbClr val="1F364D"/>
                 </a:solidFill>
                 <a:latin typeface="Hiragino Sans GB" panose="020B0300000000000000" charset="-122"/>
                 <a:ea typeface="Hiragino Sans GB" panose="020B0300000000000000" charset="-122"/>
                 <a:cs typeface="Hiragino Sans GB" panose="020B0300000000000000" charset="-122"/>
               </a:rPr>
-              <a:t>合作网络边只来自可读已发布成果的共同署名；无路径不能解释为现实中从未合作。</a:t>
+              <a:t>合作图的“当前条件下无路径”不能解释为现实中从未合作。</a:t>
             </a:r>
             <a:endParaRPr sz="1350" b="0">
               <a:solidFill>
@@ -9121,7 +9465,7 @@
             <a:avLst/>
           </a:prstGeom>
           <a:solidFill>
-            <a:srgbClr val="EAF1F8"/>
+            <a:srgbClr val="DDEEF2"/>
           </a:solidFill>
           <a:ln w="0">
             <a:noFill/>
@@ -9157,7 +9501,7 @@
             <a:defPPr>
               <a:defRPr sz="1425" b="0">
                 <a:solidFill>
-                  <a:srgbClr val="24364B"/>
+                  <a:srgbClr val="1F364D"/>
                 </a:solidFill>
                 <a:latin typeface="Hiragino Sans GB" panose="020B0300000000000000" charset="-122"/>
                 <a:ea typeface="Hiragino Sans GB" panose="020B0300000000000000" charset="-122"/>
@@ -9167,6 +9511,7 @@
           </a:lstStyle>
           <a:p>
             <a:pPr>
+              <a:buNone/>
               <a:defRPr sz="1425" b="0">
                 <a:solidFill>
                   <a:srgbClr val="24364B"/>
@@ -9179,13 +9524,13 @@
             <a:r>
               <a:rPr sz="1425" b="0">
                 <a:solidFill>
-                  <a:srgbClr val="24364B"/>
+                  <a:srgbClr val="1F364D"/>
                 </a:solidFill>
                 <a:latin typeface="Hiragino Sans GB" panose="020B0300000000000000" charset="-122"/>
                 <a:ea typeface="Hiragino Sans GB" panose="020B0300000000000000" charset="-122"/>
                 <a:cs typeface="Hiragino Sans GB" panose="020B0300000000000000" charset="-122"/>
               </a:rPr>
-              <a:t>追溯：DR-01—09 定义数据与关系，NFR-03／11／12 约束权限、许可和质量；UC04／06 共用过滤规则。</a:t>
+              <a:t>DR-01—09 约束数据关系；NFR-03/11/12 约束权限、许可和质量。UC04/06 共用过滤规则。</a:t>
             </a:r>
             <a:endParaRPr sz="1425" b="0">
               <a:solidFill>
@@ -9250,9 +9595,9 @@
           <a:bodyPr anchor="ctr"/>
           <a:lstStyle>
             <a:defPPr>
-              <a:defRPr sz="2475" b="1">
-                <a:solidFill>
-                  <a:srgbClr val="24364B"/>
+              <a:defRPr sz="2700" b="1">
+                <a:solidFill>
+                  <a:srgbClr val="102A43"/>
                 </a:solidFill>
                 <a:latin typeface="Hiragino Sans GB" panose="020B0300000000000000" charset="-122"/>
                 <a:ea typeface="Hiragino Sans GB" panose="020B0300000000000000" charset="-122"/>
@@ -9262,6 +9607,7 @@
           </a:lstStyle>
           <a:p>
             <a:pPr>
+              <a:buNone/>
               <a:defRPr sz="2475" b="1">
                 <a:solidFill>
                   <a:srgbClr val="24364B"/>
@@ -9272,15 +9618,15 @@
               </a:defRPr>
             </a:pPr>
             <a:r>
-              <a:rPr sz="2475" b="1">
-                <a:solidFill>
-                  <a:srgbClr val="24364B"/>
+              <a:rPr sz="2700" b="1">
+                <a:solidFill>
+                  <a:srgbClr val="102A43"/>
                 </a:solidFill>
                 <a:latin typeface="Hiragino Sans GB" panose="020B0300000000000000" charset="-122"/>
                 <a:ea typeface="Hiragino Sans GB" panose="020B0300000000000000" charset="-122"/>
                 <a:cs typeface="Hiragino Sans GB" panose="020B0300000000000000" charset="-122"/>
               </a:rPr>
-              <a:t>SPEC 把核心处理写成可检查的规则</a:t>
+              <a:t>SPEC：五个模块的可验证规则</a:t>
             </a:r>
             <a:endParaRPr sz="2475" b="1">
               <a:solidFill>
@@ -9304,13 +9650,13 @@
         <p:spPr>
           <a:xfrm>
             <a:off x="590550" y="1057275"/>
-            <a:ext cx="11010900" cy="19050"/>
+            <a:ext cx="11010900" cy="38100"/>
           </a:xfrm>
           <a:prstGeom prst="rect">
             <a:avLst/>
           </a:prstGeom>
           <a:solidFill>
-            <a:srgbClr val="C9D9E5"/>
+            <a:srgbClr val="2E69B1"/>
           </a:solidFill>
           <a:ln w="0">
             <a:noFill/>
@@ -9346,7 +9692,7 @@
             <a:defPPr>
               <a:defRPr sz="1050" b="0">
                 <a:solidFill>
-                  <a:srgbClr val="5D7183"/>
+                  <a:srgbClr val="62788B"/>
                 </a:solidFill>
                 <a:latin typeface="Hiragino Sans GB" panose="020B0300000000000000" charset="-122"/>
                 <a:ea typeface="Hiragino Sans GB" panose="020B0300000000000000" charset="-122"/>
@@ -9356,6 +9702,7 @@
           </a:lstStyle>
           <a:p>
             <a:pPr>
+              <a:buNone/>
               <a:defRPr sz="1050" b="0">
                 <a:solidFill>
                   <a:srgbClr val="5D7183"/>
@@ -9368,7 +9715,7 @@
             <a:r>
               <a:rPr sz="1050" b="0">
                 <a:solidFill>
-                  <a:srgbClr val="5D7183"/>
+                  <a:srgbClr val="62788B"/>
                 </a:solidFill>
                 <a:latin typeface="Hiragino Sans GB" panose="020B0300000000000000" charset="-122"/>
                 <a:ea typeface="Hiragino Sans GB" panose="020B0300000000000000" charset="-122"/>
@@ -9404,7 +9751,7 @@
             <a:avLst/>
           </a:prstGeom>
           <a:solidFill>
-            <a:srgbClr val="EAF1F8"/>
+            <a:srgbClr val="DDEEF2"/>
           </a:solidFill>
           <a:ln w="9525">
             <a:solidFill>
@@ -9442,7 +9789,7 @@
             <a:defPPr>
               <a:defRPr sz="1350" b="1">
                 <a:solidFill>
-                  <a:srgbClr val="385E7D"/>
+                  <a:srgbClr val="245487"/>
                 </a:solidFill>
                 <a:latin typeface="Hiragino Sans GB" panose="020B0300000000000000" charset="-122"/>
                 <a:ea typeface="Hiragino Sans GB" panose="020B0300000000000000" charset="-122"/>
@@ -9452,6 +9799,7 @@
           </a:lstStyle>
           <a:p>
             <a:pPr>
+              <a:buNone/>
               <a:defRPr sz="1350" b="1">
                 <a:solidFill>
                   <a:srgbClr val="385E7D"/>
@@ -9464,7 +9812,7 @@
             <a:r>
               <a:rPr sz="1350" b="1">
                 <a:solidFill>
-                  <a:srgbClr val="385E7D"/>
+                  <a:srgbClr val="245487"/>
                 </a:solidFill>
                 <a:latin typeface="Hiragino Sans GB" panose="020B0300000000000000" charset="-122"/>
                 <a:ea typeface="Hiragino Sans GB" panose="020B0300000000000000" charset="-122"/>
@@ -9500,7 +9848,7 @@
             <a:avLst/>
           </a:prstGeom>
           <a:solidFill>
-            <a:srgbClr val="EAF1F8"/>
+            <a:srgbClr val="DDEEF2"/>
           </a:solidFill>
           <a:ln w="9525">
             <a:solidFill>
@@ -9538,7 +9886,7 @@
             <a:defPPr>
               <a:defRPr sz="1350" b="1">
                 <a:solidFill>
-                  <a:srgbClr val="385E7D"/>
+                  <a:srgbClr val="245487"/>
                 </a:solidFill>
                 <a:latin typeface="Hiragino Sans GB" panose="020B0300000000000000" charset="-122"/>
                 <a:ea typeface="Hiragino Sans GB" panose="020B0300000000000000" charset="-122"/>
@@ -9548,6 +9896,7 @@
           </a:lstStyle>
           <a:p>
             <a:pPr>
+              <a:buNone/>
               <a:defRPr sz="1350" b="1">
                 <a:solidFill>
                   <a:srgbClr val="385E7D"/>
@@ -9560,7 +9909,7 @@
             <a:r>
               <a:rPr sz="1350" b="1">
                 <a:solidFill>
-                  <a:srgbClr val="385E7D"/>
+                  <a:srgbClr val="245487"/>
                 </a:solidFill>
                 <a:latin typeface="Hiragino Sans GB" panose="020B0300000000000000" charset="-122"/>
                 <a:ea typeface="Hiragino Sans GB" panose="020B0300000000000000" charset="-122"/>
@@ -9596,7 +9945,7 @@
             <a:avLst/>
           </a:prstGeom>
           <a:solidFill>
-            <a:srgbClr val="EAF1F8"/>
+            <a:srgbClr val="DDEEF2"/>
           </a:solidFill>
           <a:ln w="9525">
             <a:solidFill>
@@ -9634,7 +9983,7 @@
             <a:defPPr>
               <a:defRPr sz="1350" b="1">
                 <a:solidFill>
-                  <a:srgbClr val="385E7D"/>
+                  <a:srgbClr val="245487"/>
                 </a:solidFill>
                 <a:latin typeface="Hiragino Sans GB" panose="020B0300000000000000" charset="-122"/>
                 <a:ea typeface="Hiragino Sans GB" panose="020B0300000000000000" charset="-122"/>
@@ -9644,6 +9993,7 @@
           </a:lstStyle>
           <a:p>
             <a:pPr>
+              <a:buNone/>
               <a:defRPr sz="1350" b="1">
                 <a:solidFill>
                   <a:srgbClr val="385E7D"/>
@@ -9656,7 +10006,7 @@
             <a:r>
               <a:rPr sz="1350" b="1">
                 <a:solidFill>
-                  <a:srgbClr val="385E7D"/>
+                  <a:srgbClr val="245487"/>
                 </a:solidFill>
                 <a:latin typeface="Hiragino Sans GB" panose="020B0300000000000000" charset="-122"/>
                 <a:ea typeface="Hiragino Sans GB" panose="020B0300000000000000" charset="-122"/>
@@ -9696,7 +10046,7 @@
           </a:solidFill>
           <a:ln w="9525">
             <a:solidFill>
-              <a:srgbClr val="C9D9E5"/>
+              <a:srgbClr val="BBD1DD"/>
             </a:solidFill>
             <a:prstDash val="solid"/>
           </a:ln>
@@ -9730,7 +10080,7 @@
             <a:defPPr>
               <a:defRPr sz="1350" b="1">
                 <a:solidFill>
-                  <a:srgbClr val="24364B"/>
+                  <a:srgbClr val="1F364D"/>
                 </a:solidFill>
                 <a:latin typeface="Hiragino Sans GB" panose="020B0300000000000000" charset="-122"/>
                 <a:ea typeface="Hiragino Sans GB" panose="020B0300000000000000" charset="-122"/>
@@ -9740,6 +10090,7 @@
           </a:lstStyle>
           <a:p>
             <a:pPr>
+              <a:buNone/>
               <a:defRPr sz="1350" b="1">
                 <a:solidFill>
                   <a:srgbClr val="24364B"/>
@@ -9752,7 +10103,7 @@
             <a:r>
               <a:rPr sz="1350" b="1">
                 <a:solidFill>
-                  <a:srgbClr val="24364B"/>
+                  <a:srgbClr val="1F364D"/>
                 </a:solidFill>
                 <a:latin typeface="Hiragino Sans GB" panose="020B0300000000000000" charset="-122"/>
                 <a:ea typeface="Hiragino Sans GB" panose="020B0300000000000000" charset="-122"/>
@@ -9792,7 +10143,7 @@
           </a:solidFill>
           <a:ln w="9525">
             <a:solidFill>
-              <a:srgbClr val="C9D9E5"/>
+              <a:srgbClr val="BBD1DD"/>
             </a:solidFill>
             <a:prstDash val="solid"/>
           </a:ln>
@@ -9826,7 +10177,7 @@
             <a:defPPr>
               <a:defRPr sz="1350" b="0">
                 <a:solidFill>
-                  <a:srgbClr val="24364B"/>
+                  <a:srgbClr val="1F364D"/>
                 </a:solidFill>
                 <a:latin typeface="Hiragino Sans GB" panose="020B0300000000000000" charset="-122"/>
                 <a:ea typeface="Hiragino Sans GB" panose="020B0300000000000000" charset="-122"/>
@@ -9836,6 +10187,7 @@
           </a:lstStyle>
           <a:p>
             <a:pPr>
+              <a:buNone/>
               <a:defRPr sz="1350" b="0">
                 <a:solidFill>
                   <a:srgbClr val="24364B"/>
@@ -9848,13 +10200,13 @@
             <a:r>
               <a:rPr sz="1350" b="0">
                 <a:solidFill>
-                  <a:srgbClr val="24364B"/>
+                  <a:srgbClr val="1F364D"/>
                 </a:solidFill>
                 <a:latin typeface="Hiragino Sans GB" panose="020B0300000000000000" charset="-122"/>
                 <a:ea typeface="Hiragino Sans GB" panose="020B0300000000000000" charset="-122"/>
                 <a:cs typeface="Hiragino Sans GB" panose="020B0300000000000000" charset="-122"/>
               </a:rPr>
-              <a:t>逐行校验类型、日期与标识；保留原始值</a:t>
+              <a:t>逐行校验类型、日期与标识，保留原值</a:t>
             </a:r>
             <a:endParaRPr sz="1350" b="0">
               <a:solidFill>
@@ -9888,7 +10240,7 @@
           </a:solidFill>
           <a:ln w="9525">
             <a:solidFill>
-              <a:srgbClr val="C9D9E5"/>
+              <a:srgbClr val="BBD1DD"/>
             </a:solidFill>
             <a:prstDash val="solid"/>
           </a:ln>
@@ -9922,7 +10274,7 @@
             <a:defPPr>
               <a:defRPr sz="1350" b="0">
                 <a:solidFill>
-                  <a:srgbClr val="24364B"/>
+                  <a:srgbClr val="1F364D"/>
                 </a:solidFill>
                 <a:latin typeface="Hiragino Sans GB" panose="020B0300000000000000" charset="-122"/>
                 <a:ea typeface="Hiragino Sans GB" panose="020B0300000000000000" charset="-122"/>
@@ -9932,6 +10284,7 @@
           </a:lstStyle>
           <a:p>
             <a:pPr>
+              <a:buNone/>
               <a:defRPr sz="1350" b="0">
                 <a:solidFill>
                   <a:srgbClr val="24364B"/>
@@ -9944,13 +10297,13 @@
             <a:r>
               <a:rPr sz="1350" b="0">
                 <a:solidFill>
-                  <a:srgbClr val="24364B"/>
+                  <a:srgbClr val="1F364D"/>
                 </a:solidFill>
                 <a:latin typeface="Hiragino Sans GB" panose="020B0300000000000000" charset="-122"/>
                 <a:ea typeface="Hiragino Sans GB" panose="020B0300000000000000" charset="-122"/>
                 <a:cs typeface="Hiragino Sans GB" panose="020B0300000000000000" charset="-122"/>
               </a:rPr>
-              <a:t>坏行隔离，不拖垮整批</a:t>
+              <a:t>坏行隔离，批次分别计成功与失败</a:t>
             </a:r>
             <a:endParaRPr sz="1350" b="0">
               <a:solidFill>
@@ -9984,7 +10337,7 @@
           </a:solidFill>
           <a:ln w="9525">
             <a:solidFill>
-              <a:srgbClr val="C9D9E5"/>
+              <a:srgbClr val="BBD1DD"/>
             </a:solidFill>
             <a:prstDash val="solid"/>
           </a:ln>
@@ -10018,7 +10371,7 @@
             <a:defPPr>
               <a:defRPr sz="1350" b="1">
                 <a:solidFill>
-                  <a:srgbClr val="24364B"/>
+                  <a:srgbClr val="1F364D"/>
                 </a:solidFill>
                 <a:latin typeface="Hiragino Sans GB" panose="020B0300000000000000" charset="-122"/>
                 <a:ea typeface="Hiragino Sans GB" panose="020B0300000000000000" charset="-122"/>
@@ -10028,6 +10381,7 @@
           </a:lstStyle>
           <a:p>
             <a:pPr>
+              <a:buNone/>
               <a:defRPr sz="1350" b="1">
                 <a:solidFill>
                   <a:srgbClr val="24364B"/>
@@ -10040,7 +10394,7 @@
             <a:r>
               <a:rPr sz="1350" b="1">
                 <a:solidFill>
-                  <a:srgbClr val="24364B"/>
+                  <a:srgbClr val="1F364D"/>
                 </a:solidFill>
                 <a:latin typeface="Hiragino Sans GB" panose="020B0300000000000000" charset="-122"/>
                 <a:ea typeface="Hiragino Sans GB" panose="020B0300000000000000" charset="-122"/>
@@ -10080,7 +10434,7 @@
           </a:solidFill>
           <a:ln w="9525">
             <a:solidFill>
-              <a:srgbClr val="C9D9E5"/>
+              <a:srgbClr val="BBD1DD"/>
             </a:solidFill>
             <a:prstDash val="solid"/>
           </a:ln>
@@ -10114,7 +10468,7 @@
             <a:defPPr>
               <a:defRPr sz="1350" b="0">
                 <a:solidFill>
-                  <a:srgbClr val="24364B"/>
+                  <a:srgbClr val="1F364D"/>
                 </a:solidFill>
                 <a:latin typeface="Hiragino Sans GB" panose="020B0300000000000000" charset="-122"/>
                 <a:ea typeface="Hiragino Sans GB" panose="020B0300000000000000" charset="-122"/>
@@ -10124,6 +10478,7 @@
           </a:lstStyle>
           <a:p>
             <a:pPr>
+              <a:buNone/>
               <a:defRPr sz="1350" b="0">
                 <a:solidFill>
                   <a:srgbClr val="24364B"/>
@@ -10136,13 +10491,13 @@
             <a:r>
               <a:rPr sz="1350" b="0">
                 <a:solidFill>
-                  <a:srgbClr val="24364B"/>
+                  <a:srgbClr val="1F364D"/>
                 </a:solidFill>
                 <a:latin typeface="Hiragino Sans GB" panose="020B0300000000000000" charset="-122"/>
                 <a:ea typeface="Hiragino Sans GB" panose="020B0300000000000000" charset="-122"/>
                 <a:cs typeface="Hiragino Sans GB" panose="020B0300000000000000" charset="-122"/>
               </a:rPr>
-              <a:t>有效 DOI 优先；近似题名仅产候选</a:t>
+              <a:t>有效 DOI 是强候选；近似题名只提示</a:t>
             </a:r>
             <a:endParaRPr sz="1350" b="0">
               <a:solidFill>
@@ -10176,7 +10531,7 @@
           </a:solidFill>
           <a:ln w="9525">
             <a:solidFill>
-              <a:srgbClr val="C9D9E5"/>
+              <a:srgbClr val="BBD1DD"/>
             </a:solidFill>
             <a:prstDash val="solid"/>
           </a:ln>
@@ -10210,7 +10565,7 @@
             <a:defPPr>
               <a:defRPr sz="1350" b="0">
                 <a:solidFill>
-                  <a:srgbClr val="24364B"/>
+                  <a:srgbClr val="1F364D"/>
                 </a:solidFill>
                 <a:latin typeface="Hiragino Sans GB" panose="020B0300000000000000" charset="-122"/>
                 <a:ea typeface="Hiragino Sans GB" panose="020B0300000000000000" charset="-122"/>
@@ -10220,6 +10575,7 @@
           </a:lstStyle>
           <a:p>
             <a:pPr>
+              <a:buNone/>
               <a:defRPr sz="1350" b="0">
                 <a:solidFill>
                   <a:srgbClr val="24364B"/>
@@ -10232,13 +10588,13 @@
             <a:r>
               <a:rPr sz="1350" b="0">
                 <a:solidFill>
-                  <a:srgbClr val="24364B"/>
+                  <a:srgbClr val="1F364D"/>
                 </a:solidFill>
                 <a:latin typeface="Hiragino Sans GB" panose="020B0300000000000000" charset="-122"/>
                 <a:ea typeface="Hiragino Sans GB" panose="020B0300000000000000" charset="-122"/>
                 <a:cs typeface="Hiragino Sans GB" panose="020B0300000000000000" charset="-122"/>
               </a:rPr>
-              <a:t>同题不同版本不误合并</a:t>
+              <a:t>同题不同版本不自动合并</a:t>
             </a:r>
             <a:endParaRPr sz="1350" b="0">
               <a:solidFill>
@@ -10272,7 +10628,7 @@
           </a:solidFill>
           <a:ln w="9525">
             <a:solidFill>
-              <a:srgbClr val="C9D9E5"/>
+              <a:srgbClr val="BBD1DD"/>
             </a:solidFill>
             <a:prstDash val="solid"/>
           </a:ln>
@@ -10306,7 +10662,7 @@
             <a:defPPr>
               <a:defRPr sz="1350" b="1">
                 <a:solidFill>
-                  <a:srgbClr val="24364B"/>
+                  <a:srgbClr val="1F364D"/>
                 </a:solidFill>
                 <a:latin typeface="Hiragino Sans GB" panose="020B0300000000000000" charset="-122"/>
                 <a:ea typeface="Hiragino Sans GB" panose="020B0300000000000000" charset="-122"/>
@@ -10316,6 +10672,7 @@
           </a:lstStyle>
           <a:p>
             <a:pPr>
+              <a:buNone/>
               <a:defRPr sz="1350" b="1">
                 <a:solidFill>
                   <a:srgbClr val="24364B"/>
@@ -10328,7 +10685,7 @@
             <a:r>
               <a:rPr sz="1350" b="1">
                 <a:solidFill>
-                  <a:srgbClr val="24364B"/>
+                  <a:srgbClr val="1F364D"/>
                 </a:solidFill>
                 <a:latin typeface="Hiragino Sans GB" panose="020B0300000000000000" charset="-122"/>
                 <a:ea typeface="Hiragino Sans GB" panose="020B0300000000000000" charset="-122"/>
@@ -10368,7 +10725,7 @@
           </a:solidFill>
           <a:ln w="9525">
             <a:solidFill>
-              <a:srgbClr val="C9D9E5"/>
+              <a:srgbClr val="BBD1DD"/>
             </a:solidFill>
             <a:prstDash val="solid"/>
           </a:ln>
@@ -10402,7 +10759,7 @@
             <a:defPPr>
               <a:defRPr sz="1350" b="0">
                 <a:solidFill>
-                  <a:srgbClr val="24364B"/>
+                  <a:srgbClr val="1F364D"/>
                 </a:solidFill>
                 <a:latin typeface="Hiragino Sans GB" panose="020B0300000000000000" charset="-122"/>
                 <a:ea typeface="Hiragino Sans GB" panose="020B0300000000000000" charset="-122"/>
@@ -10412,6 +10769,7 @@
           </a:lstStyle>
           <a:p>
             <a:pPr>
+              <a:buNone/>
               <a:defRPr sz="1350" b="0">
                 <a:solidFill>
                   <a:srgbClr val="24364B"/>
@@ -10424,7 +10782,7 @@
             <a:r>
               <a:rPr sz="1350" b="0">
                 <a:solidFill>
-                  <a:srgbClr val="24364B"/>
+                  <a:srgbClr val="1F364D"/>
                 </a:solidFill>
                 <a:latin typeface="Hiragino Sans GB" panose="020B0300000000000000" charset="-122"/>
                 <a:ea typeface="Hiragino Sans GB" panose="020B0300000000000000" charset="-122"/>
@@ -10464,7 +10822,7 @@
           </a:solidFill>
           <a:ln w="9525">
             <a:solidFill>
-              <a:srgbClr val="C9D9E5"/>
+              <a:srgbClr val="BBD1DD"/>
             </a:solidFill>
             <a:prstDash val="solid"/>
           </a:ln>
@@ -10498,7 +10856,7 @@
             <a:defPPr>
               <a:defRPr sz="1350" b="0">
                 <a:solidFill>
-                  <a:srgbClr val="24364B"/>
+                  <a:srgbClr val="1F364D"/>
                 </a:solidFill>
                 <a:latin typeface="Hiragino Sans GB" panose="020B0300000000000000" charset="-122"/>
                 <a:ea typeface="Hiragino Sans GB" panose="020B0300000000000000" charset="-122"/>
@@ -10508,6 +10866,7 @@
           </a:lstStyle>
           <a:p>
             <a:pPr>
+              <a:buNone/>
               <a:defRPr sz="1350" b="0">
                 <a:solidFill>
                   <a:srgbClr val="24364B"/>
@@ -10520,13 +10879,13 @@
             <a:r>
               <a:rPr sz="1350" b="0">
                 <a:solidFill>
-                  <a:srgbClr val="24364B"/>
+                  <a:srgbClr val="1F364D"/>
                 </a:solidFill>
                 <a:latin typeface="Hiragino Sans GB" panose="020B0300000000000000" charset="-122"/>
                 <a:ea typeface="Hiragino Sans GB" panose="020B0300000000000000" charset="-122"/>
                 <a:cs typeface="Hiragino Sans GB" panose="020B0300000000000000" charset="-122"/>
               </a:rPr>
-              <a:t>人工核验与回滚留痕</a:t>
+              <a:t>人工确认、争议撤销与审计留痕</a:t>
             </a:r>
             <a:endParaRPr sz="1350" b="0">
               <a:solidFill>
@@ -10560,7 +10919,7 @@
           </a:solidFill>
           <a:ln w="9525">
             <a:solidFill>
-              <a:srgbClr val="C9D9E5"/>
+              <a:srgbClr val="BBD1DD"/>
             </a:solidFill>
             <a:prstDash val="solid"/>
           </a:ln>
@@ -10594,7 +10953,7 @@
             <a:defPPr>
               <a:defRPr sz="1350" b="1">
                 <a:solidFill>
-                  <a:srgbClr val="24364B"/>
+                  <a:srgbClr val="1F364D"/>
                 </a:solidFill>
                 <a:latin typeface="Hiragino Sans GB" panose="020B0300000000000000" charset="-122"/>
                 <a:ea typeface="Hiragino Sans GB" panose="020B0300000000000000" charset="-122"/>
@@ -10604,6 +10963,7 @@
           </a:lstStyle>
           <a:p>
             <a:pPr>
+              <a:buNone/>
               <a:defRPr sz="1350" b="1">
                 <a:solidFill>
                   <a:srgbClr val="24364B"/>
@@ -10616,7 +10976,7 @@
             <a:r>
               <a:rPr sz="1350" b="1">
                 <a:solidFill>
-                  <a:srgbClr val="24364B"/>
+                  <a:srgbClr val="1F364D"/>
                 </a:solidFill>
                 <a:latin typeface="Hiragino Sans GB" panose="020B0300000000000000" charset="-122"/>
                 <a:ea typeface="Hiragino Sans GB" panose="020B0300000000000000" charset="-122"/>
@@ -10656,7 +11016,7 @@
           </a:solidFill>
           <a:ln w="9525">
             <a:solidFill>
-              <a:srgbClr val="C9D9E5"/>
+              <a:srgbClr val="BBD1DD"/>
             </a:solidFill>
             <a:prstDash val="solid"/>
           </a:ln>
@@ -10690,7 +11050,7 @@
             <a:defPPr>
               <a:defRPr sz="1350" b="0">
                 <a:solidFill>
-                  <a:srgbClr val="24364B"/>
+                  <a:srgbClr val="1F364D"/>
                 </a:solidFill>
                 <a:latin typeface="Hiragino Sans GB" panose="020B0300000000000000" charset="-122"/>
                 <a:ea typeface="Hiragino Sans GB" panose="020B0300000000000000" charset="-122"/>
@@ -10700,6 +11060,7 @@
           </a:lstStyle>
           <a:p>
             <a:pPr>
+              <a:buNone/>
               <a:defRPr sz="1350" b="0">
                 <a:solidFill>
                   <a:srgbClr val="24364B"/>
@@ -10712,13 +11073,13 @@
             <a:r>
               <a:rPr sz="1350" b="0">
                 <a:solidFill>
-                  <a:srgbClr val="24364B"/>
+                  <a:srgbClr val="1F364D"/>
                 </a:solidFill>
                 <a:latin typeface="Hiragino Sans GB" panose="020B0300000000000000" charset="-122"/>
                 <a:ea typeface="Hiragino Sans GB" panose="020B0300000000000000" charset="-122"/>
                 <a:cs typeface="Hiragino Sans GB" panose="020B0300000000000000" charset="-122"/>
               </a:rPr>
-              <a:t>先鉴权，再检索、统计总数与分面</a:t>
+              <a:t>先鉴权，再匹配、分面和稳定排序</a:t>
             </a:r>
             <a:endParaRPr sz="1350" b="0">
               <a:solidFill>
@@ -10752,7 +11113,7 @@
           </a:solidFill>
           <a:ln w="9525">
             <a:solidFill>
-              <a:srgbClr val="C9D9E5"/>
+              <a:srgbClr val="BBD1DD"/>
             </a:solidFill>
             <a:prstDash val="solid"/>
           </a:ln>
@@ -10786,7 +11147,7 @@
             <a:defPPr>
               <a:defRPr sz="1350" b="0">
                 <a:solidFill>
-                  <a:srgbClr val="24364B"/>
+                  <a:srgbClr val="1F364D"/>
                 </a:solidFill>
                 <a:latin typeface="Hiragino Sans GB" panose="020B0300000000000000" charset="-122"/>
                 <a:ea typeface="Hiragino Sans GB" panose="020B0300000000000000" charset="-122"/>
@@ -10796,6 +11157,7 @@
           </a:lstStyle>
           <a:p>
             <a:pPr>
+              <a:buNone/>
               <a:defRPr sz="1350" b="0">
                 <a:solidFill>
                   <a:srgbClr val="24364B"/>
@@ -10808,7 +11170,7 @@
             <a:r>
               <a:rPr sz="1350" b="0">
                 <a:solidFill>
-                  <a:srgbClr val="24364B"/>
+                  <a:srgbClr val="1F364D"/>
                 </a:solidFill>
                 <a:latin typeface="Hiragino Sans GB" panose="020B0300000000000000" charset="-122"/>
                 <a:ea typeface="Hiragino Sans GB" panose="020B0300000000000000" charset="-122"/>
@@ -10848,7 +11210,7 @@
           </a:solidFill>
           <a:ln w="9525">
             <a:solidFill>
-              <a:srgbClr val="C9D9E5"/>
+              <a:srgbClr val="BBD1DD"/>
             </a:solidFill>
             <a:prstDash val="solid"/>
           </a:ln>
@@ -10882,7 +11244,7 @@
             <a:defPPr>
               <a:defRPr sz="1350" b="1">
                 <a:solidFill>
-                  <a:srgbClr val="24364B"/>
+                  <a:srgbClr val="1F364D"/>
                 </a:solidFill>
                 <a:latin typeface="Hiragino Sans GB" panose="020B0300000000000000" charset="-122"/>
                 <a:ea typeface="Hiragino Sans GB" panose="020B0300000000000000" charset="-122"/>
@@ -10892,6 +11254,7 @@
           </a:lstStyle>
           <a:p>
             <a:pPr>
+              <a:buNone/>
               <a:defRPr sz="1350" b="1">
                 <a:solidFill>
                   <a:srgbClr val="24364B"/>
@@ -10904,7 +11267,7 @@
             <a:r>
               <a:rPr sz="1350" b="1">
                 <a:solidFill>
-                  <a:srgbClr val="24364B"/>
+                  <a:srgbClr val="1F364D"/>
                 </a:solidFill>
                 <a:latin typeface="Hiragino Sans GB" panose="020B0300000000000000" charset="-122"/>
                 <a:ea typeface="Hiragino Sans GB" panose="020B0300000000000000" charset="-122"/>
@@ -10944,7 +11307,7 @@
           </a:solidFill>
           <a:ln w="9525">
             <a:solidFill>
-              <a:srgbClr val="C9D9E5"/>
+              <a:srgbClr val="BBD1DD"/>
             </a:solidFill>
             <a:prstDash val="solid"/>
           </a:ln>
@@ -10978,7 +11341,7 @@
             <a:defPPr>
               <a:defRPr sz="1350" b="0">
                 <a:solidFill>
-                  <a:srgbClr val="24364B"/>
+                  <a:srgbClr val="1F364D"/>
                 </a:solidFill>
                 <a:latin typeface="Hiragino Sans GB" panose="020B0300000000000000" charset="-122"/>
                 <a:ea typeface="Hiragino Sans GB" panose="020B0300000000000000" charset="-122"/>
@@ -10988,6 +11351,7 @@
           </a:lstStyle>
           <a:p>
             <a:pPr>
+              <a:buNone/>
               <a:defRPr sz="1350" b="0">
                 <a:solidFill>
                   <a:srgbClr val="24364B"/>
@@ -11000,13 +11364,13 @@
             <a:r>
               <a:rPr sz="1350" b="0">
                 <a:solidFill>
-                  <a:srgbClr val="24364B"/>
+                  <a:srgbClr val="1F364D"/>
                 </a:solidFill>
                 <a:latin typeface="Hiragino Sans GB" panose="020B0300000000000000" charset="-122"/>
                 <a:ea typeface="Hiragino Sans GB" panose="020B0300000000000000" charset="-122"/>
                 <a:cs typeface="Hiragino Sans GB" panose="020B0300000000000000" charset="-122"/>
               </a:rPr>
-              <a:t>共同署名构边；路径在过滤子图计算</a:t>
+              <a:t>共同署名构边，路径在过滤子图计算</a:t>
             </a:r>
             <a:endParaRPr sz="1350" b="0">
               <a:solidFill>
@@ -11040,7 +11404,7 @@
           </a:solidFill>
           <a:ln w="9525">
             <a:solidFill>
-              <a:srgbClr val="C9D9E5"/>
+              <a:srgbClr val="BBD1DD"/>
             </a:solidFill>
             <a:prstDash val="solid"/>
           </a:ln>
@@ -11074,7 +11438,7 @@
             <a:defPPr>
               <a:defRPr sz="1350" b="0">
                 <a:solidFill>
-                  <a:srgbClr val="24364B"/>
+                  <a:srgbClr val="1F364D"/>
                 </a:solidFill>
                 <a:latin typeface="Hiragino Sans GB" panose="020B0300000000000000" charset="-122"/>
                 <a:ea typeface="Hiragino Sans GB" panose="020B0300000000000000" charset="-122"/>
@@ -11084,6 +11448,7 @@
           </a:lstStyle>
           <a:p>
             <a:pPr>
+              <a:buNone/>
               <a:defRPr sz="1350" b="0">
                 <a:solidFill>
                   <a:srgbClr val="24364B"/>
@@ -11096,13 +11461,13 @@
             <a:r>
               <a:rPr sz="1350" b="0">
                 <a:solidFill>
-                  <a:srgbClr val="24364B"/>
+                  <a:srgbClr val="1F364D"/>
                 </a:solidFill>
                 <a:latin typeface="Hiragino Sans GB" panose="020B0300000000000000" charset="-122"/>
                 <a:ea typeface="Hiragino Sans GB" panose="020B0300000000000000" charset="-122"/>
                 <a:cs typeface="Hiragino Sans GB" panose="020B0300000000000000" charset="-122"/>
               </a:rPr>
-              <a:t>无权节点与边不可泄露</a:t>
+              <a:t>无权节点与支撑成果不可泄露</a:t>
             </a:r>
             <a:endParaRPr sz="1350" b="0">
               <a:solidFill>
@@ -11132,7 +11497,7 @@
             <a:avLst/>
           </a:prstGeom>
           <a:solidFill>
-            <a:srgbClr val="EAF1F8"/>
+            <a:srgbClr val="DDEEF2"/>
           </a:solidFill>
           <a:ln w="0">
             <a:noFill/>
@@ -11168,7 +11533,7 @@
             <a:defPPr>
               <a:defRPr sz="1425" b="0">
                 <a:solidFill>
-                  <a:srgbClr val="24364B"/>
+                  <a:srgbClr val="1F364D"/>
                 </a:solidFill>
                 <a:latin typeface="Hiragino Sans GB" panose="020B0300000000000000" charset="-122"/>
                 <a:ea typeface="Hiragino Sans GB" panose="020B0300000000000000" charset="-122"/>
@@ -11178,6 +11543,7 @@
           </a:lstStyle>
           <a:p>
             <a:pPr>
+              <a:buNone/>
               <a:defRPr sz="1425" b="0">
                 <a:solidFill>
                   <a:srgbClr val="24364B"/>
@@ -11190,13 +11556,13 @@
             <a:r>
               <a:rPr sz="1425" b="0">
                 <a:solidFill>
-                  <a:srgbClr val="24364B"/>
+                  <a:srgbClr val="1F364D"/>
                 </a:solidFill>
                 <a:latin typeface="Hiragino Sans GB" panose="020B0300000000000000" charset="-122"/>
                 <a:ea typeface="Hiragino Sans GB" panose="020B0300000000000000" charset="-122"/>
                 <a:cs typeface="Hiragino Sans GB" panose="020B0300000000000000" charset="-122"/>
               </a:rPr>
-              <a:t>性能指标是待测目标：1 万条元数据、20 并发、检索／详情 P95 ≤ 2 秒，非预期 5xx ＜ 1%（NFR-01／AT-01）。</a:t>
+              <a:t>性能仍是待测目标：1 万条元数据、20 并发、P95 ≤ 2 秒、非预期 5xx ＜ 1%（NFR-01/AT-01）。</a:t>
             </a:r>
             <a:endParaRPr sz="1425" b="0">
               <a:solidFill>
@@ -11261,9 +11627,9 @@
           <a:bodyPr anchor="ctr"/>
           <a:lstStyle>
             <a:defPPr>
-              <a:defRPr sz="2475" b="1">
-                <a:solidFill>
-                  <a:srgbClr val="24364B"/>
+              <a:defRPr sz="2700" b="1">
+                <a:solidFill>
+                  <a:srgbClr val="102A43"/>
                 </a:solidFill>
                 <a:latin typeface="Hiragino Sans GB" panose="020B0300000000000000" charset="-122"/>
                 <a:ea typeface="Hiragino Sans GB" panose="020B0300000000000000" charset="-122"/>
@@ -11273,6 +11639,7 @@
           </a:lstStyle>
           <a:p>
             <a:pPr>
+              <a:buNone/>
               <a:defRPr sz="2475" b="1">
                 <a:solidFill>
                   <a:srgbClr val="24364B"/>
@@ -11283,15 +11650,15 @@
               </a:defRPr>
             </a:pPr>
             <a:r>
-              <a:rPr sz="2475" b="1">
-                <a:solidFill>
-                  <a:srgbClr val="24364B"/>
+              <a:rPr sz="2700" b="1">
+                <a:solidFill>
+                  <a:srgbClr val="102A43"/>
                 </a:solidFill>
                 <a:latin typeface="Hiragino Sans GB" panose="020B0300000000000000" charset="-122"/>
                 <a:ea typeface="Hiragino Sans GB" panose="020B0300000000000000" charset="-122"/>
                 <a:cs typeface="Hiragino Sans GB" panose="020B0300000000000000" charset="-122"/>
               </a:rPr>
-              <a:t>从调研结论追溯到验收场景</a:t>
+              <a:t>追溯链：调研结论、用例、SRS 与验收</a:t>
             </a:r>
             <a:endParaRPr sz="2475" b="1">
               <a:solidFill>
@@ -11315,13 +11682,13 @@
         <p:spPr>
           <a:xfrm>
             <a:off x="590550" y="1057275"/>
-            <a:ext cx="11010900" cy="19050"/>
+            <a:ext cx="11010900" cy="38100"/>
           </a:xfrm>
           <a:prstGeom prst="rect">
             <a:avLst/>
           </a:prstGeom>
           <a:solidFill>
-            <a:srgbClr val="C9D9E5"/>
+            <a:srgbClr val="2E69B1"/>
           </a:solidFill>
           <a:ln w="0">
             <a:noFill/>
@@ -11357,7 +11724,7 @@
             <a:defPPr>
               <a:defRPr sz="1050" b="0">
                 <a:solidFill>
-                  <a:srgbClr val="5D7183"/>
+                  <a:srgbClr val="62788B"/>
                 </a:solidFill>
                 <a:latin typeface="Hiragino Sans GB" panose="020B0300000000000000" charset="-122"/>
                 <a:ea typeface="Hiragino Sans GB" panose="020B0300000000000000" charset="-122"/>
@@ -11367,6 +11734,7 @@
           </a:lstStyle>
           <a:p>
             <a:pPr>
+              <a:buNone/>
               <a:defRPr sz="1050" b="0">
                 <a:solidFill>
                   <a:srgbClr val="5D7183"/>
@@ -11379,7 +11747,7 @@
             <a:r>
               <a:rPr sz="1050" b="0">
                 <a:solidFill>
-                  <a:srgbClr val="5D7183"/>
+                  <a:srgbClr val="62788B"/>
                 </a:solidFill>
                 <a:latin typeface="Hiragino Sans GB" panose="020B0300000000000000" charset="-122"/>
                 <a:ea typeface="Hiragino Sans GB" panose="020B0300000000000000" charset="-122"/>
@@ -11415,7 +11783,7 @@
             <a:avLst/>
           </a:prstGeom>
           <a:solidFill>
-            <a:srgbClr val="EAF1F8"/>
+            <a:srgbClr val="DDEEF2"/>
           </a:solidFill>
           <a:ln w="9525">
             <a:solidFill>
@@ -11453,7 +11821,7 @@
             <a:defPPr>
               <a:defRPr sz="1350" b="1">
                 <a:solidFill>
-                  <a:srgbClr val="385E7D"/>
+                  <a:srgbClr val="245487"/>
                 </a:solidFill>
                 <a:latin typeface="Hiragino Sans GB" panose="020B0300000000000000" charset="-122"/>
                 <a:ea typeface="Hiragino Sans GB" panose="020B0300000000000000" charset="-122"/>
@@ -11463,6 +11831,7 @@
           </a:lstStyle>
           <a:p>
             <a:pPr>
+              <a:buNone/>
               <a:defRPr sz="1350" b="1">
                 <a:solidFill>
                   <a:srgbClr val="385E7D"/>
@@ -11475,7 +11844,7 @@
             <a:r>
               <a:rPr sz="1350" b="1">
                 <a:solidFill>
-                  <a:srgbClr val="385E7D"/>
+                  <a:srgbClr val="245487"/>
                 </a:solidFill>
                 <a:latin typeface="Hiragino Sans GB" panose="020B0300000000000000" charset="-122"/>
                 <a:ea typeface="Hiragino Sans GB" panose="020B0300000000000000" charset="-122"/>
@@ -11511,7 +11880,7 @@
             <a:avLst/>
           </a:prstGeom>
           <a:solidFill>
-            <a:srgbClr val="EAF1F8"/>
+            <a:srgbClr val="DDEEF2"/>
           </a:solidFill>
           <a:ln w="9525">
             <a:solidFill>
@@ -11549,7 +11918,7 @@
             <a:defPPr>
               <a:defRPr sz="1350" b="1">
                 <a:solidFill>
-                  <a:srgbClr val="385E7D"/>
+                  <a:srgbClr val="245487"/>
                 </a:solidFill>
                 <a:latin typeface="Hiragino Sans GB" panose="020B0300000000000000" charset="-122"/>
                 <a:ea typeface="Hiragino Sans GB" panose="020B0300000000000000" charset="-122"/>
@@ -11559,6 +11928,7 @@
           </a:lstStyle>
           <a:p>
             <a:pPr>
+              <a:buNone/>
               <a:defRPr sz="1350" b="1">
                 <a:solidFill>
                   <a:srgbClr val="385E7D"/>
@@ -11571,7 +11941,7 @@
             <a:r>
               <a:rPr sz="1350" b="1">
                 <a:solidFill>
-                  <a:srgbClr val="385E7D"/>
+                  <a:srgbClr val="245487"/>
                 </a:solidFill>
                 <a:latin typeface="Hiragino Sans GB" panose="020B0300000000000000" charset="-122"/>
                 <a:ea typeface="Hiragino Sans GB" panose="020B0300000000000000" charset="-122"/>
@@ -11607,7 +11977,7 @@
             <a:avLst/>
           </a:prstGeom>
           <a:solidFill>
-            <a:srgbClr val="EAF1F8"/>
+            <a:srgbClr val="DDEEF2"/>
           </a:solidFill>
           <a:ln w="9525">
             <a:solidFill>
@@ -11645,7 +12015,7 @@
             <a:defPPr>
               <a:defRPr sz="1350" b="1">
                 <a:solidFill>
-                  <a:srgbClr val="385E7D"/>
+                  <a:srgbClr val="245487"/>
                 </a:solidFill>
                 <a:latin typeface="Hiragino Sans GB" panose="020B0300000000000000" charset="-122"/>
                 <a:ea typeface="Hiragino Sans GB" panose="020B0300000000000000" charset="-122"/>
@@ -11655,6 +12025,7 @@
           </a:lstStyle>
           <a:p>
             <a:pPr>
+              <a:buNone/>
               <a:defRPr sz="1350" b="1">
                 <a:solidFill>
                   <a:srgbClr val="385E7D"/>
@@ -11667,7 +12038,7 @@
             <a:r>
               <a:rPr sz="1350" b="1">
                 <a:solidFill>
-                  <a:srgbClr val="385E7D"/>
+                  <a:srgbClr val="245487"/>
                 </a:solidFill>
                 <a:latin typeface="Hiragino Sans GB" panose="020B0300000000000000" charset="-122"/>
                 <a:ea typeface="Hiragino Sans GB" panose="020B0300000000000000" charset="-122"/>
@@ -11703,7 +12074,7 @@
             <a:avLst/>
           </a:prstGeom>
           <a:solidFill>
-            <a:srgbClr val="EAF1F8"/>
+            <a:srgbClr val="DDEEF2"/>
           </a:solidFill>
           <a:ln w="9525">
             <a:solidFill>
@@ -11741,7 +12112,7 @@
             <a:defPPr>
               <a:defRPr sz="1350" b="1">
                 <a:solidFill>
-                  <a:srgbClr val="385E7D"/>
+                  <a:srgbClr val="245487"/>
                 </a:solidFill>
                 <a:latin typeface="Hiragino Sans GB" panose="020B0300000000000000" charset="-122"/>
                 <a:ea typeface="Hiragino Sans GB" panose="020B0300000000000000" charset="-122"/>
@@ -11751,6 +12122,7 @@
           </a:lstStyle>
           <a:p>
             <a:pPr>
+              <a:buNone/>
               <a:defRPr sz="1350" b="1">
                 <a:solidFill>
                   <a:srgbClr val="385E7D"/>
@@ -11763,7 +12135,7 @@
             <a:r>
               <a:rPr sz="1350" b="1">
                 <a:solidFill>
-                  <a:srgbClr val="385E7D"/>
+                  <a:srgbClr val="245487"/>
                 </a:solidFill>
                 <a:latin typeface="Hiragino Sans GB" panose="020B0300000000000000" charset="-122"/>
                 <a:ea typeface="Hiragino Sans GB" panose="020B0300000000000000" charset="-122"/>
@@ -11803,7 +12175,7 @@
           </a:solidFill>
           <a:ln w="9525">
             <a:solidFill>
-              <a:srgbClr val="C9D9E5"/>
+              <a:srgbClr val="BBD1DD"/>
             </a:solidFill>
             <a:prstDash val="solid"/>
           </a:ln>
@@ -11837,7 +12209,7 @@
             <a:defPPr>
               <a:defRPr sz="1350" b="1">
                 <a:solidFill>
-                  <a:srgbClr val="24364B"/>
+                  <a:srgbClr val="1F364D"/>
                 </a:solidFill>
                 <a:latin typeface="Hiragino Sans GB" panose="020B0300000000000000" charset="-122"/>
                 <a:ea typeface="Hiragino Sans GB" panose="020B0300000000000000" charset="-122"/>
@@ -11847,6 +12219,7 @@
           </a:lstStyle>
           <a:p>
             <a:pPr>
+              <a:buNone/>
               <a:defRPr sz="1350" b="1">
                 <a:solidFill>
                   <a:srgbClr val="24364B"/>
@@ -11859,7 +12232,7 @@
             <a:r>
               <a:rPr sz="1350" b="1">
                 <a:solidFill>
-                  <a:srgbClr val="24364B"/>
+                  <a:srgbClr val="1F364D"/>
                 </a:solidFill>
                 <a:latin typeface="Hiragino Sans GB" panose="020B0300000000000000" charset="-122"/>
                 <a:ea typeface="Hiragino Sans GB" panose="020B0300000000000000" charset="-122"/>
@@ -11899,7 +12272,7 @@
           </a:solidFill>
           <a:ln w="9525">
             <a:solidFill>
-              <a:srgbClr val="C9D9E5"/>
+              <a:srgbClr val="BBD1DD"/>
             </a:solidFill>
             <a:prstDash val="solid"/>
           </a:ln>
@@ -11933,7 +12306,7 @@
             <a:defPPr>
               <a:defRPr sz="1350" b="0">
                 <a:solidFill>
-                  <a:srgbClr val="24364B"/>
+                  <a:srgbClr val="1F364D"/>
                 </a:solidFill>
                 <a:latin typeface="Hiragino Sans GB" panose="020B0300000000000000" charset="-122"/>
                 <a:ea typeface="Hiragino Sans GB" panose="020B0300000000000000" charset="-122"/>
@@ -11943,6 +12316,7 @@
           </a:lstStyle>
           <a:p>
             <a:pPr>
+              <a:buNone/>
               <a:defRPr sz="1350" b="0">
                 <a:solidFill>
                   <a:srgbClr val="24364B"/>
@@ -11955,7 +12329,7 @@
             <a:r>
               <a:rPr sz="1350" b="0">
                 <a:solidFill>
-                  <a:srgbClr val="24364B"/>
+                  <a:srgbClr val="1F364D"/>
                 </a:solidFill>
                 <a:latin typeface="Hiragino Sans GB" panose="020B0300000000000000" charset="-122"/>
                 <a:ea typeface="Hiragino Sans GB" panose="020B0300000000000000" charset="-122"/>
@@ -11995,7 +12369,7 @@
           </a:solidFill>
           <a:ln w="9525">
             <a:solidFill>
-              <a:srgbClr val="C9D9E5"/>
+              <a:srgbClr val="BBD1DD"/>
             </a:solidFill>
             <a:prstDash val="solid"/>
           </a:ln>
@@ -12029,7 +12403,7 @@
             <a:defPPr>
               <a:defRPr sz="1350" b="0">
                 <a:solidFill>
-                  <a:srgbClr val="24364B"/>
+                  <a:srgbClr val="1F364D"/>
                 </a:solidFill>
                 <a:latin typeface="Hiragino Sans GB" panose="020B0300000000000000" charset="-122"/>
                 <a:ea typeface="Hiragino Sans GB" panose="020B0300000000000000" charset="-122"/>
@@ -12039,6 +12413,7 @@
           </a:lstStyle>
           <a:p>
             <a:pPr>
+              <a:buNone/>
               <a:defRPr sz="1350" b="0">
                 <a:solidFill>
                   <a:srgbClr val="24364B"/>
@@ -12051,7 +12426,7 @@
             <a:r>
               <a:rPr sz="1350" b="0">
                 <a:solidFill>
-                  <a:srgbClr val="24364B"/>
+                  <a:srgbClr val="1F364D"/>
                 </a:solidFill>
                 <a:latin typeface="Hiragino Sans GB" panose="020B0300000000000000" charset="-122"/>
                 <a:ea typeface="Hiragino Sans GB" panose="020B0300000000000000" charset="-122"/>
@@ -12091,7 +12466,7 @@
           </a:solidFill>
           <a:ln w="9525">
             <a:solidFill>
-              <a:srgbClr val="C9D9E5"/>
+              <a:srgbClr val="BBD1DD"/>
             </a:solidFill>
             <a:prstDash val="solid"/>
           </a:ln>
@@ -12125,7 +12500,7 @@
             <a:defPPr>
               <a:defRPr sz="1350" b="0">
                 <a:solidFill>
-                  <a:srgbClr val="24364B"/>
+                  <a:srgbClr val="1F364D"/>
                 </a:solidFill>
                 <a:latin typeface="Hiragino Sans GB" panose="020B0300000000000000" charset="-122"/>
                 <a:ea typeface="Hiragino Sans GB" panose="020B0300000000000000" charset="-122"/>
@@ -12135,6 +12510,7 @@
           </a:lstStyle>
           <a:p>
             <a:pPr>
+              <a:buNone/>
               <a:defRPr sz="1350" b="0">
                 <a:solidFill>
                   <a:srgbClr val="24364B"/>
@@ -12147,7 +12523,7 @@
             <a:r>
               <a:rPr sz="1350" b="0">
                 <a:solidFill>
-                  <a:srgbClr val="24364B"/>
+                  <a:srgbClr val="1F364D"/>
                 </a:solidFill>
                 <a:latin typeface="Hiragino Sans GB" panose="020B0300000000000000" charset="-122"/>
                 <a:ea typeface="Hiragino Sans GB" panose="020B0300000000000000" charset="-122"/>
@@ -12187,7 +12563,7 @@
           </a:solidFill>
           <a:ln w="9525">
             <a:solidFill>
-              <a:srgbClr val="C9D9E5"/>
+              <a:srgbClr val="BBD1DD"/>
             </a:solidFill>
             <a:prstDash val="solid"/>
           </a:ln>
@@ -12221,7 +12597,7 @@
             <a:defPPr>
               <a:defRPr sz="1350" b="1">
                 <a:solidFill>
-                  <a:srgbClr val="24364B"/>
+                  <a:srgbClr val="1F364D"/>
                 </a:solidFill>
                 <a:latin typeface="Hiragino Sans GB" panose="020B0300000000000000" charset="-122"/>
                 <a:ea typeface="Hiragino Sans GB" panose="020B0300000000000000" charset="-122"/>
@@ -12231,6 +12607,7 @@
           </a:lstStyle>
           <a:p>
             <a:pPr>
+              <a:buNone/>
               <a:defRPr sz="1350" b="1">
                 <a:solidFill>
                   <a:srgbClr val="24364B"/>
@@ -12243,7 +12620,7 @@
             <a:r>
               <a:rPr sz="1350" b="1">
                 <a:solidFill>
-                  <a:srgbClr val="24364B"/>
+                  <a:srgbClr val="1F364D"/>
                 </a:solidFill>
                 <a:latin typeface="Hiragino Sans GB" panose="020B0300000000000000" charset="-122"/>
                 <a:ea typeface="Hiragino Sans GB" panose="020B0300000000000000" charset="-122"/>
@@ -12283,7 +12660,7 @@
           </a:solidFill>
           <a:ln w="9525">
             <a:solidFill>
-              <a:srgbClr val="C9D9E5"/>
+              <a:srgbClr val="BBD1DD"/>
             </a:solidFill>
             <a:prstDash val="solid"/>
           </a:ln>
@@ -12317,7 +12694,7 @@
             <a:defPPr>
               <a:defRPr sz="1350" b="0">
                 <a:solidFill>
-                  <a:srgbClr val="24364B"/>
+                  <a:srgbClr val="1F364D"/>
                 </a:solidFill>
                 <a:latin typeface="Hiragino Sans GB" panose="020B0300000000000000" charset="-122"/>
                 <a:ea typeface="Hiragino Sans GB" panose="020B0300000000000000" charset="-122"/>
@@ -12327,6 +12704,7 @@
           </a:lstStyle>
           <a:p>
             <a:pPr>
+              <a:buNone/>
               <a:defRPr sz="1350" b="0">
                 <a:solidFill>
                   <a:srgbClr val="24364B"/>
@@ -12339,7 +12717,7 @@
             <a:r>
               <a:rPr sz="1350" b="0">
                 <a:solidFill>
-                  <a:srgbClr val="24364B"/>
+                  <a:srgbClr val="1F364D"/>
                 </a:solidFill>
                 <a:latin typeface="Hiragino Sans GB" panose="020B0300000000000000" charset="-122"/>
                 <a:ea typeface="Hiragino Sans GB" panose="020B0300000000000000" charset="-122"/>
@@ -12379,7 +12757,7 @@
           </a:solidFill>
           <a:ln w="9525">
             <a:solidFill>
-              <a:srgbClr val="C9D9E5"/>
+              <a:srgbClr val="BBD1DD"/>
             </a:solidFill>
             <a:prstDash val="solid"/>
           </a:ln>
@@ -12413,7 +12791,7 @@
             <a:defPPr>
               <a:defRPr sz="1350" b="0">
                 <a:solidFill>
-                  <a:srgbClr val="24364B"/>
+                  <a:srgbClr val="1F364D"/>
                 </a:solidFill>
                 <a:latin typeface="Hiragino Sans GB" panose="020B0300000000000000" charset="-122"/>
                 <a:ea typeface="Hiragino Sans GB" panose="020B0300000000000000" charset="-122"/>
@@ -12423,6 +12801,7 @@
           </a:lstStyle>
           <a:p>
             <a:pPr>
+              <a:buNone/>
               <a:defRPr sz="1350" b="0">
                 <a:solidFill>
                   <a:srgbClr val="24364B"/>
@@ -12435,7 +12814,7 @@
             <a:r>
               <a:rPr sz="1350" b="0">
                 <a:solidFill>
-                  <a:srgbClr val="24364B"/>
+                  <a:srgbClr val="1F364D"/>
                 </a:solidFill>
                 <a:latin typeface="Hiragino Sans GB" panose="020B0300000000000000" charset="-122"/>
                 <a:ea typeface="Hiragino Sans GB" panose="020B0300000000000000" charset="-122"/>
@@ -12475,7 +12854,7 @@
           </a:solidFill>
           <a:ln w="9525">
             <a:solidFill>
-              <a:srgbClr val="C9D9E5"/>
+              <a:srgbClr val="BBD1DD"/>
             </a:solidFill>
             <a:prstDash val="solid"/>
           </a:ln>
@@ -12509,7 +12888,7 @@
             <a:defPPr>
               <a:defRPr sz="1350" b="0">
                 <a:solidFill>
-                  <a:srgbClr val="24364B"/>
+                  <a:srgbClr val="1F364D"/>
                 </a:solidFill>
                 <a:latin typeface="Hiragino Sans GB" panose="020B0300000000000000" charset="-122"/>
                 <a:ea typeface="Hiragino Sans GB" panose="020B0300000000000000" charset="-122"/>
@@ -12519,6 +12898,7 @@
           </a:lstStyle>
           <a:p>
             <a:pPr>
+              <a:buNone/>
               <a:defRPr sz="1350" b="0">
                 <a:solidFill>
                   <a:srgbClr val="24364B"/>
@@ -12531,7 +12911,7 @@
             <a:r>
               <a:rPr sz="1350" b="0">
                 <a:solidFill>
-                  <a:srgbClr val="24364B"/>
+                  <a:srgbClr val="1F364D"/>
                 </a:solidFill>
                 <a:latin typeface="Hiragino Sans GB" panose="020B0300000000000000" charset="-122"/>
                 <a:ea typeface="Hiragino Sans GB" panose="020B0300000000000000" charset="-122"/>
@@ -12571,7 +12951,7 @@
           </a:solidFill>
           <a:ln w="9525">
             <a:solidFill>
-              <a:srgbClr val="C9D9E5"/>
+              <a:srgbClr val="BBD1DD"/>
             </a:solidFill>
             <a:prstDash val="solid"/>
           </a:ln>
@@ -12605,7 +12985,7 @@
             <a:defPPr>
               <a:defRPr sz="1350" b="1">
                 <a:solidFill>
-                  <a:srgbClr val="24364B"/>
+                  <a:srgbClr val="1F364D"/>
                 </a:solidFill>
                 <a:latin typeface="Hiragino Sans GB" panose="020B0300000000000000" charset="-122"/>
                 <a:ea typeface="Hiragino Sans GB" panose="020B0300000000000000" charset="-122"/>
@@ -12615,6 +12995,7 @@
           </a:lstStyle>
           <a:p>
             <a:pPr>
+              <a:buNone/>
               <a:defRPr sz="1350" b="1">
                 <a:solidFill>
                   <a:srgbClr val="24364B"/>
@@ -12627,7 +13008,7 @@
             <a:r>
               <a:rPr sz="1350" b="1">
                 <a:solidFill>
-                  <a:srgbClr val="24364B"/>
+                  <a:srgbClr val="1F364D"/>
                 </a:solidFill>
                 <a:latin typeface="Hiragino Sans GB" panose="020B0300000000000000" charset="-122"/>
                 <a:ea typeface="Hiragino Sans GB" panose="020B0300000000000000" charset="-122"/>
@@ -12667,7 +13048,7 @@
           </a:solidFill>
           <a:ln w="9525">
             <a:solidFill>
-              <a:srgbClr val="C9D9E5"/>
+              <a:srgbClr val="BBD1DD"/>
             </a:solidFill>
             <a:prstDash val="solid"/>
           </a:ln>
@@ -12701,7 +13082,7 @@
             <a:defPPr>
               <a:defRPr sz="1350" b="0">
                 <a:solidFill>
-                  <a:srgbClr val="24364B"/>
+                  <a:srgbClr val="1F364D"/>
                 </a:solidFill>
                 <a:latin typeface="Hiragino Sans GB" panose="020B0300000000000000" charset="-122"/>
                 <a:ea typeface="Hiragino Sans GB" panose="020B0300000000000000" charset="-122"/>
@@ -12711,6 +13092,7 @@
           </a:lstStyle>
           <a:p>
             <a:pPr>
+              <a:buNone/>
               <a:defRPr sz="1350" b="0">
                 <a:solidFill>
                   <a:srgbClr val="24364B"/>
@@ -12723,7 +13105,7 @@
             <a:r>
               <a:rPr sz="1350" b="0">
                 <a:solidFill>
-                  <a:srgbClr val="24364B"/>
+                  <a:srgbClr val="1F364D"/>
                 </a:solidFill>
                 <a:latin typeface="Hiragino Sans GB" panose="020B0300000000000000" charset="-122"/>
                 <a:ea typeface="Hiragino Sans GB" panose="020B0300000000000000" charset="-122"/>
@@ -12763,7 +13145,7 @@
           </a:solidFill>
           <a:ln w="9525">
             <a:solidFill>
-              <a:srgbClr val="C9D9E5"/>
+              <a:srgbClr val="BBD1DD"/>
             </a:solidFill>
             <a:prstDash val="solid"/>
           </a:ln>
@@ -12797,7 +13179,7 @@
             <a:defPPr>
               <a:defRPr sz="1350" b="0">
                 <a:solidFill>
-                  <a:srgbClr val="24364B"/>
+                  <a:srgbClr val="1F364D"/>
                 </a:solidFill>
                 <a:latin typeface="Hiragino Sans GB" panose="020B0300000000000000" charset="-122"/>
                 <a:ea typeface="Hiragino Sans GB" panose="020B0300000000000000" charset="-122"/>
@@ -12807,6 +13189,7 @@
           </a:lstStyle>
           <a:p>
             <a:pPr>
+              <a:buNone/>
               <a:defRPr sz="1350" b="0">
                 <a:solidFill>
                   <a:srgbClr val="24364B"/>
@@ -12819,7 +13202,7 @@
             <a:r>
               <a:rPr sz="1350" b="0">
                 <a:solidFill>
-                  <a:srgbClr val="24364B"/>
+                  <a:srgbClr val="1F364D"/>
                 </a:solidFill>
                 <a:latin typeface="Hiragino Sans GB" panose="020B0300000000000000" charset="-122"/>
                 <a:ea typeface="Hiragino Sans GB" panose="020B0300000000000000" charset="-122"/>
@@ -12859,7 +13242,7 @@
           </a:solidFill>
           <a:ln w="9525">
             <a:solidFill>
-              <a:srgbClr val="C9D9E5"/>
+              <a:srgbClr val="BBD1DD"/>
             </a:solidFill>
             <a:prstDash val="solid"/>
           </a:ln>
@@ -12893,7 +13276,7 @@
             <a:defPPr>
               <a:defRPr sz="1350" b="0">
                 <a:solidFill>
-                  <a:srgbClr val="24364B"/>
+                  <a:srgbClr val="1F364D"/>
                 </a:solidFill>
                 <a:latin typeface="Hiragino Sans GB" panose="020B0300000000000000" charset="-122"/>
                 <a:ea typeface="Hiragino Sans GB" panose="020B0300000000000000" charset="-122"/>
@@ -12903,6 +13286,7 @@
           </a:lstStyle>
           <a:p>
             <a:pPr>
+              <a:buNone/>
               <a:defRPr sz="1350" b="0">
                 <a:solidFill>
                   <a:srgbClr val="24364B"/>
@@ -12915,7 +13299,7 @@
             <a:r>
               <a:rPr sz="1350" b="0">
                 <a:solidFill>
-                  <a:srgbClr val="24364B"/>
+                  <a:srgbClr val="1F364D"/>
                 </a:solidFill>
                 <a:latin typeface="Hiragino Sans GB" panose="020B0300000000000000" charset="-122"/>
                 <a:ea typeface="Hiragino Sans GB" panose="020B0300000000000000" charset="-122"/>
@@ -12955,7 +13339,7 @@
           </a:solidFill>
           <a:ln w="9525">
             <a:solidFill>
-              <a:srgbClr val="C9D9E5"/>
+              <a:srgbClr val="BBD1DD"/>
             </a:solidFill>
             <a:prstDash val="solid"/>
           </a:ln>
@@ -12989,7 +13373,7 @@
             <a:defPPr>
               <a:defRPr sz="1350" b="1">
                 <a:solidFill>
-                  <a:srgbClr val="24364B"/>
+                  <a:srgbClr val="1F364D"/>
                 </a:solidFill>
                 <a:latin typeface="Hiragino Sans GB" panose="020B0300000000000000" charset="-122"/>
                 <a:ea typeface="Hiragino Sans GB" panose="020B0300000000000000" charset="-122"/>
@@ -12999,6 +13383,7 @@
           </a:lstStyle>
           <a:p>
             <a:pPr>
+              <a:buNone/>
               <a:defRPr sz="1350" b="1">
                 <a:solidFill>
                   <a:srgbClr val="24364B"/>
@@ -13011,7 +13396,7 @@
             <a:r>
               <a:rPr sz="1350" b="1">
                 <a:solidFill>
-                  <a:srgbClr val="24364B"/>
+                  <a:srgbClr val="1F364D"/>
                 </a:solidFill>
                 <a:latin typeface="Hiragino Sans GB" panose="020B0300000000000000" charset="-122"/>
                 <a:ea typeface="Hiragino Sans GB" panose="020B0300000000000000" charset="-122"/>
@@ -13051,7 +13436,7 @@
           </a:solidFill>
           <a:ln w="9525">
             <a:solidFill>
-              <a:srgbClr val="C9D9E5"/>
+              <a:srgbClr val="BBD1DD"/>
             </a:solidFill>
             <a:prstDash val="solid"/>
           </a:ln>
@@ -13085,7 +13470,7 @@
             <a:defPPr>
               <a:defRPr sz="1350" b="0">
                 <a:solidFill>
-                  <a:srgbClr val="24364B"/>
+                  <a:srgbClr val="1F364D"/>
                 </a:solidFill>
                 <a:latin typeface="Hiragino Sans GB" panose="020B0300000000000000" charset="-122"/>
                 <a:ea typeface="Hiragino Sans GB" panose="020B0300000000000000" charset="-122"/>
@@ -13095,6 +13480,7 @@
           </a:lstStyle>
           <a:p>
             <a:pPr>
+              <a:buNone/>
               <a:defRPr sz="1350" b="0">
                 <a:solidFill>
                   <a:srgbClr val="24364B"/>
@@ -13107,7 +13493,7 @@
             <a:r>
               <a:rPr sz="1350" b="0">
                 <a:solidFill>
-                  <a:srgbClr val="24364B"/>
+                  <a:srgbClr val="1F364D"/>
                 </a:solidFill>
                 <a:latin typeface="Hiragino Sans GB" panose="020B0300000000000000" charset="-122"/>
                 <a:ea typeface="Hiragino Sans GB" panose="020B0300000000000000" charset="-122"/>
@@ -13147,7 +13533,7 @@
           </a:solidFill>
           <a:ln w="9525">
             <a:solidFill>
-              <a:srgbClr val="C9D9E5"/>
+              <a:srgbClr val="BBD1DD"/>
             </a:solidFill>
             <a:prstDash val="solid"/>
           </a:ln>
@@ -13181,7 +13567,7 @@
             <a:defPPr>
               <a:defRPr sz="1350" b="0">
                 <a:solidFill>
-                  <a:srgbClr val="24364B"/>
+                  <a:srgbClr val="1F364D"/>
                 </a:solidFill>
                 <a:latin typeface="Hiragino Sans GB" panose="020B0300000000000000" charset="-122"/>
                 <a:ea typeface="Hiragino Sans GB" panose="020B0300000000000000" charset="-122"/>
@@ -13191,6 +13577,7 @@
           </a:lstStyle>
           <a:p>
             <a:pPr>
+              <a:buNone/>
               <a:defRPr sz="1350" b="0">
                 <a:solidFill>
                   <a:srgbClr val="24364B"/>
@@ -13203,7 +13590,7 @@
             <a:r>
               <a:rPr sz="1350" b="0">
                 <a:solidFill>
-                  <a:srgbClr val="24364B"/>
+                  <a:srgbClr val="1F364D"/>
                 </a:solidFill>
                 <a:latin typeface="Hiragino Sans GB" panose="020B0300000000000000" charset="-122"/>
                 <a:ea typeface="Hiragino Sans GB" panose="020B0300000000000000" charset="-122"/>
@@ -13243,7 +13630,7 @@
           </a:solidFill>
           <a:ln w="9525">
             <a:solidFill>
-              <a:srgbClr val="C9D9E5"/>
+              <a:srgbClr val="BBD1DD"/>
             </a:solidFill>
             <a:prstDash val="solid"/>
           </a:ln>
@@ -13277,7 +13664,7 @@
             <a:defPPr>
               <a:defRPr sz="1350" b="0">
                 <a:solidFill>
-                  <a:srgbClr val="24364B"/>
+                  <a:srgbClr val="1F364D"/>
                 </a:solidFill>
                 <a:latin typeface="Hiragino Sans GB" panose="020B0300000000000000" charset="-122"/>
                 <a:ea typeface="Hiragino Sans GB" panose="020B0300000000000000" charset="-122"/>
@@ -13287,6 +13674,7 @@
           </a:lstStyle>
           <a:p>
             <a:pPr>
+              <a:buNone/>
               <a:defRPr sz="1350" b="0">
                 <a:solidFill>
                   <a:srgbClr val="24364B"/>
@@ -13299,7 +13687,7 @@
             <a:r>
               <a:rPr sz="1350" b="0">
                 <a:solidFill>
-                  <a:srgbClr val="24364B"/>
+                  <a:srgbClr val="1F364D"/>
                 </a:solidFill>
                 <a:latin typeface="Hiragino Sans GB" panose="020B0300000000000000" charset="-122"/>
                 <a:ea typeface="Hiragino Sans GB" panose="020B0300000000000000" charset="-122"/>
@@ -13339,7 +13727,7 @@
           </a:solidFill>
           <a:ln w="9525">
             <a:solidFill>
-              <a:srgbClr val="C9D9E5"/>
+              <a:srgbClr val="BBD1DD"/>
             </a:solidFill>
             <a:prstDash val="solid"/>
           </a:ln>
@@ -13362,7 +13750,7 @@
             <a:avLst/>
           </a:prstGeom>
           <a:solidFill>
-            <a:srgbClr val="385E7D"/>
+            <a:srgbClr val="2E69B1"/>
           </a:solidFill>
           <a:ln w="0">
             <a:noFill/>
@@ -13396,9 +13784,9 @@
           <a:bodyPr anchor="ctr"/>
           <a:lstStyle>
             <a:defPPr>
-              <a:defRPr sz="1725" b="1">
-                <a:solidFill>
-                  <a:srgbClr val="385E7D"/>
+              <a:defRPr sz="1800" b="1">
+                <a:solidFill>
+                  <a:srgbClr val="245487"/>
                 </a:solidFill>
                 <a:latin typeface="Hiragino Sans GB" panose="020B0300000000000000" charset="-122"/>
                 <a:ea typeface="Hiragino Sans GB" panose="020B0300000000000000" charset="-122"/>
@@ -13408,6 +13796,7 @@
           </a:lstStyle>
           <a:p>
             <a:pPr>
+              <a:buNone/>
               <a:defRPr sz="1725" b="1">
                 <a:solidFill>
                   <a:srgbClr val="385E7D"/>
@@ -13418,9 +13807,9 @@
               </a:defRPr>
             </a:pPr>
             <a:r>
-              <a:rPr sz="1725" b="1">
-                <a:solidFill>
-                  <a:srgbClr val="385E7D"/>
+              <a:rPr sz="1800" b="1">
+                <a:solidFill>
+                  <a:srgbClr val="245487"/>
                 </a:solidFill>
                 <a:latin typeface="Hiragino Sans GB" panose="020B0300000000000000" charset="-122"/>
                 <a:ea typeface="Hiragino Sans GB" panose="020B0300000000000000" charset="-122"/>
@@ -13449,8 +13838,8 @@
         </p:nvSpPr>
         <p:spPr>
           <a:xfrm>
-            <a:off x="876300" y="5962650"/>
-            <a:ext cx="10429875" cy="57150"/>
+            <a:off x="876300" y="5905500"/>
+            <a:ext cx="10429875" cy="342900"/>
           </a:xfrm>
           <a:prstGeom prst="rect">
             <a:avLst/>
@@ -13467,7 +13856,7 @@
             <a:defPPr>
               <a:defRPr sz="1350" b="0">
                 <a:solidFill>
-                  <a:srgbClr val="24364B"/>
+                  <a:srgbClr val="1F364D"/>
                 </a:solidFill>
                 <a:latin typeface="Hiragino Sans GB" panose="020B0300000000000000" charset="-122"/>
                 <a:ea typeface="Hiragino Sans GB" panose="020B0300000000000000" charset="-122"/>
@@ -13477,6 +13866,7 @@
           </a:lstStyle>
           <a:p>
             <a:pPr>
+              <a:buNone/>
               <a:defRPr sz="1350" b="0">
                 <a:solidFill>
                   <a:srgbClr val="24364B"/>
@@ -13489,13 +13879,13 @@
             <a:r>
               <a:rPr sz="1350" b="0">
                 <a:solidFill>
-                  <a:srgbClr val="24364B"/>
+                  <a:srgbClr val="1F364D"/>
                 </a:solidFill>
                 <a:latin typeface="Hiragino Sans GB" panose="020B0300000000000000" charset="-122"/>
                 <a:ea typeface="Hiragino Sans GB" panose="020B0300000000000000" charset="-122"/>
                 <a:cs typeface="Hiragino Sans GB" panose="020B0300000000000000" charset="-122"/>
               </a:rPr>
-              <a:t>FR-01—29 均有用例承接，AT-01—17 均有追溯入口。表中是设计映射，尚无实施测试通过记录。</a:t>
+              <a:t>FR-01—29 均有用例承接，AT-01—17 均有追溯入口。这里展示设计映射，尚无测试通过记录。</a:t>
             </a:r>
             <a:endParaRPr sz="1350" b="0">
               <a:solidFill>
